--- a/deliverables/10반_황재원_너와나의인계고리-발표용.pptx
+++ b/deliverables/10반_황재원_너와나의인계고리-발표용.pptx
@@ -9443,6 +9443,72 @@
           </a:p>
         </p:txBody>
       </p:sp>
+      <p:sp>
+        <p:nvSpPr>
+          <p:cNvPr id="14" name="Shape 11"/>
+          <p:cNvSpPr/>
+          <p:nvPr/>
+        </p:nvSpPr>
+        <p:spPr>
+          <a:xfrm>
+            <a:off x="548640" y="4576572"/>
+            <a:ext cx="8046720" cy="0"/>
+          </a:xfrm>
+          <a:prstGeom prst="line">
+            <a:avLst/>
+          </a:prstGeom>
+          <a:noFill/>
+          <a:ln w="6350">
+            <a:solidFill>
+              <a:srgbClr val="E6E0D4"/>
+            </a:solidFill>
+            <a:prstDash val="solid"/>
+          </a:ln>
+        </p:spPr>
+        <p:txBody>
+          <a:bodyPr/>
+          <a:p/>
+        </p:txBody>
+      </p:sp>
+      <p:sp>
+        <p:nvSpPr>
+          <p:cNvPr id="15" name="Text 12"/>
+          <p:cNvSpPr txBox="1"/>
+          <p:nvPr/>
+        </p:nvSpPr>
+        <p:spPr>
+          <a:xfrm>
+            <a:off x="548640" y="4613148"/>
+            <a:ext cx="8046720" cy="201168"/>
+          </a:xfrm>
+          <a:prstGeom prst="rect">
+            <a:avLst/>
+          </a:prstGeom>
+          <a:noFill/>
+          <a:ln/>
+        </p:spPr>
+        <p:txBody>
+          <a:bodyPr wrap="square" lIns="0" tIns="0" rIns="0" bIns="0" rtlCol="0" anchor="ctr"/>
+          <a:lstStyle/>
+          <a:p>
+            <a:pPr indent="0" marL="0">
+              <a:buNone/>
+            </a:pPr>
+            <a:r>
+              <a:rPr lang="en-US" sz="900" dirty="0">
+                <a:solidFill>
+                  <a:srgbClr val="8A867C"/>
+                </a:solidFill>
+                <a:latin typeface="Pretendard" pitchFamily="34" charset="0"/>
+                <a:ea typeface="Pretendard" pitchFamily="34" charset="-122"/>
+                <a:cs typeface="Pretendard" pitchFamily="34" charset="-120"/>
+              </a:rPr>
+              <a:t>PK·FK 와 관계(1:N, 1:1)는 그림에, 속성 타입·unique·not null 같은 제약조건은 DBML 에. 수신 기록은 인계당 1건(unique)</a:t>
+            </a:r>
+            <a:endParaRPr lang="en-US" sz="900" dirty="0"/>
+          </a:p>
+        </p:txBody>
+      </p:sp>
     </p:spTree>
   </p:cSld>
   <p:clrMapOvr>
@@ -11559,7 +11625,7 @@
                 <a:ea typeface="Pretendard" pitchFamily="34" charset="-122"/>
                 <a:cs typeface="Pretendard" pitchFamily="34" charset="-120"/>
               </a:rPr>
-              <a:t>인계 상태는 작성 중, 전달됨, 확인됨 순서로만 간다. 되돌아가지 않는다</a:t>
+              <a:t>형식이 깨진 요청(400)은 프레임워크 기본 처리이고, 명세는 뜻이 모자란 요청을 422 로 통일했다. 인계 상태는 작성 중, 전달됨, 확인됨 순서로만 간다</a:t>
             </a:r>
             <a:endParaRPr lang="en-US" sz="900" dirty="0"/>
           </a:p>

--- a/deliverables/10반_황재원_너와나의인계고리-발표용.pptx
+++ b/deliverables/10반_황재원_너와나의인계고리-발표용.pptx
@@ -9,13 +9,19 @@
     <p:sldId id="257" r:id="rId3"/>
     <p:sldId id="258" r:id="rId4"/>
     <p:sldId id="259" r:id="rId5"/>
+    <p:sldId id="266" r:id="rId12"/>
     <p:sldId id="268" r:id="rId14"/>
     <p:sldId id="269" r:id="rId15"/>
     <p:sldId id="274" r:id="rId20"/>
     <p:sldId id="275" r:id="rId21"/>
     <p:sldId id="276" r:id="rId22"/>
     <p:sldId id="281" r:id="rId27"/>
+    <p:sldId id="282" r:id="rId28"/>
+    <p:sldId id="286" r:id="rId32"/>
+    <p:sldId id="287" r:id="rId33"/>
+    <p:sldId id="288" r:id="rId34"/>
     <p:sldId id="289" r:id="rId35"/>
+    <p:sldId id="291" r:id="rId37"/>
     <p:sldId id="292" r:id="rId38"/>
     <p:sldId id="294" r:id="rId40"/>
     <p:sldId id="295" r:id="rId41"/>
@@ -557,6 +563,94 @@
 </p:notes>
 </file>
 
+<file path=ppt/notesSlides/notesSlide11.xml><?xml version="1.0" encoding="utf-8"?>
+<p:notes xmlns:a="http://schemas.openxmlformats.org/drawingml/2006/main" xmlns:r="http://schemas.openxmlformats.org/officeDocument/2006/relationships" xmlns:p="http://schemas.openxmlformats.org/presentationml/2006/main">
+  <p:cSld>
+    <p:spTree>
+      <p:nvGrpSpPr>
+        <p:cNvPr id="1" name=""/>
+        <p:cNvGrpSpPr/>
+        <p:nvPr/>
+      </p:nvGrpSpPr>
+      <p:grpSpPr>
+        <a:xfrm>
+          <a:off x="0" y="0"/>
+          <a:ext cx="0" cy="0"/>
+          <a:chOff x="0" y="0"/>
+          <a:chExt cx="0" cy="0"/>
+        </a:xfrm>
+      </p:grpSpPr>
+      <p:sp>
+        <p:nvSpPr>
+          <p:cNvPr id="2" name="Slide Image Placeholder 1"/>
+          <p:cNvSpPr>
+            <a:spLocks noGrp="1" noRot="1" noChangeAspect="1"/>
+          </p:cNvSpPr>
+          <p:nvPr>
+            <p:ph type="sldImg"/>
+          </p:nvPr>
+        </p:nvSpPr>
+        <p:spPr/>
+      </p:sp>
+      <p:sp>
+        <p:nvSpPr>
+          <p:cNvPr id="3" name="Notes Placeholder 2"/>
+          <p:cNvSpPr>
+            <a:spLocks noGrp="1"/>
+          </p:cNvSpPr>
+          <p:nvPr>
+            <p:ph type="body" idx="1"/>
+          </p:nvPr>
+        </p:nvSpPr>
+        <p:spPr/>
+        <p:txBody>
+          <a:bodyPr/>
+          <a:lstStyle/>
+          <a:p>
+            <a:r>
+              <a:rPr lang="en-US" dirty="0"/>
+              <a:t>로그인 자체는 범위 밖. 병원 인증 시스템이 있다고 가정.</a:t>
+            </a:r>
+            <a:endParaRPr lang="en-US" dirty="0"/>
+          </a:p>
+        </p:txBody>
+      </p:sp>
+      <p:sp>
+        <p:nvSpPr>
+          <p:cNvPr id="4" name="Slide Number Placeholder 3"/>
+          <p:cNvSpPr>
+            <a:spLocks noGrp="1"/>
+          </p:cNvSpPr>
+          <p:nvPr>
+            <p:ph type="sldNum" sz="quarter" idx="10"/>
+          </p:nvPr>
+        </p:nvSpPr>
+        <p:spPr/>
+        <p:txBody>
+          <a:bodyPr/>
+          <a:lstStyle/>
+          <a:p>
+            <a:fld id="{F7021451-1387-4CA6-816F-3879F97B5CBC}" type="slidenum">
+              <a:rPr lang="en-US"/>
+              <a:t>11</a:t>
+            </a:fld>
+            <a:endParaRPr lang="en-US"/>
+          </a:p>
+        </p:txBody>
+      </p:sp>
+    </p:spTree>
+    <p:extLst>
+      <p:ext uri="{BB962C8B-B14F-4D97-AF65-F5344CB8AC3E}">
+        <p14:creationId xmlns:p14="http://schemas.microsoft.com/office/powerpoint/2010/main" val="1024086991"/>
+      </p:ext>
+    </p:extLst>
+  </p:cSld>
+  <p:clrMapOvr>
+    <a:masterClrMapping/>
+  </p:clrMapOvr>
+</p:notes>
+</file>
+
 <file path=ppt/notesSlides/notesSlide13.xml><?xml version="1.0" encoding="utf-8"?>
 <p:notes xmlns:a="http://schemas.openxmlformats.org/drawingml/2006/main" xmlns:r="http://schemas.openxmlformats.org/officeDocument/2006/relationships" xmlns:p="http://schemas.openxmlformats.org/presentationml/2006/main">
   <p:cSld>
@@ -1173,6 +1267,94 @@
 </p:notes>
 </file>
 
+<file path=ppt/notesSlides/notesSlide27.xml><?xml version="1.0" encoding="utf-8"?>
+<p:notes xmlns:a="http://schemas.openxmlformats.org/drawingml/2006/main" xmlns:r="http://schemas.openxmlformats.org/officeDocument/2006/relationships" xmlns:p="http://schemas.openxmlformats.org/presentationml/2006/main">
+  <p:cSld>
+    <p:spTree>
+      <p:nvGrpSpPr>
+        <p:cNvPr id="1" name=""/>
+        <p:cNvGrpSpPr/>
+        <p:nvPr/>
+      </p:nvGrpSpPr>
+      <p:grpSpPr>
+        <a:xfrm>
+          <a:off x="0" y="0"/>
+          <a:ext cx="0" cy="0"/>
+          <a:chOff x="0" y="0"/>
+          <a:chExt cx="0" cy="0"/>
+        </a:xfrm>
+      </p:grpSpPr>
+      <p:sp>
+        <p:nvSpPr>
+          <p:cNvPr id="2" name="Slide Image Placeholder 1"/>
+          <p:cNvSpPr>
+            <a:spLocks noGrp="1" noRot="1" noChangeAspect="1"/>
+          </p:cNvSpPr>
+          <p:nvPr>
+            <p:ph type="sldImg"/>
+          </p:nvPr>
+        </p:nvSpPr>
+        <p:spPr/>
+      </p:sp>
+      <p:sp>
+        <p:nvSpPr>
+          <p:cNvPr id="3" name="Notes Placeholder 2"/>
+          <p:cNvSpPr>
+            <a:spLocks noGrp="1"/>
+          </p:cNvSpPr>
+          <p:nvPr>
+            <p:ph type="body" idx="1"/>
+          </p:nvPr>
+        </p:nvSpPr>
+        <p:spPr/>
+        <p:txBody>
+          <a:bodyPr/>
+          <a:lstStyle/>
+          <a:p>
+            <a:r>
+              <a:rPr lang="en-US" dirty="0"/>
+              <a:t>권장 6~9개보다 많다. 팀, 인계 담당, 양식 항목이 각각 이유를 갖는다. 이유를 말할 수 있으면 개수는 문제가 아니다.</a:t>
+            </a:r>
+            <a:endParaRPr lang="en-US" dirty="0"/>
+          </a:p>
+        </p:txBody>
+      </p:sp>
+      <p:sp>
+        <p:nvSpPr>
+          <p:cNvPr id="4" name="Slide Number Placeholder 3"/>
+          <p:cNvSpPr>
+            <a:spLocks noGrp="1"/>
+          </p:cNvSpPr>
+          <p:nvPr>
+            <p:ph type="sldNum" sz="quarter" idx="10"/>
+          </p:nvPr>
+        </p:nvSpPr>
+        <p:spPr/>
+        <p:txBody>
+          <a:bodyPr/>
+          <a:lstStyle/>
+          <a:p>
+            <a:fld id="{F7021451-1387-4CA6-816F-3879F97B5CBC}" type="slidenum">
+              <a:rPr lang="en-US"/>
+              <a:t>27</a:t>
+            </a:fld>
+            <a:endParaRPr lang="en-US"/>
+          </a:p>
+        </p:txBody>
+      </p:sp>
+    </p:spTree>
+    <p:extLst>
+      <p:ext uri="{BB962C8B-B14F-4D97-AF65-F5344CB8AC3E}">
+        <p14:creationId xmlns:p14="http://schemas.microsoft.com/office/powerpoint/2010/main" val="1024086991"/>
+      </p:ext>
+    </p:extLst>
+  </p:cSld>
+  <p:clrMapOvr>
+    <a:masterClrMapping/>
+  </p:clrMapOvr>
+</p:notes>
+</file>
+
 <file path=ppt/notesSlides/notesSlide3.xml><?xml version="1.0" encoding="utf-8"?>
 <p:notes xmlns:a="http://schemas.openxmlformats.org/drawingml/2006/main" xmlns:r="http://schemas.openxmlformats.org/officeDocument/2006/relationships" xmlns:p="http://schemas.openxmlformats.org/presentationml/2006/main">
   <p:cSld>
@@ -1243,6 +1425,270 @@
             <a:fld id="{F7021451-1387-4CA6-816F-3879F97B5CBC}" type="slidenum">
               <a:rPr lang="en-US"/>
               <a:t>3</a:t>
+            </a:fld>
+            <a:endParaRPr lang="en-US"/>
+          </a:p>
+        </p:txBody>
+      </p:sp>
+    </p:spTree>
+    <p:extLst>
+      <p:ext uri="{BB962C8B-B14F-4D97-AF65-F5344CB8AC3E}">
+        <p14:creationId xmlns:p14="http://schemas.microsoft.com/office/powerpoint/2010/main" val="1024086991"/>
+      </p:ext>
+    </p:extLst>
+  </p:cSld>
+  <p:clrMapOvr>
+    <a:masterClrMapping/>
+  </p:clrMapOvr>
+</p:notes>
+</file>
+
+<file path=ppt/notesSlides/notesSlide31.xml><?xml version="1.0" encoding="utf-8"?>
+<p:notes xmlns:a="http://schemas.openxmlformats.org/drawingml/2006/main" xmlns:r="http://schemas.openxmlformats.org/officeDocument/2006/relationships" xmlns:p="http://schemas.openxmlformats.org/presentationml/2006/main">
+  <p:cSld>
+    <p:spTree>
+      <p:nvGrpSpPr>
+        <p:cNvPr id="1" name=""/>
+        <p:cNvGrpSpPr/>
+        <p:nvPr/>
+      </p:nvGrpSpPr>
+      <p:grpSpPr>
+        <a:xfrm>
+          <a:off x="0" y="0"/>
+          <a:ext cx="0" cy="0"/>
+          <a:chOff x="0" y="0"/>
+          <a:chExt cx="0" cy="0"/>
+        </a:xfrm>
+      </p:grpSpPr>
+      <p:sp>
+        <p:nvSpPr>
+          <p:cNvPr id="2" name="Slide Image Placeholder 1"/>
+          <p:cNvSpPr>
+            <a:spLocks noGrp="1" noRot="1" noChangeAspect="1"/>
+          </p:cNvSpPr>
+          <p:nvPr>
+            <p:ph type="sldImg"/>
+          </p:nvPr>
+        </p:nvSpPr>
+        <p:spPr/>
+      </p:sp>
+      <p:sp>
+        <p:nvSpPr>
+          <p:cNvPr id="3" name="Notes Placeholder 2"/>
+          <p:cNvSpPr>
+            <a:spLocks noGrp="1"/>
+          </p:cNvSpPr>
+          <p:nvPr>
+            <p:ph type="body" idx="1"/>
+          </p:nvPr>
+        </p:nvSpPr>
+        <p:spPr/>
+        <p:txBody>
+          <a:bodyPr/>
+          <a:lstStyle/>
+          <a:p>
+            <a:r>
+              <a:rPr lang="en-US" dirty="0"/>
+              <a:t>화면 11개에서 일어나는 동작 25가지를 먼저 세고, 겹치는 것을 빼 24개가 됐다.</a:t>
+            </a:r>
+            <a:endParaRPr lang="en-US" dirty="0"/>
+          </a:p>
+        </p:txBody>
+      </p:sp>
+      <p:sp>
+        <p:nvSpPr>
+          <p:cNvPr id="4" name="Slide Number Placeholder 3"/>
+          <p:cNvSpPr>
+            <a:spLocks noGrp="1"/>
+          </p:cNvSpPr>
+          <p:nvPr>
+            <p:ph type="sldNum" sz="quarter" idx="10"/>
+          </p:nvPr>
+        </p:nvSpPr>
+        <p:spPr/>
+        <p:txBody>
+          <a:bodyPr/>
+          <a:lstStyle/>
+          <a:p>
+            <a:fld id="{F7021451-1387-4CA6-816F-3879F97B5CBC}" type="slidenum">
+              <a:rPr lang="en-US"/>
+              <a:t>31</a:t>
+            </a:fld>
+            <a:endParaRPr lang="en-US"/>
+          </a:p>
+        </p:txBody>
+      </p:sp>
+    </p:spTree>
+    <p:extLst>
+      <p:ext uri="{BB962C8B-B14F-4D97-AF65-F5344CB8AC3E}">
+        <p14:creationId xmlns:p14="http://schemas.microsoft.com/office/powerpoint/2010/main" val="1024086991"/>
+      </p:ext>
+    </p:extLst>
+  </p:cSld>
+  <p:clrMapOvr>
+    <a:masterClrMapping/>
+  </p:clrMapOvr>
+</p:notes>
+</file>
+
+<file path=ppt/notesSlides/notesSlide32.xml><?xml version="1.0" encoding="utf-8"?>
+<p:notes xmlns:a="http://schemas.openxmlformats.org/drawingml/2006/main" xmlns:r="http://schemas.openxmlformats.org/officeDocument/2006/relationships" xmlns:p="http://schemas.openxmlformats.org/presentationml/2006/main">
+  <p:cSld>
+    <p:spTree>
+      <p:nvGrpSpPr>
+        <p:cNvPr id="1" name=""/>
+        <p:cNvGrpSpPr/>
+        <p:nvPr/>
+      </p:nvGrpSpPr>
+      <p:grpSpPr>
+        <a:xfrm>
+          <a:off x="0" y="0"/>
+          <a:ext cx="0" cy="0"/>
+          <a:chOff x="0" y="0"/>
+          <a:chExt cx="0" cy="0"/>
+        </a:xfrm>
+      </p:grpSpPr>
+      <p:sp>
+        <p:nvSpPr>
+          <p:cNvPr id="2" name="Slide Image Placeholder 1"/>
+          <p:cNvSpPr>
+            <a:spLocks noGrp="1" noRot="1" noChangeAspect="1"/>
+          </p:cNvSpPr>
+          <p:nvPr>
+            <p:ph type="sldImg"/>
+          </p:nvPr>
+        </p:nvSpPr>
+        <p:spPr/>
+      </p:sp>
+      <p:sp>
+        <p:nvSpPr>
+          <p:cNvPr id="3" name="Notes Placeholder 2"/>
+          <p:cNvSpPr>
+            <a:spLocks noGrp="1"/>
+          </p:cNvSpPr>
+          <p:nvPr>
+            <p:ph type="body" idx="1"/>
+          </p:nvPr>
+        </p:nvSpPr>
+        <p:spPr/>
+        <p:txBody>
+          <a:bodyPr/>
+          <a:lstStyle/>
+          <a:p>
+            <a:r>
+              <a:rPr lang="en-US" dirty="0"/>
+              <a:t>배점 20점 파트. '화면에서 세어서 만들었다'는 순서를 꼭 말한다.</a:t>
+            </a:r>
+            <a:endParaRPr lang="en-US" dirty="0"/>
+          </a:p>
+        </p:txBody>
+      </p:sp>
+      <p:sp>
+        <p:nvSpPr>
+          <p:cNvPr id="4" name="Slide Number Placeholder 3"/>
+          <p:cNvSpPr>
+            <a:spLocks noGrp="1"/>
+          </p:cNvSpPr>
+          <p:nvPr>
+            <p:ph type="sldNum" sz="quarter" idx="10"/>
+          </p:nvPr>
+        </p:nvSpPr>
+        <p:spPr/>
+        <p:txBody>
+          <a:bodyPr/>
+          <a:lstStyle/>
+          <a:p>
+            <a:fld id="{F7021451-1387-4CA6-816F-3879F97B5CBC}" type="slidenum">
+              <a:rPr lang="en-US"/>
+              <a:t>32</a:t>
+            </a:fld>
+            <a:endParaRPr lang="en-US"/>
+          </a:p>
+        </p:txBody>
+      </p:sp>
+    </p:spTree>
+    <p:extLst>
+      <p:ext uri="{BB962C8B-B14F-4D97-AF65-F5344CB8AC3E}">
+        <p14:creationId xmlns:p14="http://schemas.microsoft.com/office/powerpoint/2010/main" val="1024086991"/>
+      </p:ext>
+    </p:extLst>
+  </p:cSld>
+  <p:clrMapOvr>
+    <a:masterClrMapping/>
+  </p:clrMapOvr>
+</p:notes>
+</file>
+
+<file path=ppt/notesSlides/notesSlide33.xml><?xml version="1.0" encoding="utf-8"?>
+<p:notes xmlns:a="http://schemas.openxmlformats.org/drawingml/2006/main" xmlns:r="http://schemas.openxmlformats.org/officeDocument/2006/relationships" xmlns:p="http://schemas.openxmlformats.org/presentationml/2006/main">
+  <p:cSld>
+    <p:spTree>
+      <p:nvGrpSpPr>
+        <p:cNvPr id="1" name=""/>
+        <p:cNvGrpSpPr/>
+        <p:nvPr/>
+      </p:nvGrpSpPr>
+      <p:grpSpPr>
+        <a:xfrm>
+          <a:off x="0" y="0"/>
+          <a:ext cx="0" cy="0"/>
+          <a:chOff x="0" y="0"/>
+          <a:chExt cx="0" cy="0"/>
+        </a:xfrm>
+      </p:grpSpPr>
+      <p:sp>
+        <p:nvSpPr>
+          <p:cNvPr id="2" name="Slide Image Placeholder 1"/>
+          <p:cNvSpPr>
+            <a:spLocks noGrp="1" noRot="1" noChangeAspect="1"/>
+          </p:cNvSpPr>
+          <p:nvPr>
+            <p:ph type="sldImg"/>
+          </p:nvPr>
+        </p:nvSpPr>
+        <p:spPr/>
+      </p:sp>
+      <p:sp>
+        <p:nvSpPr>
+          <p:cNvPr id="3" name="Notes Placeholder 2"/>
+          <p:cNvSpPr>
+            <a:spLocks noGrp="1"/>
+          </p:cNvSpPr>
+          <p:nvPr>
+            <p:ph type="body" idx="1"/>
+          </p:nvPr>
+        </p:nvSpPr>
+        <p:spPr/>
+        <p:txBody>
+          <a:bodyPr/>
+          <a:lstStyle/>
+          <a:p>
+            <a:r>
+              <a:rPr lang="en-US" dirty="0"/>
+              <a:t>서버가 정하는 건 편의가 아니라 규칙을 한 곳에 두는 것.</a:t>
+            </a:r>
+            <a:endParaRPr lang="en-US" dirty="0"/>
+          </a:p>
+        </p:txBody>
+      </p:sp>
+      <p:sp>
+        <p:nvSpPr>
+          <p:cNvPr id="4" name="Slide Number Placeholder 3"/>
+          <p:cNvSpPr>
+            <a:spLocks noGrp="1"/>
+          </p:cNvSpPr>
+          <p:nvPr>
+            <p:ph type="sldNum" sz="quarter" idx="10"/>
+          </p:nvPr>
+        </p:nvSpPr>
+        <p:spPr/>
+        <p:txBody>
+          <a:bodyPr/>
+          <a:lstStyle/>
+          <a:p>
+            <a:fld id="{F7021451-1387-4CA6-816F-3879F97B5CBC}" type="slidenum">
+              <a:rPr lang="en-US"/>
+              <a:t>33</a:t>
             </a:fld>
             <a:endParaRPr lang="en-US"/>
           </a:p>
@@ -1331,6 +1777,94 @@
             <a:fld id="{F7021451-1387-4CA6-816F-3879F97B5CBC}" type="slidenum">
               <a:rPr lang="en-US"/>
               <a:t>34</a:t>
+            </a:fld>
+            <a:endParaRPr lang="en-US"/>
+          </a:p>
+        </p:txBody>
+      </p:sp>
+    </p:spTree>
+    <p:extLst>
+      <p:ext uri="{BB962C8B-B14F-4D97-AF65-F5344CB8AC3E}">
+        <p14:creationId xmlns:p14="http://schemas.microsoft.com/office/powerpoint/2010/main" val="1024086991"/>
+      </p:ext>
+    </p:extLst>
+  </p:cSld>
+  <p:clrMapOvr>
+    <a:masterClrMapping/>
+  </p:clrMapOvr>
+</p:notes>
+</file>
+
+<file path=ppt/notesSlides/notesSlide36.xml><?xml version="1.0" encoding="utf-8"?>
+<p:notes xmlns:a="http://schemas.openxmlformats.org/drawingml/2006/main" xmlns:r="http://schemas.openxmlformats.org/officeDocument/2006/relationships" xmlns:p="http://schemas.openxmlformats.org/presentationml/2006/main">
+  <p:cSld>
+    <p:spTree>
+      <p:nvGrpSpPr>
+        <p:cNvPr id="1" name=""/>
+        <p:cNvGrpSpPr/>
+        <p:nvPr/>
+      </p:nvGrpSpPr>
+      <p:grpSpPr>
+        <a:xfrm>
+          <a:off x="0" y="0"/>
+          <a:ext cx="0" cy="0"/>
+          <a:chOff x="0" y="0"/>
+          <a:chExt cx="0" cy="0"/>
+        </a:xfrm>
+      </p:grpSpPr>
+      <p:sp>
+        <p:nvSpPr>
+          <p:cNvPr id="2" name="Slide Image Placeholder 1"/>
+          <p:cNvSpPr>
+            <a:spLocks noGrp="1" noRot="1" noChangeAspect="1"/>
+          </p:cNvSpPr>
+          <p:nvPr>
+            <p:ph type="sldImg"/>
+          </p:nvPr>
+        </p:nvSpPr>
+        <p:spPr/>
+      </p:sp>
+      <p:sp>
+        <p:nvSpPr>
+          <p:cNvPr id="3" name="Notes Placeholder 2"/>
+          <p:cNvSpPr>
+            <a:spLocks noGrp="1"/>
+          </p:cNvSpPr>
+          <p:nvPr>
+            <p:ph type="body" idx="1"/>
+          </p:nvPr>
+        </p:nvSpPr>
+        <p:spPr/>
+        <p:txBody>
+          <a:bodyPr/>
+          <a:lstStyle/>
+          <a:p>
+            <a:r>
+              <a:rPr lang="en-US" dirty="0"/>
+              <a:t>한계를 먼저 말하면 질문이 줄어든다.</a:t>
+            </a:r>
+            <a:endParaRPr lang="en-US" dirty="0"/>
+          </a:p>
+        </p:txBody>
+      </p:sp>
+      <p:sp>
+        <p:nvSpPr>
+          <p:cNvPr id="4" name="Slide Number Placeholder 3"/>
+          <p:cNvSpPr>
+            <a:spLocks noGrp="1"/>
+          </p:cNvSpPr>
+          <p:nvPr>
+            <p:ph type="sldNum" sz="quarter" idx="10"/>
+          </p:nvPr>
+        </p:nvSpPr>
+        <p:spPr/>
+        <p:txBody>
+          <a:bodyPr/>
+          <a:lstStyle/>
+          <a:p>
+            <a:fld id="{F7021451-1387-4CA6-816F-3879F97B5CBC}" type="slidenum">
+              <a:rPr lang="en-US"/>
+              <a:t>36</a:t>
             </a:fld>
             <a:endParaRPr lang="en-US"/>
           </a:p>
@@ -2209,6 +2743,860 @@
 </p:sld>
 </file>
 
+<file path=ppt/slides/slide11.xml><?xml version="1.0" encoding="utf-8"?>
+<p:sld xmlns:a="http://schemas.openxmlformats.org/drawingml/2006/main" xmlns:r="http://schemas.openxmlformats.org/officeDocument/2006/relationships" xmlns:p="http://schemas.openxmlformats.org/presentationml/2006/main">
+  <p:cSld name="Slide 11">
+    <p:bg>
+      <p:bgPr>
+        <a:solidFill>
+          <a:srgbClr val="FBF8F2"/>
+        </a:solidFill>
+      </p:bgPr>
+    </p:bg>
+    <p:spTree>
+      <p:nvGrpSpPr>
+        <p:cNvPr id="1" name=""/>
+        <p:cNvGrpSpPr/>
+        <p:nvPr/>
+      </p:nvGrpSpPr>
+      <p:grpSpPr>
+        <a:xfrm>
+          <a:off x="0" y="0"/>
+          <a:ext cx="0" cy="0"/>
+          <a:chOff x="0" y="0"/>
+          <a:chExt cx="0" cy="0"/>
+        </a:xfrm>
+      </p:grpSpPr>
+      <p:sp>
+        <p:nvSpPr>
+          <p:cNvPr id="2" name="Text 0"/>
+          <p:cNvSpPr txBox="1"/>
+          <p:nvPr/>
+        </p:nvSpPr>
+        <p:spPr>
+          <a:xfrm>
+            <a:off x="8138160" y="4832604"/>
+            <a:ext cx="457200" cy="182880"/>
+          </a:xfrm>
+          <a:prstGeom prst="rect">
+            <a:avLst/>
+          </a:prstGeom>
+          <a:noFill/>
+          <a:ln/>
+        </p:spPr>
+        <p:txBody>
+          <a:bodyPr wrap="square" lIns="0" tIns="0" rIns="0" bIns="0" rtlCol="0" anchor="ctr"/>
+          <a:lstStyle/>
+          <a:p>
+            <a:pPr algn="r" indent="0" marL="0">
+              <a:buNone/>
+            </a:pPr>
+            <a:r>
+              <a:rPr lang="en-US" sz="800" dirty="0">
+                <a:solidFill>
+                  <a:srgbClr val="8A867C"/>
+                </a:solidFill>
+                <a:latin typeface="Pretendard Medium" pitchFamily="34" charset="0"/>
+                <a:ea typeface="Pretendard Medium" pitchFamily="34" charset="-122"/>
+                <a:cs typeface="Pretendard Medium" pitchFamily="34" charset="-120"/>
+              </a:rPr>
+              <a:t>5</a:t>
+            </a:r>
+            <a:endParaRPr lang="en-US" sz="800" dirty="0"/>
+          </a:p>
+        </p:txBody>
+      </p:sp>
+      <p:sp>
+        <p:nvSpPr>
+          <p:cNvPr id="3" name="Text 1"/>
+          <p:cNvSpPr txBox="1"/>
+          <p:nvPr/>
+        </p:nvSpPr>
+        <p:spPr>
+          <a:xfrm>
+            <a:off x="548640" y="4832604"/>
+            <a:ext cx="4572000" cy="182880"/>
+          </a:xfrm>
+          <a:prstGeom prst="rect">
+            <a:avLst/>
+          </a:prstGeom>
+          <a:noFill/>
+          <a:ln/>
+        </p:spPr>
+        <p:txBody>
+          <a:bodyPr wrap="square" lIns="0" tIns="0" rIns="0" bIns="0" rtlCol="0" anchor="ctr"/>
+          <a:lstStyle/>
+          <a:p>
+            <a:pPr indent="0" marL="0">
+              <a:buNone/>
+            </a:pPr>
+            <a:r>
+              <a:rPr lang="en-US" sz="800" dirty="0">
+                <a:solidFill>
+                  <a:srgbClr val="8A867C"/>
+                </a:solidFill>
+                <a:latin typeface="Pretendard Medium" pitchFamily="34" charset="0"/>
+                <a:ea typeface="Pretendard Medium" pitchFamily="34" charset="-122"/>
+                <a:cs typeface="Pretendard Medium" pitchFamily="34" charset="-120"/>
+              </a:rPr>
+              <a:t>03  누가 쓰고, 어디까지 보나</a:t>
+            </a:r>
+            <a:endParaRPr lang="en-US" sz="800" dirty="0"/>
+          </a:p>
+        </p:txBody>
+      </p:sp>
+      <p:sp>
+        <p:nvSpPr>
+          <p:cNvPr id="4" name="Text 2"/>
+          <p:cNvSpPr txBox="1"/>
+          <p:nvPr/>
+        </p:nvSpPr>
+        <p:spPr>
+          <a:xfrm>
+            <a:off x="548640" y="292608"/>
+            <a:ext cx="8046720" cy="457200"/>
+          </a:xfrm>
+          <a:prstGeom prst="rect">
+            <a:avLst/>
+          </a:prstGeom>
+          <a:noFill/>
+          <a:ln/>
+        </p:spPr>
+        <p:txBody>
+          <a:bodyPr wrap="square" lIns="0" tIns="0" rIns="0" bIns="0" rtlCol="0" anchor="ctr"/>
+          <a:lstStyle/>
+          <a:p>
+            <a:pPr indent="0" marL="0">
+              <a:buNone/>
+            </a:pPr>
+            <a:r>
+              <a:rPr lang="en-US" sz="2500" spc="-60" kern="0" dirty="0">
+                <a:solidFill>
+                  <a:srgbClr val="2A2926"/>
+                </a:solidFill>
+                <a:latin typeface="Pretendard ExtraBold" pitchFamily="34" charset="0"/>
+                <a:ea typeface="Pretendard ExtraBold" pitchFamily="34" charset="-122"/>
+                <a:cs typeface="Pretendard ExtraBold" pitchFamily="34" charset="-120"/>
+              </a:rPr>
+              <a:t>누가 쓰나</a:t>
+            </a:r>
+            <a:endParaRPr lang="en-US" sz="2500" dirty="0"/>
+          </a:p>
+        </p:txBody>
+      </p:sp>
+      <p:sp>
+        <p:nvSpPr>
+          <p:cNvPr id="5" name="Text 3"/>
+          <p:cNvSpPr txBox="1"/>
+          <p:nvPr/>
+        </p:nvSpPr>
+        <p:spPr>
+          <a:xfrm>
+            <a:off x="548640" y="804672"/>
+            <a:ext cx="8046720" cy="237744"/>
+          </a:xfrm>
+          <a:prstGeom prst="rect">
+            <a:avLst/>
+          </a:prstGeom>
+          <a:noFill/>
+          <a:ln/>
+        </p:spPr>
+        <p:txBody>
+          <a:bodyPr wrap="square" lIns="0" tIns="0" rIns="0" bIns="0" rtlCol="0" anchor="ctr"/>
+          <a:lstStyle/>
+          <a:p>
+            <a:pPr indent="0" marL="0">
+              <a:buNone/>
+            </a:pPr>
+            <a:r>
+              <a:rPr lang="en-US" sz="1200" dirty="0">
+                <a:solidFill>
+                  <a:srgbClr val="55524B"/>
+                </a:solidFill>
+                <a:latin typeface="Pretendard Light" pitchFamily="34" charset="0"/>
+                <a:ea typeface="Pretendard Light" pitchFamily="34" charset="-122"/>
+                <a:cs typeface="Pretendard Light" pitchFamily="34" charset="-120"/>
+              </a:rPr>
+              <a:t>두 사람. 다른 병동 사람은 못 들어온다</a:t>
+            </a:r>
+            <a:endParaRPr lang="en-US" sz="1200" dirty="0"/>
+          </a:p>
+        </p:txBody>
+      </p:sp>
+      <p:graphicFrame>
+        <p:nvGraphicFramePr>
+          <p:cNvPr id="12" name="Table 0"/>
+          <p:cNvGraphicFramePr>
+            <a:graphicFrameLocks noGrp="1"/>
+          </p:cNvGraphicFramePr>
+          <p:nvPr>
+            <p:extLst>
+              <p:ext uri="{D42A27DB-BD31-4B8C-83A1-F6EECF244321}">
+                <p14:modId xmlns:p14="http://schemas.microsoft.com/office/powerpoint/2010/main" val="1579011935"/>
+              </p:ext>
+            </p:extLst>
+          </p:nvPr>
+        </p:nvGraphicFramePr>
+        <p:xfrm>
+          <a:off x="548640" y="1188720"/>
+          <a:ext cx="8046720" cy="914400"/>
+        </p:xfrm>
+        <a:graphic>
+          <a:graphicData uri="http://schemas.openxmlformats.org/drawingml/2006/table">
+            <a:tbl>
+              <a:tblPr/>
+              <a:tblGrid>
+                <a:gridCol w="1371600"/>
+                <a:gridCol w="2651760"/>
+                <a:gridCol w="4023360"/>
+              </a:tblGrid>
+              <a:tr h="347472">
+                <a:tc>
+                  <a:txBody>
+                    <a:bodyPr/>
+                    <a:lstStyle/>
+                    <a:p>
+                      <a:pPr algn="l" indent="0" marL="0">
+                        <a:buNone/>
+                      </a:pPr>
+                      <a:r>
+                        <a:rPr lang="en-US" sz="950" dirty="0">
+                          <a:solidFill>
+                            <a:srgbClr val="2A2926"/>
+                          </a:solidFill>
+                          <a:latin typeface="Pretendard Medium" pitchFamily="34" charset="0"/>
+                          <a:ea typeface="Pretendard Medium" pitchFamily="34" charset="-122"/>
+                          <a:cs typeface="Pretendard Medium" pitchFamily="34" charset="-120"/>
+                        </a:rPr>
+                        <a:t>쓰는 사람</a:t>
+                      </a:r>
+                      <a:endParaRPr lang="en-US" sz="950" dirty="0">
+                        <a:latin typeface="Pretendard Medium" charset="0"/>
+                        <a:ea typeface="Pretendard Medium" charset="0"/>
+                        <a:cs typeface="Pretendard Medium" charset="0"/>
+                      </a:endParaRPr>
+                    </a:p>
+                  </a:txBody>
+                  <a:tcPr marL="101600" marR="101600" marT="76200" marB="76200" anchor="ctr">
+                    <a:lnL w="0" cap="flat" cmpd="sng" algn="ctr">
+                      <a:noFill/>
+                    </a:lnL>
+                    <a:lnR w="0" cap="flat" cmpd="sng" algn="ctr">
+                      <a:noFill/>
+                    </a:lnR>
+                    <a:lnT w="0" cap="flat" cmpd="sng" algn="ctr">
+                      <a:noFill/>
+                    </a:lnT>
+                    <a:lnB w="12700" cap="flat" cmpd="sng" algn="ctr">
+                      <a:solidFill>
+                        <a:srgbClr val="1F8A7E"/>
+                      </a:solidFill>
+                      <a:prstDash val="solid"/>
+                      <a:round/>
+                      <a:headEnd type="none" w="med" len="med"/>
+                      <a:tailEnd type="none" w="med" len="med"/>
+                    </a:lnB>
+                  </a:tcPr>
+                </a:tc>
+                <a:tc>
+                  <a:txBody>
+                    <a:bodyPr/>
+                    <a:lstStyle/>
+                    <a:p>
+                      <a:pPr algn="l" indent="0" marL="0">
+                        <a:buNone/>
+                      </a:pPr>
+                      <a:r>
+                        <a:rPr lang="en-US" sz="950" dirty="0">
+                          <a:solidFill>
+                            <a:srgbClr val="2A2926"/>
+                          </a:solidFill>
+                          <a:latin typeface="Pretendard Medium" pitchFamily="34" charset="0"/>
+                          <a:ea typeface="Pretendard Medium" pitchFamily="34" charset="-122"/>
+                          <a:cs typeface="Pretendard Medium" pitchFamily="34" charset="-120"/>
+                        </a:rPr>
+                        <a:t>볼 수 있는 것</a:t>
+                      </a:r>
+                      <a:endParaRPr lang="en-US" sz="950" dirty="0">
+                        <a:latin typeface="Pretendard Medium" charset="0"/>
+                        <a:ea typeface="Pretendard Medium" charset="0"/>
+                        <a:cs typeface="Pretendard Medium" charset="0"/>
+                      </a:endParaRPr>
+                    </a:p>
+                  </a:txBody>
+                  <a:tcPr marL="101600" marR="101600" marT="76200" marB="76200" anchor="ctr">
+                    <a:lnL w="0" cap="flat" cmpd="sng" algn="ctr">
+                      <a:noFill/>
+                    </a:lnL>
+                    <a:lnR w="0" cap="flat" cmpd="sng" algn="ctr">
+                      <a:noFill/>
+                    </a:lnR>
+                    <a:lnT w="0" cap="flat" cmpd="sng" algn="ctr">
+                      <a:noFill/>
+                    </a:lnT>
+                    <a:lnB w="12700" cap="flat" cmpd="sng" algn="ctr">
+                      <a:solidFill>
+                        <a:srgbClr val="1F8A7E"/>
+                      </a:solidFill>
+                      <a:prstDash val="solid"/>
+                      <a:round/>
+                      <a:headEnd type="none" w="med" len="med"/>
+                      <a:tailEnd type="none" w="med" len="med"/>
+                    </a:lnB>
+                  </a:tcPr>
+                </a:tc>
+                <a:tc>
+                  <a:txBody>
+                    <a:bodyPr/>
+                    <a:lstStyle/>
+                    <a:p>
+                      <a:pPr algn="l" indent="0" marL="0">
+                        <a:buNone/>
+                      </a:pPr>
+                      <a:r>
+                        <a:rPr lang="en-US" sz="950" dirty="0">
+                          <a:solidFill>
+                            <a:srgbClr val="2A2926"/>
+                          </a:solidFill>
+                          <a:latin typeface="Pretendard Medium" pitchFamily="34" charset="0"/>
+                          <a:ea typeface="Pretendard Medium" pitchFamily="34" charset="-122"/>
+                          <a:cs typeface="Pretendard Medium" pitchFamily="34" charset="-120"/>
+                        </a:rPr>
+                        <a:t>하는 일</a:t>
+                      </a:r>
+                      <a:endParaRPr lang="en-US" sz="950" dirty="0">
+                        <a:latin typeface="Pretendard Medium" charset="0"/>
+                        <a:ea typeface="Pretendard Medium" charset="0"/>
+                        <a:cs typeface="Pretendard Medium" charset="0"/>
+                      </a:endParaRPr>
+                    </a:p>
+                  </a:txBody>
+                  <a:tcPr marL="101600" marR="101600" marT="76200" marB="76200" anchor="ctr">
+                    <a:lnL w="0" cap="flat" cmpd="sng" algn="ctr">
+                      <a:noFill/>
+                    </a:lnL>
+                    <a:lnR w="0" cap="flat" cmpd="sng" algn="ctr">
+                      <a:noFill/>
+                    </a:lnR>
+                    <a:lnT w="0" cap="flat" cmpd="sng" algn="ctr">
+                      <a:noFill/>
+                    </a:lnT>
+                    <a:lnB w="12700" cap="flat" cmpd="sng" algn="ctr">
+                      <a:solidFill>
+                        <a:srgbClr val="1F8A7E"/>
+                      </a:solidFill>
+                      <a:prstDash val="solid"/>
+                      <a:round/>
+                      <a:headEnd type="none" w="med" len="med"/>
+                      <a:tailEnd type="none" w="med" len="med"/>
+                    </a:lnB>
+                  </a:tcPr>
+                </a:tc>
+              </a:tr>
+              <a:tr h="731520">
+                <a:tc>
+                  <a:txBody>
+                    <a:bodyPr/>
+                    <a:lstStyle/>
+                    <a:p>
+                      <a:pPr algn="l" indent="0" marL="0">
+                        <a:buNone/>
+                      </a:pPr>
+                      <a:r>
+                        <a:rPr lang="en-US" sz="1150" dirty="0">
+                          <a:solidFill>
+                            <a:srgbClr val="B9772E"/>
+                          </a:solidFill>
+                          <a:latin typeface="Pretendard SemiBold" pitchFamily="34" charset="0"/>
+                          <a:ea typeface="Pretendard SemiBold" pitchFamily="34" charset="-122"/>
+                          <a:cs typeface="Pretendard SemiBold" pitchFamily="34" charset="-120"/>
+                        </a:rPr>
+                        <a:t>수간호사</a:t>
+                      </a:r>
+                      <a:endParaRPr lang="en-US" sz="1150" dirty="0">
+                        <a:latin typeface="Pretendard SemiBold" charset="0"/>
+                        <a:ea typeface="Pretendard SemiBold" charset="0"/>
+                        <a:cs typeface="Pretendard SemiBold" charset="0"/>
+                      </a:endParaRPr>
+                    </a:p>
+                  </a:txBody>
+                  <a:tcPr marL="101600" marR="101600" marT="76200" marB="76200" anchor="ctr">
+                    <a:lnL w="0" cap="flat" cmpd="sng" algn="ctr">
+                      <a:noFill/>
+                    </a:lnL>
+                    <a:lnR w="0" cap="flat" cmpd="sng" algn="ctr">
+                      <a:noFill/>
+                    </a:lnR>
+                    <a:lnT w="0" cap="flat" cmpd="sng" algn="ctr">
+                      <a:noFill/>
+                    </a:lnT>
+                    <a:lnB w="6350" cap="flat" cmpd="sng" algn="ctr">
+                      <a:solidFill>
+                        <a:srgbClr val="E6E0D4"/>
+                      </a:solidFill>
+                      <a:prstDash val="solid"/>
+                      <a:round/>
+                      <a:headEnd type="none" w="med" len="med"/>
+                      <a:tailEnd type="none" w="med" len="med"/>
+                    </a:lnB>
+                  </a:tcPr>
+                </a:tc>
+                <a:tc>
+                  <a:txBody>
+                    <a:bodyPr/>
+                    <a:lstStyle/>
+                    <a:p>
+                      <a:pPr algn="l" indent="0" marL="0">
+                        <a:buNone/>
+                      </a:pPr>
+                      <a:r>
+                        <a:rPr lang="en-US" sz="1150" dirty="0">
+                          <a:solidFill>
+                            <a:srgbClr val="55524B"/>
+                          </a:solidFill>
+                          <a:latin typeface="Pretendard" pitchFamily="34" charset="0"/>
+                          <a:ea typeface="Pretendard" pitchFamily="34" charset="-122"/>
+                          <a:cs typeface="Pretendard" pitchFamily="34" charset="-120"/>
+                        </a:rPr>
+                        <a:t>자기가 맡은 병동 전체 [C]</a:t>
+                      </a:r>
+                      <a:endParaRPr lang="en-US" sz="1150" dirty="0">
+                        <a:latin typeface="Pretendard" charset="0"/>
+                        <a:ea typeface="Pretendard" charset="0"/>
+                        <a:cs typeface="Pretendard" charset="0"/>
+                      </a:endParaRPr>
+                    </a:p>
+                  </a:txBody>
+                  <a:tcPr marL="101600" marR="101600" marT="76200" marB="76200" anchor="ctr">
+                    <a:lnL w="0" cap="flat" cmpd="sng" algn="ctr">
+                      <a:noFill/>
+                    </a:lnL>
+                    <a:lnR w="0" cap="flat" cmpd="sng" algn="ctr">
+                      <a:noFill/>
+                    </a:lnR>
+                    <a:lnT w="0" cap="flat" cmpd="sng" algn="ctr">
+                      <a:noFill/>
+                    </a:lnT>
+                    <a:lnB w="6350" cap="flat" cmpd="sng" algn="ctr">
+                      <a:solidFill>
+                        <a:srgbClr val="E6E0D4"/>
+                      </a:solidFill>
+                      <a:prstDash val="solid"/>
+                      <a:round/>
+                      <a:headEnd type="none" w="med" len="med"/>
+                      <a:tailEnd type="none" w="med" len="med"/>
+                    </a:lnB>
+                  </a:tcPr>
+                </a:tc>
+                <a:tc>
+                  <a:txBody>
+                    <a:bodyPr/>
+                    <a:lstStyle/>
+                    <a:p>
+                      <a:pPr algn="l" indent="0" marL="0">
+                        <a:buNone/>
+                      </a:pPr>
+                      <a:r>
+                        <a:rPr lang="en-US" sz="1150" dirty="0">
+                          <a:solidFill>
+                            <a:srgbClr val="55524B"/>
+                          </a:solidFill>
+                          <a:latin typeface="Pretendard" pitchFamily="34" charset="0"/>
+                          <a:ea typeface="Pretendard" pitchFamily="34" charset="-122"/>
+                          <a:cs typeface="Pretendard" pitchFamily="34" charset="-120"/>
+                        </a:rPr>
+                        <a:t>근무표 등록, 그날 역할과 인계 담당 정하기, 인계 항목 정하기</a:t>
+                      </a:r>
+                      <a:endParaRPr lang="en-US" sz="1150" dirty="0">
+                        <a:latin typeface="Pretendard" charset="0"/>
+                        <a:ea typeface="Pretendard" charset="0"/>
+                        <a:cs typeface="Pretendard" charset="0"/>
+                      </a:endParaRPr>
+                    </a:p>
+                    <a:p>
+                      <a:pPr algn="l" indent="0" marL="0">
+                        <a:buNone/>
+                      </a:pPr>
+                      <a:r>
+                        <a:rPr lang="en-US" sz="1150" dirty="0">
+                          <a:solidFill>
+                            <a:srgbClr val="55524B"/>
+                          </a:solidFill>
+                          <a:latin typeface="Pretendard" pitchFamily="34" charset="0"/>
+                          <a:ea typeface="Pretendard" pitchFamily="34" charset="-122"/>
+                          <a:cs typeface="Pretendard" pitchFamily="34" charset="-120"/>
+                        </a:rPr>
+                        <a:t>결원 생기면 다시 배정, 바뀐 내역 보기</a:t>
+                      </a:r>
+                      <a:endParaRPr lang="en-US" sz="1150" dirty="0">
+                        <a:latin typeface="Pretendard" charset="0"/>
+                        <a:ea typeface="Pretendard" charset="0"/>
+                        <a:cs typeface="Pretendard" charset="0"/>
+                      </a:endParaRPr>
+                    </a:p>
+                  </a:txBody>
+                  <a:tcPr marL="101600" marR="101600" marT="76200" marB="76200" anchor="ctr">
+                    <a:lnL w="0" cap="flat" cmpd="sng" algn="ctr">
+                      <a:noFill/>
+                    </a:lnL>
+                    <a:lnR w="0" cap="flat" cmpd="sng" algn="ctr">
+                      <a:noFill/>
+                    </a:lnR>
+                    <a:lnT w="0" cap="flat" cmpd="sng" algn="ctr">
+                      <a:noFill/>
+                    </a:lnT>
+                    <a:lnB w="6350" cap="flat" cmpd="sng" algn="ctr">
+                      <a:solidFill>
+                        <a:srgbClr val="E6E0D4"/>
+                      </a:solidFill>
+                      <a:prstDash val="solid"/>
+                      <a:round/>
+                      <a:headEnd type="none" w="med" len="med"/>
+                      <a:tailEnd type="none" w="med" len="med"/>
+                    </a:lnB>
+                  </a:tcPr>
+                </a:tc>
+              </a:tr>
+              <a:tr h="731520">
+                <a:tc>
+                  <a:txBody>
+                    <a:bodyPr/>
+                    <a:lstStyle/>
+                    <a:p>
+                      <a:pPr algn="l" indent="0" marL="0">
+                        <a:buNone/>
+                      </a:pPr>
+                      <a:r>
+                        <a:rPr lang="en-US" sz="1150" dirty="0">
+                          <a:solidFill>
+                            <a:srgbClr val="1F8A7E"/>
+                          </a:solidFill>
+                          <a:latin typeface="Pretendard SemiBold" pitchFamily="34" charset="0"/>
+                          <a:ea typeface="Pretendard SemiBold" pitchFamily="34" charset="-122"/>
+                          <a:cs typeface="Pretendard SemiBold" pitchFamily="34" charset="-120"/>
+                        </a:rPr>
+                        <a:t>간호사</a:t>
+                      </a:r>
+                      <a:endParaRPr lang="en-US" sz="1150" dirty="0">
+                        <a:latin typeface="Pretendard SemiBold" charset="0"/>
+                        <a:ea typeface="Pretendard SemiBold" charset="0"/>
+                        <a:cs typeface="Pretendard SemiBold" charset="0"/>
+                      </a:endParaRPr>
+                    </a:p>
+                  </a:txBody>
+                  <a:tcPr marL="101600" marR="101600" marT="76200" marB="76200" anchor="ctr">
+                    <a:lnL w="0" cap="flat" cmpd="sng" algn="ctr">
+                      <a:noFill/>
+                    </a:lnL>
+                    <a:lnR w="0" cap="flat" cmpd="sng" algn="ctr">
+                      <a:noFill/>
+                    </a:lnR>
+                    <a:lnT w="0" cap="flat" cmpd="sng" algn="ctr">
+                      <a:noFill/>
+                    </a:lnT>
+                    <a:lnB w="6350" cap="flat" cmpd="sng" algn="ctr">
+                      <a:solidFill>
+                        <a:srgbClr val="E6E0D4"/>
+                      </a:solidFill>
+                      <a:prstDash val="solid"/>
+                      <a:round/>
+                      <a:headEnd type="none" w="med" len="med"/>
+                      <a:tailEnd type="none" w="med" len="med"/>
+                    </a:lnB>
+                  </a:tcPr>
+                </a:tc>
+                <a:tc>
+                  <a:txBody>
+                    <a:bodyPr/>
+                    <a:lstStyle/>
+                    <a:p>
+                      <a:pPr algn="l" indent="0" marL="0">
+                        <a:buNone/>
+                      </a:pPr>
+                      <a:r>
+                        <a:rPr lang="en-US" sz="1150" dirty="0">
+                          <a:solidFill>
+                            <a:srgbClr val="55524B"/>
+                          </a:solidFill>
+                          <a:latin typeface="Pretendard" pitchFamily="34" charset="0"/>
+                          <a:ea typeface="Pretendard" pitchFamily="34" charset="-122"/>
+                          <a:cs typeface="Pretendard" pitchFamily="34" charset="-120"/>
+                        </a:rPr>
+                        <a:t>내 근무와 역할, 우리 팀 환자</a:t>
+                      </a:r>
+                      <a:endParaRPr lang="en-US" sz="1150" dirty="0">
+                        <a:latin typeface="Pretendard" charset="0"/>
+                        <a:ea typeface="Pretendard" charset="0"/>
+                        <a:cs typeface="Pretendard" charset="0"/>
+                      </a:endParaRPr>
+                    </a:p>
+                    <a:p>
+                      <a:pPr algn="l" indent="0" marL="0">
+                        <a:buNone/>
+                      </a:pPr>
+                      <a:r>
+                        <a:rPr lang="en-US" sz="1150" dirty="0">
+                          <a:solidFill>
+                            <a:srgbClr val="55524B"/>
+                          </a:solidFill>
+                          <a:latin typeface="Pretendard" pitchFamily="34" charset="0"/>
+                          <a:ea typeface="Pretendard" pitchFamily="34" charset="-122"/>
+                          <a:cs typeface="Pretendard" pitchFamily="34" charset="-120"/>
+                        </a:rPr>
+                        <a:t>내가 맡은 인계</a:t>
+                      </a:r>
+                      <a:endParaRPr lang="en-US" sz="1150" dirty="0">
+                        <a:latin typeface="Pretendard" charset="0"/>
+                        <a:ea typeface="Pretendard" charset="0"/>
+                        <a:cs typeface="Pretendard" charset="0"/>
+                      </a:endParaRPr>
+                    </a:p>
+                  </a:txBody>
+                  <a:tcPr marL="101600" marR="101600" marT="76200" marB="76200" anchor="ctr">
+                    <a:lnL w="0" cap="flat" cmpd="sng" algn="ctr">
+                      <a:noFill/>
+                    </a:lnL>
+                    <a:lnR w="0" cap="flat" cmpd="sng" algn="ctr">
+                      <a:noFill/>
+                    </a:lnR>
+                    <a:lnT w="0" cap="flat" cmpd="sng" algn="ctr">
+                      <a:noFill/>
+                    </a:lnT>
+                    <a:lnB w="6350" cap="flat" cmpd="sng" algn="ctr">
+                      <a:solidFill>
+                        <a:srgbClr val="E6E0D4"/>
+                      </a:solidFill>
+                      <a:prstDash val="solid"/>
+                      <a:round/>
+                      <a:headEnd type="none" w="med" len="med"/>
+                      <a:tailEnd type="none" w="med" len="med"/>
+                    </a:lnB>
+                  </a:tcPr>
+                </a:tc>
+                <a:tc>
+                  <a:txBody>
+                    <a:bodyPr/>
+                    <a:lstStyle/>
+                    <a:p>
+                      <a:pPr algn="l" indent="0" marL="0">
+                        <a:buNone/>
+                      </a:pPr>
+                      <a:r>
+                        <a:rPr lang="en-US" sz="1150" dirty="0">
+                          <a:solidFill>
+                            <a:srgbClr val="55524B"/>
+                          </a:solidFill>
+                          <a:latin typeface="Pretendard" pitchFamily="34" charset="0"/>
+                          <a:ea typeface="Pretendard" pitchFamily="34" charset="-122"/>
+                          <a:cs typeface="Pretendard" pitchFamily="34" charset="-120"/>
+                        </a:rPr>
+                        <a:t>내 근무 확인. 차지면 인계 쓰기, 받고 확인하기</a:t>
+                      </a:r>
+                      <a:endParaRPr lang="en-US" sz="1150" dirty="0">
+                        <a:latin typeface="Pretendard" charset="0"/>
+                        <a:ea typeface="Pretendard" charset="0"/>
+                        <a:cs typeface="Pretendard" charset="0"/>
+                      </a:endParaRPr>
+                    </a:p>
+                    <a:p>
+                      <a:pPr algn="l" indent="0" marL="0">
+                        <a:buNone/>
+                      </a:pPr>
+                      <a:r>
+                        <a:rPr lang="en-US" sz="1150" dirty="0">
+                          <a:solidFill>
+                            <a:srgbClr val="55524B"/>
+                          </a:solidFill>
+                          <a:latin typeface="Pretendard" pitchFamily="34" charset="0"/>
+                          <a:ea typeface="Pretendard" pitchFamily="34" charset="-122"/>
+                          <a:cs typeface="Pretendard" pitchFamily="34" charset="-120"/>
+                        </a:rPr>
+                        <a:t>액팅이면 우리 팀 인계 읽기. 내가 주고받은 인계 보기</a:t>
+                      </a:r>
+                      <a:endParaRPr lang="en-US" sz="1150" dirty="0">
+                        <a:latin typeface="Pretendard" charset="0"/>
+                        <a:ea typeface="Pretendard" charset="0"/>
+                        <a:cs typeface="Pretendard" charset="0"/>
+                      </a:endParaRPr>
+                    </a:p>
+                  </a:txBody>
+                  <a:tcPr marL="101600" marR="101600" marT="76200" marB="76200" anchor="ctr">
+                    <a:lnL w="0" cap="flat" cmpd="sng" algn="ctr">
+                      <a:noFill/>
+                    </a:lnL>
+                    <a:lnR w="0" cap="flat" cmpd="sng" algn="ctr">
+                      <a:noFill/>
+                    </a:lnR>
+                    <a:lnT w="0" cap="flat" cmpd="sng" algn="ctr">
+                      <a:noFill/>
+                    </a:lnT>
+                    <a:lnB w="6350" cap="flat" cmpd="sng" algn="ctr">
+                      <a:solidFill>
+                        <a:srgbClr val="E6E0D4"/>
+                      </a:solidFill>
+                      <a:prstDash val="solid"/>
+                      <a:round/>
+                      <a:headEnd type="none" w="med" len="med"/>
+                      <a:tailEnd type="none" w="med" len="med"/>
+                    </a:lnB>
+                  </a:tcPr>
+                </a:tc>
+              </a:tr>
+              <a:tr h="731520">
+                <a:tc>
+                  <a:txBody>
+                    <a:bodyPr/>
+                    <a:lstStyle/>
+                    <a:p>
+                      <a:pPr algn="l" indent="0" marL="0">
+                        <a:buNone/>
+                      </a:pPr>
+                      <a:r>
+                        <a:rPr lang="en-US" sz="1150" dirty="0">
+                          <a:solidFill>
+                            <a:srgbClr val="8A867C"/>
+                          </a:solidFill>
+                          <a:latin typeface="Pretendard SemiBold" pitchFamily="34" charset="0"/>
+                          <a:ea typeface="Pretendard SemiBold" pitchFamily="34" charset="-122"/>
+                          <a:cs typeface="Pretendard SemiBold" pitchFamily="34" charset="-120"/>
+                        </a:rPr>
+                        <a:t>다른 병동 사람</a:t>
+                      </a:r>
+                      <a:endParaRPr lang="en-US" sz="1150" dirty="0">
+                        <a:latin typeface="Pretendard SemiBold" charset="0"/>
+                        <a:ea typeface="Pretendard SemiBold" charset="0"/>
+                        <a:cs typeface="Pretendard SemiBold" charset="0"/>
+                      </a:endParaRPr>
+                    </a:p>
+                  </a:txBody>
+                  <a:tcPr marL="101600" marR="101600" marT="76200" marB="76200" anchor="ctr">
+                    <a:lnL w="0" cap="flat" cmpd="sng" algn="ctr">
+                      <a:noFill/>
+                    </a:lnL>
+                    <a:lnR w="0" cap="flat" cmpd="sng" algn="ctr">
+                      <a:noFill/>
+                    </a:lnR>
+                    <a:lnT w="0" cap="flat" cmpd="sng" algn="ctr">
+                      <a:noFill/>
+                    </a:lnT>
+                    <a:lnB w="6350" cap="flat" cmpd="sng" algn="ctr">
+                      <a:solidFill>
+                        <a:srgbClr val="E6E0D4"/>
+                      </a:solidFill>
+                      <a:prstDash val="solid"/>
+                      <a:round/>
+                      <a:headEnd type="none" w="med" len="med"/>
+                      <a:tailEnd type="none" w="med" len="med"/>
+                    </a:lnB>
+                  </a:tcPr>
+                </a:tc>
+                <a:tc>
+                  <a:txBody>
+                    <a:bodyPr/>
+                    <a:lstStyle/>
+                    <a:p>
+                      <a:pPr algn="l" indent="0" marL="0">
+                        <a:buNone/>
+                      </a:pPr>
+                      <a:r>
+                        <a:rPr lang="en-US" sz="1150" dirty="0">
+                          <a:solidFill>
+                            <a:srgbClr val="55524B"/>
+                          </a:solidFill>
+                          <a:latin typeface="Pretendard" pitchFamily="34" charset="0"/>
+                          <a:ea typeface="Pretendard" pitchFamily="34" charset="-122"/>
+                          <a:cs typeface="Pretendard" pitchFamily="34" charset="-120"/>
+                        </a:rPr>
+                        <a:t>아무것도</a:t>
+                      </a:r>
+                      <a:endParaRPr lang="en-US" sz="1150" dirty="0">
+                        <a:latin typeface="Pretendard" charset="0"/>
+                        <a:ea typeface="Pretendard" charset="0"/>
+                        <a:cs typeface="Pretendard" charset="0"/>
+                      </a:endParaRPr>
+                    </a:p>
+                  </a:txBody>
+                  <a:tcPr marL="101600" marR="101600" marT="76200" marB="76200" anchor="ctr">
+                    <a:lnL w="0" cap="flat" cmpd="sng" algn="ctr">
+                      <a:noFill/>
+                    </a:lnL>
+                    <a:lnR w="0" cap="flat" cmpd="sng" algn="ctr">
+                      <a:noFill/>
+                    </a:lnR>
+                    <a:lnT w="0" cap="flat" cmpd="sng" algn="ctr">
+                      <a:noFill/>
+                    </a:lnT>
+                    <a:lnB w="6350" cap="flat" cmpd="sng" algn="ctr">
+                      <a:solidFill>
+                        <a:srgbClr val="E6E0D4"/>
+                      </a:solidFill>
+                      <a:prstDash val="solid"/>
+                      <a:round/>
+                      <a:headEnd type="none" w="med" len="med"/>
+                      <a:tailEnd type="none" w="med" len="med"/>
+                    </a:lnB>
+                  </a:tcPr>
+                </a:tc>
+                <a:tc>
+                  <a:txBody>
+                    <a:bodyPr/>
+                    <a:lstStyle/>
+                    <a:p>
+                      <a:pPr algn="l" indent="0" marL="0">
+                        <a:buNone/>
+                      </a:pPr>
+                      <a:r>
+                        <a:rPr lang="en-US" sz="1150" dirty="0">
+                          <a:solidFill>
+                            <a:srgbClr val="55524B"/>
+                          </a:solidFill>
+                          <a:latin typeface="Pretendard" pitchFamily="34" charset="0"/>
+                          <a:ea typeface="Pretendard" pitchFamily="34" charset="-122"/>
+                          <a:cs typeface="Pretendard" pitchFamily="34" charset="-120"/>
+                        </a:rPr>
+                        <a:t>막는다. "없는 것처럼"이 아니라 "권한이 없다"고 답한다(403)</a:t>
+                      </a:r>
+                      <a:endParaRPr lang="en-US" sz="1150" dirty="0">
+                        <a:latin typeface="Pretendard" charset="0"/>
+                        <a:ea typeface="Pretendard" charset="0"/>
+                        <a:cs typeface="Pretendard" charset="0"/>
+                      </a:endParaRPr>
+                    </a:p>
+                  </a:txBody>
+                  <a:tcPr marL="101600" marR="101600" marT="76200" marB="76200" anchor="ctr">
+                    <a:lnL w="0" cap="flat" cmpd="sng" algn="ctr">
+                      <a:noFill/>
+                    </a:lnL>
+                    <a:lnR w="0" cap="flat" cmpd="sng" algn="ctr">
+                      <a:noFill/>
+                    </a:lnR>
+                    <a:lnT w="0" cap="flat" cmpd="sng" algn="ctr">
+                      <a:noFill/>
+                    </a:lnT>
+                    <a:lnB w="6350" cap="flat" cmpd="sng" algn="ctr">
+                      <a:solidFill>
+                        <a:srgbClr val="E6E0D4"/>
+                      </a:solidFill>
+                      <a:prstDash val="solid"/>
+                      <a:round/>
+                      <a:headEnd type="none" w="med" len="med"/>
+                      <a:tailEnd type="none" w="med" len="med"/>
+                    </a:lnB>
+                  </a:tcPr>
+                </a:tc>
+              </a:tr>
+            </a:tbl>
+          </a:graphicData>
+        </a:graphic>
+      </p:graphicFrame>
+    </p:spTree>
+  </p:cSld>
+  <p:clrMapOvr>
+    <a:masterClrMapping/>
+  </p:clrMapOvr>
+</p:sld>
+</file>
+
 <file path=ppt/slides/slide13.xml><?xml version="1.0" encoding="utf-8"?>
 <p:sld xmlns:a="http://schemas.openxmlformats.org/drawingml/2006/main" xmlns:r="http://schemas.openxmlformats.org/officeDocument/2006/relationships" xmlns:p="http://schemas.openxmlformats.org/presentationml/2006/main">
   <p:cSld name="Slide 13">
@@ -2266,7 +3654,7 @@
                 <a:ea typeface="Pretendard Medium" pitchFamily="34" charset="-122"/>
                 <a:cs typeface="Pretendard Medium" pitchFamily="34" charset="-120"/>
               </a:rPr>
-              <a:t>5</a:t>
+              <a:t>6</a:t>
             </a:r>
             <a:endParaRPr lang="en-US" sz="800" dirty="0"/>
           </a:p>
@@ -4215,7 +5603,7 @@
                 <a:ea typeface="Pretendard Medium" pitchFamily="34" charset="-122"/>
                 <a:cs typeface="Pretendard Medium" pitchFamily="34" charset="-120"/>
               </a:rPr>
-              <a:t>6</a:t>
+              <a:t>7</a:t>
             </a:r>
             <a:endParaRPr lang="en-US" sz="800" dirty="0"/>
           </a:p>
@@ -4493,7 +5881,7 @@
                 <a:ea typeface="Pretendard Medium" pitchFamily="34" charset="-122"/>
                 <a:cs typeface="Pretendard Medium" pitchFamily="34" charset="-120"/>
               </a:rPr>
-              <a:t>7</a:t>
+              <a:t>8</a:t>
             </a:r>
             <a:endParaRPr lang="en-US" sz="800" dirty="0"/>
           </a:p>
@@ -6487,7 +7875,7 @@
                 <a:ea typeface="Pretendard Medium" pitchFamily="34" charset="-122"/>
                 <a:cs typeface="Pretendard Medium" pitchFamily="34" charset="-120"/>
               </a:rPr>
-              <a:t>8</a:t>
+              <a:t>9</a:t>
             </a:r>
             <a:endParaRPr lang="en-US" sz="800" dirty="0"/>
           </a:p>
@@ -7722,7 +9110,7 @@
                 <a:ea typeface="Pretendard Medium" pitchFamily="34" charset="-122"/>
                 <a:cs typeface="Pretendard Medium" pitchFamily="34" charset="-120"/>
               </a:rPr>
-              <a:t>9</a:t>
+              <a:t>10</a:t>
             </a:r>
             <a:endParaRPr lang="en-US" sz="800" dirty="0"/>
           </a:p>
@@ -8975,7 +10363,7 @@
                 <a:ea typeface="Pretendard Medium" pitchFamily="34" charset="-122"/>
                 <a:cs typeface="Pretendard Medium" pitchFamily="34" charset="-120"/>
               </a:rPr>
-              <a:t>10</a:t>
+              <a:t>11</a:t>
             </a:r>
             <a:endParaRPr lang="en-US" sz="800" dirty="0"/>
           </a:p>
@@ -9504,6 +10892,284 @@
                 <a:cs typeface="Pretendard" pitchFamily="34" charset="-120"/>
               </a:rPr>
               <a:t>PK·FK 와 관계(1:N, 1:1)는 그림에, 속성 타입·unique·not null 같은 제약조건은 DBML 에. 수신 기록은 인계당 1건(unique)</a:t>
+            </a:r>
+            <a:endParaRPr lang="en-US" sz="900" dirty="0"/>
+          </a:p>
+        </p:txBody>
+      </p:sp>
+    </p:spTree>
+  </p:cSld>
+  <p:clrMapOvr>
+    <a:masterClrMapping/>
+  </p:clrMapOvr>
+</p:sld>
+</file>
+
+<file path=ppt/slides/slide27.xml><?xml version="1.0" encoding="utf-8"?>
+<p:sld xmlns:a="http://schemas.openxmlformats.org/drawingml/2006/main" xmlns:r="http://schemas.openxmlformats.org/officeDocument/2006/relationships" xmlns:p="http://schemas.openxmlformats.org/presentationml/2006/main">
+  <p:cSld name="Slide 27">
+    <p:bg>
+      <p:bgPr>
+        <a:solidFill>
+          <a:srgbClr val="FBF8F2"/>
+        </a:solidFill>
+      </p:bgPr>
+    </p:bg>
+    <p:spTree>
+      <p:nvGrpSpPr>
+        <p:cNvPr id="1" name=""/>
+        <p:cNvGrpSpPr/>
+        <p:nvPr/>
+      </p:nvGrpSpPr>
+      <p:grpSpPr>
+        <a:xfrm>
+          <a:off x="0" y="0"/>
+          <a:ext cx="0" cy="0"/>
+          <a:chOff x="0" y="0"/>
+          <a:chExt cx="0" cy="0"/>
+        </a:xfrm>
+      </p:grpSpPr>
+      <p:sp>
+        <p:nvSpPr>
+          <p:cNvPr id="2" name="Text 0"/>
+          <p:cNvSpPr txBox="1"/>
+          <p:nvPr/>
+        </p:nvSpPr>
+        <p:spPr>
+          <a:xfrm>
+            <a:off x="8138160" y="4832604"/>
+            <a:ext cx="457200" cy="182880"/>
+          </a:xfrm>
+          <a:prstGeom prst="rect">
+            <a:avLst/>
+          </a:prstGeom>
+          <a:noFill/>
+          <a:ln/>
+        </p:spPr>
+        <p:txBody>
+          <a:bodyPr wrap="square" lIns="0" tIns="0" rIns="0" bIns="0" rtlCol="0" anchor="ctr"/>
+          <a:lstStyle/>
+          <a:p>
+            <a:pPr algn="r" indent="0" marL="0">
+              <a:buNone/>
+            </a:pPr>
+            <a:r>
+              <a:rPr lang="en-US" sz="800" dirty="0">
+                <a:solidFill>
+                  <a:srgbClr val="8A867C"/>
+                </a:solidFill>
+                <a:latin typeface="Pretendard Medium" pitchFamily="34" charset="0"/>
+                <a:ea typeface="Pretendard Medium" pitchFamily="34" charset="-122"/>
+                <a:cs typeface="Pretendard Medium" pitchFamily="34" charset="-120"/>
+              </a:rPr>
+              <a:t>12</a:t>
+            </a:r>
+            <a:endParaRPr lang="en-US" sz="800" dirty="0"/>
+          </a:p>
+        </p:txBody>
+      </p:sp>
+      <p:sp>
+        <p:nvSpPr>
+          <p:cNvPr id="3" name="Text 1"/>
+          <p:cNvSpPr txBox="1"/>
+          <p:nvPr/>
+        </p:nvSpPr>
+        <p:spPr>
+          <a:xfrm>
+            <a:off x="548640" y="4832604"/>
+            <a:ext cx="4572000" cy="182880"/>
+          </a:xfrm>
+          <a:prstGeom prst="rect">
+            <a:avLst/>
+          </a:prstGeom>
+          <a:noFill/>
+          <a:ln/>
+        </p:spPr>
+        <p:txBody>
+          <a:bodyPr wrap="square" lIns="0" tIns="0" rIns="0" bIns="0" rtlCol="0" anchor="ctr"/>
+          <a:lstStyle/>
+          <a:p>
+            <a:pPr indent="0" marL="0">
+              <a:buNone/>
+            </a:pPr>
+            <a:r>
+              <a:rPr lang="en-US" sz="800" dirty="0">
+                <a:solidFill>
+                  <a:srgbClr val="8A867C"/>
+                </a:solidFill>
+                <a:latin typeface="Pretendard Medium" pitchFamily="34" charset="0"/>
+                <a:ea typeface="Pretendard Medium" pitchFamily="34" charset="-122"/>
+                <a:cs typeface="Pretendard Medium" pitchFamily="34" charset="-120"/>
+              </a:rPr>
+              <a:t>06  데이터를 나눈 방법</a:t>
+            </a:r>
+            <a:endParaRPr lang="en-US" sz="800" dirty="0"/>
+          </a:p>
+        </p:txBody>
+      </p:sp>
+      <p:sp>
+        <p:nvSpPr>
+          <p:cNvPr id="4" name="Text 2"/>
+          <p:cNvSpPr txBox="1"/>
+          <p:nvPr/>
+        </p:nvSpPr>
+        <p:spPr>
+          <a:xfrm>
+            <a:off x="548640" y="292608"/>
+            <a:ext cx="8046720" cy="457200"/>
+          </a:xfrm>
+          <a:prstGeom prst="rect">
+            <a:avLst/>
+          </a:prstGeom>
+          <a:noFill/>
+          <a:ln/>
+        </p:spPr>
+        <p:txBody>
+          <a:bodyPr wrap="square" lIns="0" tIns="0" rIns="0" bIns="0" rtlCol="0" anchor="ctr"/>
+          <a:lstStyle/>
+          <a:p>
+            <a:pPr indent="0" marL="0">
+              <a:buNone/>
+            </a:pPr>
+            <a:r>
+              <a:rPr lang="en-US" sz="2500" spc="-60" kern="0" dirty="0">
+                <a:solidFill>
+                  <a:srgbClr val="2A2926"/>
+                </a:solidFill>
+                <a:latin typeface="Pretendard ExtraBold" pitchFamily="34" charset="0"/>
+                <a:ea typeface="Pretendard ExtraBold" pitchFamily="34" charset="-122"/>
+                <a:cs typeface="Pretendard ExtraBold" pitchFamily="34" charset="-120"/>
+              </a:rPr>
+              <a:t>전체 12개</a:t>
+            </a:r>
+            <a:endParaRPr lang="en-US" sz="2500" dirty="0"/>
+          </a:p>
+        </p:txBody>
+      </p:sp>
+      <p:sp>
+        <p:nvSpPr>
+          <p:cNvPr id="5" name="Text 3"/>
+          <p:cNvSpPr txBox="1"/>
+          <p:nvPr/>
+        </p:nvSpPr>
+        <p:spPr>
+          <a:xfrm>
+            <a:off x="548640" y="804672"/>
+            <a:ext cx="8046720" cy="237744"/>
+          </a:xfrm>
+          <a:prstGeom prst="rect">
+            <a:avLst/>
+          </a:prstGeom>
+          <a:noFill/>
+          <a:ln/>
+        </p:spPr>
+        <p:txBody>
+          <a:bodyPr wrap="square" lIns="0" tIns="0" rIns="0" bIns="0" rtlCol="0" anchor="ctr"/>
+          <a:lstStyle/>
+          <a:p>
+            <a:pPr indent="0" marL="0">
+              <a:buNone/>
+            </a:pPr>
+            <a:r>
+              <a:rPr lang="en-US" sz="1200" dirty="0">
+                <a:solidFill>
+                  <a:srgbClr val="55524B"/>
+                </a:solidFill>
+                <a:latin typeface="Pretendard Light" pitchFamily="34" charset="0"/>
+                <a:ea typeface="Pretendard Light" pitchFamily="34" charset="-122"/>
+                <a:cs typeface="Pretendard Light" pitchFamily="34" charset="-120"/>
+              </a:rPr>
+              <a:t>자세히 읽는 그림이 아니라 얼마나 나뉘어 있는지 보는 지도</a:t>
+            </a:r>
+            <a:endParaRPr lang="en-US" sz="1200" dirty="0"/>
+          </a:p>
+        </p:txBody>
+      </p:sp>
+      <p:pic>
+        <p:nvPicPr>
+          <p:cNvPr id="6" name="Image 0" descr="/Users/hwangjaewon/skala-workspace/skala-webservice-mini/assets/erd_full.png">    </p:cNvPr>
+          <p:cNvPicPr>
+            <a:picLocks noChangeAspect="1"/>
+          </p:cNvPicPr>
+          <p:nvPr/>
+        </p:nvPicPr>
+        <p:blipFill>
+          <a:blip r:embed="rId1"/>
+          <a:stretch>
+            <a:fillRect/>
+          </a:stretch>
+        </p:blipFill>
+        <p:spPr>
+          <a:xfrm>
+            <a:off x="548640" y="1894277"/>
+            <a:ext cx="8046720" cy="1830433"/>
+          </a:xfrm>
+          <a:prstGeom prst="rect">
+            <a:avLst/>
+          </a:prstGeom>
+        </p:spPr>
+      </p:pic>
+      <p:sp>
+        <p:nvSpPr>
+          <p:cNvPr id="7" name="Shape 4"/>
+          <p:cNvSpPr/>
+          <p:nvPr/>
+        </p:nvSpPr>
+        <p:spPr>
+          <a:xfrm>
+            <a:off x="548640" y="4576572"/>
+            <a:ext cx="8046720" cy="0"/>
+          </a:xfrm>
+          <a:prstGeom prst="line">
+            <a:avLst/>
+          </a:prstGeom>
+          <a:noFill/>
+          <a:ln w="6350">
+            <a:solidFill>
+              <a:srgbClr val="E6E0D4"/>
+            </a:solidFill>
+            <a:prstDash val="solid"/>
+          </a:ln>
+        </p:spPr>
+        <p:txBody>
+          <a:bodyPr/>
+          <a:p/>
+        </p:txBody>
+      </p:sp>
+      <p:sp>
+        <p:nvSpPr>
+          <p:cNvPr id="8" name="Text 5"/>
+          <p:cNvSpPr txBox="1"/>
+          <p:nvPr/>
+        </p:nvSpPr>
+        <p:spPr>
+          <a:xfrm>
+            <a:off x="548640" y="4613148"/>
+            <a:ext cx="8046720" cy="201168"/>
+          </a:xfrm>
+          <a:prstGeom prst="rect">
+            <a:avLst/>
+          </a:prstGeom>
+          <a:noFill/>
+          <a:ln/>
+        </p:spPr>
+        <p:txBody>
+          <a:bodyPr wrap="square" lIns="0" tIns="0" rIns="0" bIns="0" rtlCol="0" anchor="ctr"/>
+          <a:lstStyle/>
+          <a:p>
+            <a:pPr indent="0" marL="0">
+              <a:buNone/>
+            </a:pPr>
+            <a:r>
+              <a:rPr lang="en-US" sz="900" dirty="0">
+                <a:solidFill>
+                  <a:srgbClr val="8A867C"/>
+                </a:solidFill>
+                <a:latin typeface="Pretendard" pitchFamily="34" charset="0"/>
+                <a:ea typeface="Pretendard" pitchFamily="34" charset="-122"/>
+                <a:cs typeface="Pretendard" pitchFamily="34" charset="-120"/>
+              </a:rPr>
+              <a:t>12 테이블, 7 Enum, 외래키 23. 여러 대 여러로 얽히는 관계는 '인계 담당' 하나로 풀었다</a:t>
             </a:r>
             <a:endParaRPr lang="en-US" sz="900" dirty="0"/>
           </a:p>
@@ -10433,6 +12099,5138 @@
 </p:sld>
 </file>
 
+<file path=ppt/slides/slide31.xml><?xml version="1.0" encoding="utf-8"?>
+<p:sld xmlns:a="http://schemas.openxmlformats.org/drawingml/2006/main" xmlns:r="http://schemas.openxmlformats.org/officeDocument/2006/relationships" xmlns:p="http://schemas.openxmlformats.org/presentationml/2006/main">
+  <p:cSld name="Slide 31">
+    <p:bg>
+      <p:bgPr>
+        <a:solidFill>
+          <a:srgbClr val="FBF8F2"/>
+        </a:solidFill>
+      </p:bgPr>
+    </p:bg>
+    <p:spTree>
+      <p:nvGrpSpPr>
+        <p:cNvPr id="1" name=""/>
+        <p:cNvGrpSpPr/>
+        <p:nvPr/>
+      </p:nvGrpSpPr>
+      <p:grpSpPr>
+        <a:xfrm>
+          <a:off x="0" y="0"/>
+          <a:ext cx="0" cy="0"/>
+          <a:chOff x="0" y="0"/>
+          <a:chExt cx="0" cy="0"/>
+        </a:xfrm>
+      </p:grpSpPr>
+      <p:sp>
+        <p:nvSpPr>
+          <p:cNvPr id="2" name="Text 0"/>
+          <p:cNvSpPr txBox="1"/>
+          <p:nvPr/>
+        </p:nvSpPr>
+        <p:spPr>
+          <a:xfrm>
+            <a:off x="8138160" y="4832604"/>
+            <a:ext cx="457200" cy="182880"/>
+          </a:xfrm>
+          <a:prstGeom prst="rect">
+            <a:avLst/>
+          </a:prstGeom>
+          <a:noFill/>
+          <a:ln/>
+        </p:spPr>
+        <p:txBody>
+          <a:bodyPr wrap="square" lIns="0" tIns="0" rIns="0" bIns="0" rtlCol="0" anchor="ctr"/>
+          <a:lstStyle/>
+          <a:p>
+            <a:pPr algn="r" indent="0" marL="0">
+              <a:buNone/>
+            </a:pPr>
+            <a:r>
+              <a:rPr lang="en-US" sz="800" dirty="0">
+                <a:solidFill>
+                  <a:srgbClr val="8A867C"/>
+                </a:solidFill>
+                <a:latin typeface="Pretendard Medium" pitchFamily="34" charset="0"/>
+                <a:ea typeface="Pretendard Medium" pitchFamily="34" charset="-122"/>
+                <a:cs typeface="Pretendard Medium" pitchFamily="34" charset="-120"/>
+              </a:rPr>
+              <a:t>13</a:t>
+            </a:r>
+            <a:endParaRPr lang="en-US" sz="800" dirty="0"/>
+          </a:p>
+        </p:txBody>
+      </p:sp>
+      <p:sp>
+        <p:nvSpPr>
+          <p:cNvPr id="3" name="Text 1"/>
+          <p:cNvSpPr txBox="1"/>
+          <p:nvPr/>
+        </p:nvSpPr>
+        <p:spPr>
+          <a:xfrm>
+            <a:off x="548640" y="4832604"/>
+            <a:ext cx="4572000" cy="182880"/>
+          </a:xfrm>
+          <a:prstGeom prst="rect">
+            <a:avLst/>
+          </a:prstGeom>
+          <a:noFill/>
+          <a:ln/>
+        </p:spPr>
+        <p:txBody>
+          <a:bodyPr wrap="square" lIns="0" tIns="0" rIns="0" bIns="0" rtlCol="0" anchor="ctr"/>
+          <a:lstStyle/>
+          <a:p>
+            <a:pPr indent="0" marL="0">
+              <a:buNone/>
+            </a:pPr>
+            <a:r>
+              <a:rPr lang="en-US" sz="800" dirty="0">
+                <a:solidFill>
+                  <a:srgbClr val="8A867C"/>
+                </a:solidFill>
+                <a:latin typeface="Pretendard Medium" pitchFamily="34" charset="0"/>
+                <a:ea typeface="Pretendard Medium" pitchFamily="34" charset="-122"/>
+                <a:cs typeface="Pretendard Medium" pitchFamily="34" charset="-120"/>
+              </a:rPr>
+              <a:t>07  API 24개와 막는 규칙</a:t>
+            </a:r>
+            <a:endParaRPr lang="en-US" sz="800" dirty="0"/>
+          </a:p>
+        </p:txBody>
+      </p:sp>
+      <p:sp>
+        <p:nvSpPr>
+          <p:cNvPr id="4" name="Text 2"/>
+          <p:cNvSpPr txBox="1"/>
+          <p:nvPr/>
+        </p:nvSpPr>
+        <p:spPr>
+          <a:xfrm>
+            <a:off x="548640" y="292608"/>
+            <a:ext cx="8046720" cy="457200"/>
+          </a:xfrm>
+          <a:prstGeom prst="rect">
+            <a:avLst/>
+          </a:prstGeom>
+          <a:noFill/>
+          <a:ln/>
+        </p:spPr>
+        <p:txBody>
+          <a:bodyPr wrap="square" lIns="0" tIns="0" rIns="0" bIns="0" rtlCol="0" anchor="ctr"/>
+          <a:lstStyle/>
+          <a:p>
+            <a:pPr indent="0" marL="0">
+              <a:buNone/>
+            </a:pPr>
+            <a:r>
+              <a:rPr lang="en-US" sz="2500" spc="-60" kern="0" dirty="0">
+                <a:solidFill>
+                  <a:srgbClr val="2A2926"/>
+                </a:solidFill>
+                <a:latin typeface="Pretendard ExtraBold" pitchFamily="34" charset="0"/>
+                <a:ea typeface="Pretendard ExtraBold" pitchFamily="34" charset="-122"/>
+                <a:cs typeface="Pretendard ExtraBold" pitchFamily="34" charset="-120"/>
+              </a:rPr>
+              <a:t>API 명세</a:t>
+            </a:r>
+            <a:endParaRPr lang="en-US" sz="2500" dirty="0"/>
+          </a:p>
+        </p:txBody>
+      </p:sp>
+      <p:sp>
+        <p:nvSpPr>
+          <p:cNvPr id="5" name="Text 3"/>
+          <p:cNvSpPr txBox="1"/>
+          <p:nvPr/>
+        </p:nvSpPr>
+        <p:spPr>
+          <a:xfrm>
+            <a:off x="548640" y="804672"/>
+            <a:ext cx="8046720" cy="237744"/>
+          </a:xfrm>
+          <a:prstGeom prst="rect">
+            <a:avLst/>
+          </a:prstGeom>
+          <a:noFill/>
+          <a:ln/>
+        </p:spPr>
+        <p:txBody>
+          <a:bodyPr wrap="square" lIns="0" tIns="0" rIns="0" bIns="0" rtlCol="0" anchor="ctr"/>
+          <a:lstStyle/>
+          <a:p>
+            <a:pPr indent="0" marL="0">
+              <a:buNone/>
+            </a:pPr>
+            <a:r>
+              <a:rPr lang="en-US" sz="1200" dirty="0">
+                <a:solidFill>
+                  <a:srgbClr val="55524B"/>
+                </a:solidFill>
+                <a:latin typeface="Pretendard Light" pitchFamily="34" charset="0"/>
+                <a:ea typeface="Pretendard Light" pitchFamily="34" charset="-122"/>
+                <a:cs typeface="Pretendard Light" pitchFamily="34" charset="-120"/>
+              </a:rPr>
+              <a:t>24개, 주소 21개, 명세 오류 0</a:t>
+            </a:r>
+            <a:endParaRPr lang="en-US" sz="1200" dirty="0"/>
+          </a:p>
+        </p:txBody>
+      </p:sp>
+      <p:pic>
+        <p:nvPicPr>
+          <p:cNvPr id="6" name="Image 0" descr="/Users/hwangjaewon/skala-workspace/skala-webservice-mini/assets/swagger_full.png">    </p:cNvPr>
+          <p:cNvPicPr>
+            <a:picLocks noChangeAspect="1"/>
+          </p:cNvPicPr>
+          <p:nvPr/>
+        </p:nvPicPr>
+        <p:blipFill>
+          <a:blip r:embed="rId1"/>
+          <a:stretch>
+            <a:fillRect/>
+          </a:stretch>
+        </p:blipFill>
+        <p:spPr>
+          <a:xfrm>
+            <a:off x="3025140" y="1152144"/>
+            <a:ext cx="3093720" cy="3314700"/>
+          </a:xfrm>
+          <a:prstGeom prst="rect">
+            <a:avLst/>
+          </a:prstGeom>
+        </p:spPr>
+      </p:pic>
+      <p:sp>
+        <p:nvSpPr>
+          <p:cNvPr id="7" name="Shape 4"/>
+          <p:cNvSpPr/>
+          <p:nvPr/>
+        </p:nvSpPr>
+        <p:spPr>
+          <a:xfrm>
+            <a:off x="548640" y="4576572"/>
+            <a:ext cx="8046720" cy="0"/>
+          </a:xfrm>
+          <a:prstGeom prst="line">
+            <a:avLst/>
+          </a:prstGeom>
+          <a:noFill/>
+          <a:ln w="6350">
+            <a:solidFill>
+              <a:srgbClr val="E6E0D4"/>
+            </a:solidFill>
+            <a:prstDash val="solid"/>
+          </a:ln>
+        </p:spPr>
+        <p:txBody>
+          <a:bodyPr/>
+          <a:p/>
+        </p:txBody>
+      </p:sp>
+      <p:sp>
+        <p:nvSpPr>
+          <p:cNvPr id="8" name="Text 5"/>
+          <p:cNvSpPr txBox="1"/>
+          <p:nvPr/>
+        </p:nvSpPr>
+        <p:spPr>
+          <a:xfrm>
+            <a:off x="548640" y="4613148"/>
+            <a:ext cx="8046720" cy="201168"/>
+          </a:xfrm>
+          <a:prstGeom prst="rect">
+            <a:avLst/>
+          </a:prstGeom>
+          <a:noFill/>
+          <a:ln/>
+        </p:spPr>
+        <p:txBody>
+          <a:bodyPr wrap="square" lIns="0" tIns="0" rIns="0" bIns="0" rtlCol="0" anchor="ctr"/>
+          <a:lstStyle/>
+          <a:p>
+            <a:pPr indent="0" marL="0">
+              <a:buNone/>
+            </a:pPr>
+            <a:r>
+              <a:rPr lang="en-US" sz="900" dirty="0">
+                <a:solidFill>
+                  <a:srgbClr val="8A867C"/>
+                </a:solidFill>
+                <a:latin typeface="Pretendard" pitchFamily="34" charset="0"/>
+                <a:ea typeface="Pretendard" pitchFamily="34" charset="-122"/>
+                <a:cs typeface="Pretendard" pitchFamily="34" charset="-120"/>
+              </a:rPr>
+              <a:t>공통 응답 봉투·오류 형식·스키마 24개를 components 에 두고 $ref 로 164회 재사용했다. 로그인·인증은 병원 시스템 몫이라 명세에 없다</a:t>
+            </a:r>
+            <a:endParaRPr lang="en-US" sz="900" dirty="0"/>
+          </a:p>
+        </p:txBody>
+      </p:sp>
+    </p:spTree>
+  </p:cSld>
+  <p:clrMapOvr>
+    <a:masterClrMapping/>
+  </p:clrMapOvr>
+</p:sld>
+</file>
+
+<file path=ppt/slides/slide32.xml><?xml version="1.0" encoding="utf-8"?>
+<p:sld xmlns:a="http://schemas.openxmlformats.org/drawingml/2006/main" xmlns:r="http://schemas.openxmlformats.org/officeDocument/2006/relationships" xmlns:p="http://schemas.openxmlformats.org/presentationml/2006/main">
+  <p:cSld name="Slide 32">
+    <p:bg>
+      <p:bgPr>
+        <a:solidFill>
+          <a:srgbClr val="FBF8F2"/>
+        </a:solidFill>
+      </p:bgPr>
+    </p:bg>
+    <p:spTree>
+      <p:nvGrpSpPr>
+        <p:cNvPr id="1" name=""/>
+        <p:cNvGrpSpPr/>
+        <p:nvPr/>
+      </p:nvGrpSpPr>
+      <p:grpSpPr>
+        <a:xfrm>
+          <a:off x="0" y="0"/>
+          <a:ext cx="0" cy="0"/>
+          <a:chOff x="0" y="0"/>
+          <a:chExt cx="0" cy="0"/>
+        </a:xfrm>
+      </p:grpSpPr>
+      <p:sp>
+        <p:nvSpPr>
+          <p:cNvPr id="2" name="Text 0"/>
+          <p:cNvSpPr txBox="1"/>
+          <p:nvPr/>
+        </p:nvSpPr>
+        <p:spPr>
+          <a:xfrm>
+            <a:off x="8138160" y="4832604"/>
+            <a:ext cx="457200" cy="182880"/>
+          </a:xfrm>
+          <a:prstGeom prst="rect">
+            <a:avLst/>
+          </a:prstGeom>
+          <a:noFill/>
+          <a:ln/>
+        </p:spPr>
+        <p:txBody>
+          <a:bodyPr wrap="square" lIns="0" tIns="0" rIns="0" bIns="0" rtlCol="0" anchor="ctr"/>
+          <a:lstStyle/>
+          <a:p>
+            <a:pPr algn="r" indent="0" marL="0">
+              <a:buNone/>
+            </a:pPr>
+            <a:r>
+              <a:rPr lang="en-US" sz="800" dirty="0">
+                <a:solidFill>
+                  <a:srgbClr val="8A867C"/>
+                </a:solidFill>
+                <a:latin typeface="Pretendard Medium" pitchFamily="34" charset="0"/>
+                <a:ea typeface="Pretendard Medium" pitchFamily="34" charset="-122"/>
+                <a:cs typeface="Pretendard Medium" pitchFamily="34" charset="-120"/>
+              </a:rPr>
+              <a:t>14</a:t>
+            </a:r>
+            <a:endParaRPr lang="en-US" sz="800" dirty="0"/>
+          </a:p>
+        </p:txBody>
+      </p:sp>
+      <p:sp>
+        <p:nvSpPr>
+          <p:cNvPr id="3" name="Text 1"/>
+          <p:cNvSpPr txBox="1"/>
+          <p:nvPr/>
+        </p:nvSpPr>
+        <p:spPr>
+          <a:xfrm>
+            <a:off x="548640" y="4832604"/>
+            <a:ext cx="4572000" cy="182880"/>
+          </a:xfrm>
+          <a:prstGeom prst="rect">
+            <a:avLst/>
+          </a:prstGeom>
+          <a:noFill/>
+          <a:ln/>
+        </p:spPr>
+        <p:txBody>
+          <a:bodyPr wrap="square" lIns="0" tIns="0" rIns="0" bIns="0" rtlCol="0" anchor="ctr"/>
+          <a:lstStyle/>
+          <a:p>
+            <a:pPr indent="0" marL="0">
+              <a:buNone/>
+            </a:pPr>
+            <a:r>
+              <a:rPr lang="en-US" sz="800" dirty="0">
+                <a:solidFill>
+                  <a:srgbClr val="8A867C"/>
+                </a:solidFill>
+                <a:latin typeface="Pretendard Medium" pitchFamily="34" charset="0"/>
+                <a:ea typeface="Pretendard Medium" pitchFamily="34" charset="-122"/>
+                <a:cs typeface="Pretendard Medium" pitchFamily="34" charset="-120"/>
+              </a:rPr>
+              <a:t>07  API 24개와 막는 규칙</a:t>
+            </a:r>
+            <a:endParaRPr lang="en-US" sz="800" dirty="0"/>
+          </a:p>
+        </p:txBody>
+      </p:sp>
+      <p:sp>
+        <p:nvSpPr>
+          <p:cNvPr id="4" name="Text 2"/>
+          <p:cNvSpPr txBox="1"/>
+          <p:nvPr/>
+        </p:nvSpPr>
+        <p:spPr>
+          <a:xfrm>
+            <a:off x="548640" y="292608"/>
+            <a:ext cx="8046720" cy="457200"/>
+          </a:xfrm>
+          <a:prstGeom prst="rect">
+            <a:avLst/>
+          </a:prstGeom>
+          <a:noFill/>
+          <a:ln/>
+        </p:spPr>
+        <p:txBody>
+          <a:bodyPr wrap="square" lIns="0" tIns="0" rIns="0" bIns="0" rtlCol="0" anchor="ctr"/>
+          <a:lstStyle/>
+          <a:p>
+            <a:pPr indent="0" marL="0">
+              <a:buNone/>
+            </a:pPr>
+            <a:r>
+              <a:rPr lang="en-US" sz="2500" spc="-60" kern="0" dirty="0">
+                <a:solidFill>
+                  <a:srgbClr val="2A2926"/>
+                </a:solidFill>
+                <a:latin typeface="Pretendard ExtraBold" pitchFamily="34" charset="0"/>
+                <a:ea typeface="Pretendard ExtraBold" pitchFamily="34" charset="-122"/>
+                <a:cs typeface="Pretendard ExtraBold" pitchFamily="34" charset="-120"/>
+              </a:rPr>
+              <a:t>API 24개</a:t>
+            </a:r>
+            <a:endParaRPr lang="en-US" sz="2500" dirty="0"/>
+          </a:p>
+        </p:txBody>
+      </p:sp>
+      <p:sp>
+        <p:nvSpPr>
+          <p:cNvPr id="5" name="Text 3"/>
+          <p:cNvSpPr txBox="1"/>
+          <p:nvPr/>
+        </p:nvSpPr>
+        <p:spPr>
+          <a:xfrm>
+            <a:off x="548640" y="804672"/>
+            <a:ext cx="8046720" cy="237744"/>
+          </a:xfrm>
+          <a:prstGeom prst="rect">
+            <a:avLst/>
+          </a:prstGeom>
+          <a:noFill/>
+          <a:ln/>
+        </p:spPr>
+        <p:txBody>
+          <a:bodyPr wrap="square" lIns="0" tIns="0" rIns="0" bIns="0" rtlCol="0" anchor="ctr"/>
+          <a:lstStyle/>
+          <a:p>
+            <a:pPr indent="0" marL="0">
+              <a:buNone/>
+            </a:pPr>
+            <a:r>
+              <a:rPr lang="en-US" sz="1200" dirty="0">
+                <a:solidFill>
+                  <a:srgbClr val="55524B"/>
+                </a:solidFill>
+                <a:latin typeface="Pretendard Light" pitchFamily="34" charset="0"/>
+                <a:ea typeface="Pretendard Light" pitchFamily="34" charset="-122"/>
+                <a:cs typeface="Pretendard Light" pitchFamily="34" charset="-120"/>
+              </a:rPr>
+              <a:t>화면에서 보이던 주소가 그대로 명세의 주소</a:t>
+            </a:r>
+            <a:endParaRPr lang="en-US" sz="1200" dirty="0"/>
+          </a:p>
+        </p:txBody>
+      </p:sp>
+      <p:graphicFrame>
+        <p:nvGraphicFramePr>
+          <p:cNvPr id="33" name="Table 0"/>
+          <p:cNvGraphicFramePr>
+            <a:graphicFrameLocks noGrp="1"/>
+          </p:cNvGraphicFramePr>
+          <p:nvPr>
+            <p:extLst>
+              <p:ext uri="{D42A27DB-BD31-4B8C-83A1-F6EECF244321}">
+                <p14:modId xmlns:p14="http://schemas.microsoft.com/office/powerpoint/2010/main" val="1579011935"/>
+              </p:ext>
+            </p:extLst>
+          </p:nvPr>
+        </p:nvGraphicFramePr>
+        <p:xfrm>
+          <a:off x="548640" y="1170432"/>
+          <a:ext cx="3913632" cy="914400"/>
+        </p:xfrm>
+        <a:graphic>
+          <a:graphicData uri="http://schemas.openxmlformats.org/drawingml/2006/table">
+            <a:tbl>
+              <a:tblPr/>
+              <a:tblGrid>
+                <a:gridCol w="384048"/>
+                <a:gridCol w="2478024"/>
+                <a:gridCol w="1051560"/>
+              </a:tblGrid>
+              <a:tr h="0">
+                <a:tc>
+                  <a:txBody>
+                    <a:bodyPr/>
+                    <a:lstStyle/>
+                    <a:p>
+                      <a:pPr indent="0" marL="0">
+                        <a:buNone/>
+                      </a:pPr>
+                      <a:r>
+                        <a:rPr lang="en-US" sz="850" dirty="0">
+                          <a:solidFill>
+                            <a:srgbClr val="2A2926"/>
+                          </a:solidFill>
+                          <a:latin typeface="Pretendard Medium" pitchFamily="34" charset="0"/>
+                          <a:ea typeface="Pretendard Medium" pitchFamily="34" charset="-122"/>
+                          <a:cs typeface="Pretendard Medium" pitchFamily="34" charset="-120"/>
+                        </a:rPr>
+                        <a:t>화면</a:t>
+                      </a:r>
+                      <a:endParaRPr lang="en-US" sz="850" dirty="0">
+                        <a:latin typeface="Pretendard Medium" charset="0"/>
+                        <a:ea typeface="Pretendard Medium" charset="0"/>
+                        <a:cs typeface="Pretendard Medium" charset="0"/>
+                      </a:endParaRPr>
+                    </a:p>
+                  </a:txBody>
+                  <a:tcPr marL="50800" marR="50800" marT="38100" marB="38100" anchor="ctr">
+                    <a:lnL w="0" cap="flat" cmpd="sng" algn="ctr">
+                      <a:noFill/>
+                    </a:lnL>
+                    <a:lnR w="0" cap="flat" cmpd="sng" algn="ctr">
+                      <a:noFill/>
+                    </a:lnR>
+                    <a:lnT w="0" cap="flat" cmpd="sng" algn="ctr">
+                      <a:noFill/>
+                    </a:lnT>
+                    <a:lnB w="12700" cap="flat" cmpd="sng" algn="ctr">
+                      <a:solidFill>
+                        <a:srgbClr val="1F8A7E"/>
+                      </a:solidFill>
+                      <a:prstDash val="solid"/>
+                      <a:round/>
+                      <a:headEnd type="none" w="med" len="med"/>
+                      <a:tailEnd type="none" w="med" len="med"/>
+                    </a:lnB>
+                  </a:tcPr>
+                </a:tc>
+                <a:tc>
+                  <a:txBody>
+                    <a:bodyPr/>
+                    <a:lstStyle/>
+                    <a:p>
+                      <a:pPr indent="0" marL="0">
+                        <a:buNone/>
+                      </a:pPr>
+                      <a:r>
+                        <a:rPr lang="en-US" sz="850" dirty="0">
+                          <a:solidFill>
+                            <a:srgbClr val="2A2926"/>
+                          </a:solidFill>
+                          <a:latin typeface="Pretendard Medium" pitchFamily="34" charset="0"/>
+                          <a:ea typeface="Pretendard Medium" pitchFamily="34" charset="-122"/>
+                          <a:cs typeface="Pretendard Medium" pitchFamily="34" charset="-120"/>
+                        </a:rPr>
+                        <a:t>메서드와 주소</a:t>
+                      </a:r>
+                      <a:endParaRPr lang="en-US" sz="850" dirty="0">
+                        <a:latin typeface="Pretendard Medium" charset="0"/>
+                        <a:ea typeface="Pretendard Medium" charset="0"/>
+                        <a:cs typeface="Pretendard Medium" charset="0"/>
+                      </a:endParaRPr>
+                    </a:p>
+                  </a:txBody>
+                  <a:tcPr marL="50800" marR="50800" marT="38100" marB="38100" anchor="ctr">
+                    <a:lnL w="0" cap="flat" cmpd="sng" algn="ctr">
+                      <a:noFill/>
+                    </a:lnL>
+                    <a:lnR w="0" cap="flat" cmpd="sng" algn="ctr">
+                      <a:noFill/>
+                    </a:lnR>
+                    <a:lnT w="0" cap="flat" cmpd="sng" algn="ctr">
+                      <a:noFill/>
+                    </a:lnT>
+                    <a:lnB w="12700" cap="flat" cmpd="sng" algn="ctr">
+                      <a:solidFill>
+                        <a:srgbClr val="1F8A7E"/>
+                      </a:solidFill>
+                      <a:prstDash val="solid"/>
+                      <a:round/>
+                      <a:headEnd type="none" w="med" len="med"/>
+                      <a:tailEnd type="none" w="med" len="med"/>
+                    </a:lnB>
+                  </a:tcPr>
+                </a:tc>
+                <a:tc>
+                  <a:txBody>
+                    <a:bodyPr/>
+                    <a:lstStyle/>
+                    <a:p>
+                      <a:pPr indent="0" marL="0">
+                        <a:buNone/>
+                      </a:pPr>
+                      <a:r>
+                        <a:rPr lang="en-US" sz="850" dirty="0">
+                          <a:solidFill>
+                            <a:srgbClr val="2A2926"/>
+                          </a:solidFill>
+                          <a:latin typeface="Pretendard Medium" pitchFamily="34" charset="0"/>
+                          <a:ea typeface="Pretendard Medium" pitchFamily="34" charset="-122"/>
+                          <a:cs typeface="Pretendard Medium" pitchFamily="34" charset="-120"/>
+                        </a:rPr>
+                        <a:t>무엇을</a:t>
+                      </a:r>
+                      <a:endParaRPr lang="en-US" sz="850" dirty="0">
+                        <a:latin typeface="Pretendard Medium" charset="0"/>
+                        <a:ea typeface="Pretendard Medium" charset="0"/>
+                        <a:cs typeface="Pretendard Medium" charset="0"/>
+                      </a:endParaRPr>
+                    </a:p>
+                  </a:txBody>
+                  <a:tcPr marL="50800" marR="50800" marT="38100" marB="38100" anchor="ctr">
+                    <a:lnL w="0" cap="flat" cmpd="sng" algn="ctr">
+                      <a:noFill/>
+                    </a:lnL>
+                    <a:lnR w="0" cap="flat" cmpd="sng" algn="ctr">
+                      <a:noFill/>
+                    </a:lnR>
+                    <a:lnT w="0" cap="flat" cmpd="sng" algn="ctr">
+                      <a:noFill/>
+                    </a:lnT>
+                    <a:lnB w="12700" cap="flat" cmpd="sng" algn="ctr">
+                      <a:solidFill>
+                        <a:srgbClr val="1F8A7E"/>
+                      </a:solidFill>
+                      <a:prstDash val="solid"/>
+                      <a:round/>
+                      <a:headEnd type="none" w="med" len="med"/>
+                      <a:tailEnd type="none" w="med" len="med"/>
+                    </a:lnB>
+                  </a:tcPr>
+                </a:tc>
+              </a:tr>
+              <a:tr h="0">
+                <a:tc>
+                  <a:txBody>
+                    <a:bodyPr/>
+                    <a:lstStyle/>
+                    <a:p>
+                      <a:pPr algn="ctr" indent="0" marL="0">
+                        <a:buNone/>
+                      </a:pPr>
+                      <a:r>
+                        <a:rPr lang="en-US" sz="800" dirty="0">
+                          <a:solidFill>
+                            <a:srgbClr val="8A867C"/>
+                          </a:solidFill>
+                          <a:latin typeface="Pretendard Medium" pitchFamily="34" charset="0"/>
+                          <a:ea typeface="Pretendard Medium" pitchFamily="34" charset="-122"/>
+                          <a:cs typeface="Pretendard Medium" pitchFamily="34" charset="-120"/>
+                        </a:rPr>
+                        <a:t>3</a:t>
+                      </a:r>
+                      <a:endParaRPr lang="en-US" sz="800" dirty="0">
+                        <a:latin typeface="Pretendard Medium" charset="0"/>
+                        <a:ea typeface="Pretendard Medium" charset="0"/>
+                        <a:cs typeface="Pretendard Medium" charset="0"/>
+                      </a:endParaRPr>
+                    </a:p>
+                  </a:txBody>
+                  <a:tcPr marL="50800" marR="50800" marT="38100" marB="38100" anchor="ctr">
+                    <a:lnL w="0" cap="flat" cmpd="sng" algn="ctr">
+                      <a:noFill/>
+                    </a:lnL>
+                    <a:lnR w="0" cap="flat" cmpd="sng" algn="ctr">
+                      <a:noFill/>
+                    </a:lnR>
+                    <a:lnT w="0" cap="flat" cmpd="sng" algn="ctr">
+                      <a:noFill/>
+                    </a:lnT>
+                    <a:lnB w="6350" cap="flat" cmpd="sng" algn="ctr">
+                      <a:solidFill>
+                        <a:srgbClr val="E6E0D4"/>
+                      </a:solidFill>
+                      <a:prstDash val="solid"/>
+                      <a:round/>
+                      <a:headEnd type="none" w="med" len="med"/>
+                      <a:tailEnd type="none" w="med" len="med"/>
+                    </a:lnB>
+                  </a:tcPr>
+                </a:tc>
+                <a:tc>
+                  <a:txBody>
+                    <a:bodyPr/>
+                    <a:lstStyle/>
+                    <a:p>
+                      <a:pPr indent="0" marL="0">
+                        <a:buNone/>
+                      </a:pPr>
+                      <a:r>
+                        <a:rPr lang="en-US" sz="800" dirty="0">
+                          <a:solidFill>
+                            <a:srgbClr val="2A2926"/>
+                          </a:solidFill>
+                          <a:latin typeface="Menlo" pitchFamily="34" charset="0"/>
+                          <a:ea typeface="Menlo" pitchFamily="34" charset="-122"/>
+                          <a:cs typeface="Menlo" pitchFamily="34" charset="-120"/>
+                        </a:rPr>
+                        <a:t>GET  /wards/{id}/shift-assignments</a:t>
+                      </a:r>
+                      <a:endParaRPr lang="en-US" sz="800" dirty="0">
+                        <a:latin typeface="Menlo" charset="0"/>
+                        <a:ea typeface="Menlo" charset="0"/>
+                        <a:cs typeface="Menlo" charset="0"/>
+                      </a:endParaRPr>
+                    </a:p>
+                  </a:txBody>
+                  <a:tcPr marL="50800" marR="50800" marT="38100" marB="38100" anchor="ctr">
+                    <a:lnL w="0" cap="flat" cmpd="sng" algn="ctr">
+                      <a:noFill/>
+                    </a:lnL>
+                    <a:lnR w="0" cap="flat" cmpd="sng" algn="ctr">
+                      <a:noFill/>
+                    </a:lnR>
+                    <a:lnT w="0" cap="flat" cmpd="sng" algn="ctr">
+                      <a:noFill/>
+                    </a:lnT>
+                    <a:lnB w="6350" cap="flat" cmpd="sng" algn="ctr">
+                      <a:solidFill>
+                        <a:srgbClr val="E6E0D4"/>
+                      </a:solidFill>
+                      <a:prstDash val="solid"/>
+                      <a:round/>
+                      <a:headEnd type="none" w="med" len="med"/>
+                      <a:tailEnd type="none" w="med" len="med"/>
+                    </a:lnB>
+                  </a:tcPr>
+                </a:tc>
+                <a:tc>
+                  <a:txBody>
+                    <a:bodyPr/>
+                    <a:lstStyle/>
+                    <a:p>
+                      <a:pPr indent="0" marL="0">
+                        <a:buNone/>
+                      </a:pPr>
+                      <a:r>
+                        <a:rPr lang="en-US" sz="800" dirty="0">
+                          <a:solidFill>
+                            <a:srgbClr val="55524B"/>
+                          </a:solidFill>
+                          <a:latin typeface="Pretendard" pitchFamily="34" charset="0"/>
+                          <a:ea typeface="Pretendard" pitchFamily="34" charset="-122"/>
+                          <a:cs typeface="Pretendard" pitchFamily="34" charset="-120"/>
+                        </a:rPr>
+                        <a:t>근무 목록</a:t>
+                      </a:r>
+                      <a:endParaRPr lang="en-US" sz="800" dirty="0">
+                        <a:latin typeface="Pretendard" charset="0"/>
+                        <a:ea typeface="Pretendard" charset="0"/>
+                        <a:cs typeface="Pretendard" charset="0"/>
+                      </a:endParaRPr>
+                    </a:p>
+                  </a:txBody>
+                  <a:tcPr marL="50800" marR="50800" marT="38100" marB="38100" anchor="ctr">
+                    <a:lnL w="0" cap="flat" cmpd="sng" algn="ctr">
+                      <a:noFill/>
+                    </a:lnL>
+                    <a:lnR w="0" cap="flat" cmpd="sng" algn="ctr">
+                      <a:noFill/>
+                    </a:lnR>
+                    <a:lnT w="0" cap="flat" cmpd="sng" algn="ctr">
+                      <a:noFill/>
+                    </a:lnT>
+                    <a:lnB w="6350" cap="flat" cmpd="sng" algn="ctr">
+                      <a:solidFill>
+                        <a:srgbClr val="E6E0D4"/>
+                      </a:solidFill>
+                      <a:prstDash val="solid"/>
+                      <a:round/>
+                      <a:headEnd type="none" w="med" len="med"/>
+                      <a:tailEnd type="none" w="med" len="med"/>
+                    </a:lnB>
+                  </a:tcPr>
+                </a:tc>
+              </a:tr>
+              <a:tr h="0">
+                <a:tc>
+                  <a:txBody>
+                    <a:bodyPr/>
+                    <a:lstStyle/>
+                    <a:p>
+                      <a:pPr algn="ctr" indent="0" marL="0">
+                        <a:buNone/>
+                      </a:pPr>
+                      <a:r>
+                        <a:rPr lang="en-US" sz="800" dirty="0">
+                          <a:solidFill>
+                            <a:srgbClr val="8A867C"/>
+                          </a:solidFill>
+                          <a:latin typeface="Pretendard Medium" pitchFamily="34" charset="0"/>
+                          <a:ea typeface="Pretendard Medium" pitchFamily="34" charset="-122"/>
+                          <a:cs typeface="Pretendard Medium" pitchFamily="34" charset="-120"/>
+                        </a:rPr>
+                        <a:t>3</a:t>
+                      </a:r>
+                      <a:endParaRPr lang="en-US" sz="800" dirty="0">
+                        <a:latin typeface="Pretendard Medium" charset="0"/>
+                        <a:ea typeface="Pretendard Medium" charset="0"/>
+                        <a:cs typeface="Pretendard Medium" charset="0"/>
+                      </a:endParaRPr>
+                    </a:p>
+                  </a:txBody>
+                  <a:tcPr marL="50800" marR="50800" marT="38100" marB="38100" anchor="ctr">
+                    <a:lnL w="0" cap="flat" cmpd="sng" algn="ctr">
+                      <a:noFill/>
+                    </a:lnL>
+                    <a:lnR w="0" cap="flat" cmpd="sng" algn="ctr">
+                      <a:noFill/>
+                    </a:lnR>
+                    <a:lnT w="0" cap="flat" cmpd="sng" algn="ctr">
+                      <a:noFill/>
+                    </a:lnT>
+                    <a:lnB w="6350" cap="flat" cmpd="sng" algn="ctr">
+                      <a:solidFill>
+                        <a:srgbClr val="E6E0D4"/>
+                      </a:solidFill>
+                      <a:prstDash val="solid"/>
+                      <a:round/>
+                      <a:headEnd type="none" w="med" len="med"/>
+                      <a:tailEnd type="none" w="med" len="med"/>
+                    </a:lnB>
+                  </a:tcPr>
+                </a:tc>
+                <a:tc>
+                  <a:txBody>
+                    <a:bodyPr/>
+                    <a:lstStyle/>
+                    <a:p>
+                      <a:pPr indent="0" marL="0">
+                        <a:buNone/>
+                      </a:pPr>
+                      <a:r>
+                        <a:rPr lang="en-US" sz="800" dirty="0">
+                          <a:solidFill>
+                            <a:srgbClr val="2A2926"/>
+                          </a:solidFill>
+                          <a:latin typeface="Menlo" pitchFamily="34" charset="0"/>
+                          <a:ea typeface="Menlo" pitchFamily="34" charset="-122"/>
+                          <a:cs typeface="Menlo" pitchFamily="34" charset="-120"/>
+                        </a:rPr>
+                        <a:t>POST /wards/{id}/shift-assignments</a:t>
+                      </a:r>
+                      <a:endParaRPr lang="en-US" sz="800" dirty="0">
+                        <a:latin typeface="Menlo" charset="0"/>
+                        <a:ea typeface="Menlo" charset="0"/>
+                        <a:cs typeface="Menlo" charset="0"/>
+                      </a:endParaRPr>
+                    </a:p>
+                  </a:txBody>
+                  <a:tcPr marL="50800" marR="50800" marT="38100" marB="38100" anchor="ctr">
+                    <a:lnL w="0" cap="flat" cmpd="sng" algn="ctr">
+                      <a:noFill/>
+                    </a:lnL>
+                    <a:lnR w="0" cap="flat" cmpd="sng" algn="ctr">
+                      <a:noFill/>
+                    </a:lnR>
+                    <a:lnT w="0" cap="flat" cmpd="sng" algn="ctr">
+                      <a:noFill/>
+                    </a:lnT>
+                    <a:lnB w="6350" cap="flat" cmpd="sng" algn="ctr">
+                      <a:solidFill>
+                        <a:srgbClr val="E6E0D4"/>
+                      </a:solidFill>
+                      <a:prstDash val="solid"/>
+                      <a:round/>
+                      <a:headEnd type="none" w="med" len="med"/>
+                      <a:tailEnd type="none" w="med" len="med"/>
+                    </a:lnB>
+                  </a:tcPr>
+                </a:tc>
+                <a:tc>
+                  <a:txBody>
+                    <a:bodyPr/>
+                    <a:lstStyle/>
+                    <a:p>
+                      <a:pPr indent="0" marL="0">
+                        <a:buNone/>
+                      </a:pPr>
+                      <a:r>
+                        <a:rPr lang="en-US" sz="800" dirty="0">
+                          <a:solidFill>
+                            <a:srgbClr val="55524B"/>
+                          </a:solidFill>
+                          <a:latin typeface="Pretendard" pitchFamily="34" charset="0"/>
+                          <a:ea typeface="Pretendard" pitchFamily="34" charset="-122"/>
+                          <a:cs typeface="Pretendard" pitchFamily="34" charset="-120"/>
+                        </a:rPr>
+                        <a:t>근무 등록</a:t>
+                      </a:r>
+                      <a:endParaRPr lang="en-US" sz="800" dirty="0">
+                        <a:latin typeface="Pretendard" charset="0"/>
+                        <a:ea typeface="Pretendard" charset="0"/>
+                        <a:cs typeface="Pretendard" charset="0"/>
+                      </a:endParaRPr>
+                    </a:p>
+                  </a:txBody>
+                  <a:tcPr marL="50800" marR="50800" marT="38100" marB="38100" anchor="ctr">
+                    <a:lnL w="0" cap="flat" cmpd="sng" algn="ctr">
+                      <a:noFill/>
+                    </a:lnL>
+                    <a:lnR w="0" cap="flat" cmpd="sng" algn="ctr">
+                      <a:noFill/>
+                    </a:lnR>
+                    <a:lnT w="0" cap="flat" cmpd="sng" algn="ctr">
+                      <a:noFill/>
+                    </a:lnT>
+                    <a:lnB w="6350" cap="flat" cmpd="sng" algn="ctr">
+                      <a:solidFill>
+                        <a:srgbClr val="E6E0D4"/>
+                      </a:solidFill>
+                      <a:prstDash val="solid"/>
+                      <a:round/>
+                      <a:headEnd type="none" w="med" len="med"/>
+                      <a:tailEnd type="none" w="med" len="med"/>
+                    </a:lnB>
+                  </a:tcPr>
+                </a:tc>
+              </a:tr>
+              <a:tr h="0">
+                <a:tc>
+                  <a:txBody>
+                    <a:bodyPr/>
+                    <a:lstStyle/>
+                    <a:p>
+                      <a:pPr algn="ctr" indent="0" marL="0">
+                        <a:buNone/>
+                      </a:pPr>
+                      <a:r>
+                        <a:rPr lang="en-US" sz="800" dirty="0">
+                          <a:solidFill>
+                            <a:srgbClr val="8A867C"/>
+                          </a:solidFill>
+                          <a:latin typeface="Pretendard Medium" pitchFamily="34" charset="0"/>
+                          <a:ea typeface="Pretendard Medium" pitchFamily="34" charset="-122"/>
+                          <a:cs typeface="Pretendard Medium" pitchFamily="34" charset="-120"/>
+                        </a:rPr>
+                        <a:t>4</a:t>
+                      </a:r>
+                      <a:endParaRPr lang="en-US" sz="800" dirty="0">
+                        <a:latin typeface="Pretendard Medium" charset="0"/>
+                        <a:ea typeface="Pretendard Medium" charset="0"/>
+                        <a:cs typeface="Pretendard Medium" charset="0"/>
+                      </a:endParaRPr>
+                    </a:p>
+                  </a:txBody>
+                  <a:tcPr marL="50800" marR="50800" marT="38100" marB="38100" anchor="ctr">
+                    <a:lnL w="0" cap="flat" cmpd="sng" algn="ctr">
+                      <a:noFill/>
+                    </a:lnL>
+                    <a:lnR w="0" cap="flat" cmpd="sng" algn="ctr">
+                      <a:noFill/>
+                    </a:lnR>
+                    <a:lnT w="0" cap="flat" cmpd="sng" algn="ctr">
+                      <a:noFill/>
+                    </a:lnT>
+                    <a:lnB w="6350" cap="flat" cmpd="sng" algn="ctr">
+                      <a:solidFill>
+                        <a:srgbClr val="E6E0D4"/>
+                      </a:solidFill>
+                      <a:prstDash val="solid"/>
+                      <a:round/>
+                      <a:headEnd type="none" w="med" len="med"/>
+                      <a:tailEnd type="none" w="med" len="med"/>
+                    </a:lnB>
+                  </a:tcPr>
+                </a:tc>
+                <a:tc>
+                  <a:txBody>
+                    <a:bodyPr/>
+                    <a:lstStyle/>
+                    <a:p>
+                      <a:pPr indent="0" marL="0">
+                        <a:buNone/>
+                      </a:pPr>
+                      <a:r>
+                        <a:rPr lang="en-US" sz="800" dirty="0">
+                          <a:solidFill>
+                            <a:srgbClr val="2A2926"/>
+                          </a:solidFill>
+                          <a:latin typeface="Menlo" pitchFamily="34" charset="0"/>
+                          <a:ea typeface="Menlo" pitchFamily="34" charset="-122"/>
+                          <a:cs typeface="Menlo" pitchFamily="34" charset="-120"/>
+                        </a:rPr>
+                        <a:t>GET  /wards/{id}/assignment-board</a:t>
+                      </a:r>
+                      <a:endParaRPr lang="en-US" sz="800" dirty="0">
+                        <a:latin typeface="Menlo" charset="0"/>
+                        <a:ea typeface="Menlo" charset="0"/>
+                        <a:cs typeface="Menlo" charset="0"/>
+                      </a:endParaRPr>
+                    </a:p>
+                  </a:txBody>
+                  <a:tcPr marL="50800" marR="50800" marT="38100" marB="38100" anchor="ctr">
+                    <a:lnL w="0" cap="flat" cmpd="sng" algn="ctr">
+                      <a:noFill/>
+                    </a:lnL>
+                    <a:lnR w="0" cap="flat" cmpd="sng" algn="ctr">
+                      <a:noFill/>
+                    </a:lnR>
+                    <a:lnT w="0" cap="flat" cmpd="sng" algn="ctr">
+                      <a:noFill/>
+                    </a:lnT>
+                    <a:lnB w="6350" cap="flat" cmpd="sng" algn="ctr">
+                      <a:solidFill>
+                        <a:srgbClr val="E6E0D4"/>
+                      </a:solidFill>
+                      <a:prstDash val="solid"/>
+                      <a:round/>
+                      <a:headEnd type="none" w="med" len="med"/>
+                      <a:tailEnd type="none" w="med" len="med"/>
+                    </a:lnB>
+                  </a:tcPr>
+                </a:tc>
+                <a:tc>
+                  <a:txBody>
+                    <a:bodyPr/>
+                    <a:lstStyle/>
+                    <a:p>
+                      <a:pPr indent="0" marL="0">
+                        <a:buNone/>
+                      </a:pPr>
+                      <a:r>
+                        <a:rPr lang="en-US" sz="800" dirty="0">
+                          <a:solidFill>
+                            <a:srgbClr val="55524B"/>
+                          </a:solidFill>
+                          <a:latin typeface="Pretendard" pitchFamily="34" charset="0"/>
+                          <a:ea typeface="Pretendard" pitchFamily="34" charset="-122"/>
+                          <a:cs typeface="Pretendard" pitchFamily="34" charset="-120"/>
+                        </a:rPr>
+                        <a:t>배정 보드</a:t>
+                      </a:r>
+                      <a:endParaRPr lang="en-US" sz="800" dirty="0">
+                        <a:latin typeface="Pretendard" charset="0"/>
+                        <a:ea typeface="Pretendard" charset="0"/>
+                        <a:cs typeface="Pretendard" charset="0"/>
+                      </a:endParaRPr>
+                    </a:p>
+                  </a:txBody>
+                  <a:tcPr marL="50800" marR="50800" marT="38100" marB="38100" anchor="ctr">
+                    <a:lnL w="0" cap="flat" cmpd="sng" algn="ctr">
+                      <a:noFill/>
+                    </a:lnL>
+                    <a:lnR w="0" cap="flat" cmpd="sng" algn="ctr">
+                      <a:noFill/>
+                    </a:lnR>
+                    <a:lnT w="0" cap="flat" cmpd="sng" algn="ctr">
+                      <a:noFill/>
+                    </a:lnT>
+                    <a:lnB w="6350" cap="flat" cmpd="sng" algn="ctr">
+                      <a:solidFill>
+                        <a:srgbClr val="E6E0D4"/>
+                      </a:solidFill>
+                      <a:prstDash val="solid"/>
+                      <a:round/>
+                      <a:headEnd type="none" w="med" len="med"/>
+                      <a:tailEnd type="none" w="med" len="med"/>
+                    </a:lnB>
+                  </a:tcPr>
+                </a:tc>
+              </a:tr>
+              <a:tr h="0">
+                <a:tc>
+                  <a:txBody>
+                    <a:bodyPr/>
+                    <a:lstStyle/>
+                    <a:p>
+                      <a:pPr algn="ctr" indent="0" marL="0">
+                        <a:buNone/>
+                      </a:pPr>
+                      <a:r>
+                        <a:rPr lang="en-US" sz="800" dirty="0">
+                          <a:solidFill>
+                            <a:srgbClr val="8A867C"/>
+                          </a:solidFill>
+                          <a:latin typeface="Pretendard Medium" pitchFamily="34" charset="0"/>
+                          <a:ea typeface="Pretendard Medium" pitchFamily="34" charset="-122"/>
+                          <a:cs typeface="Pretendard Medium" pitchFamily="34" charset="-120"/>
+                        </a:rPr>
+                        <a:t>4</a:t>
+                      </a:r>
+                      <a:endParaRPr lang="en-US" sz="800" dirty="0">
+                        <a:latin typeface="Pretendard Medium" charset="0"/>
+                        <a:ea typeface="Pretendard Medium" charset="0"/>
+                        <a:cs typeface="Pretendard Medium" charset="0"/>
+                      </a:endParaRPr>
+                    </a:p>
+                  </a:txBody>
+                  <a:tcPr marL="50800" marR="50800" marT="38100" marB="38100" anchor="ctr">
+                    <a:lnL w="0" cap="flat" cmpd="sng" algn="ctr">
+                      <a:noFill/>
+                    </a:lnL>
+                    <a:lnR w="0" cap="flat" cmpd="sng" algn="ctr">
+                      <a:noFill/>
+                    </a:lnR>
+                    <a:lnT w="0" cap="flat" cmpd="sng" algn="ctr">
+                      <a:noFill/>
+                    </a:lnT>
+                    <a:lnB w="6350" cap="flat" cmpd="sng" algn="ctr">
+                      <a:solidFill>
+                        <a:srgbClr val="E6E0D4"/>
+                      </a:solidFill>
+                      <a:prstDash val="solid"/>
+                      <a:round/>
+                      <a:headEnd type="none" w="med" len="med"/>
+                      <a:tailEnd type="none" w="med" len="med"/>
+                    </a:lnB>
+                  </a:tcPr>
+                </a:tc>
+                <a:tc>
+                  <a:txBody>
+                    <a:bodyPr/>
+                    <a:lstStyle/>
+                    <a:p>
+                      <a:pPr indent="0" marL="0">
+                        <a:buNone/>
+                      </a:pPr>
+                      <a:r>
+                        <a:rPr lang="en-US" sz="800" dirty="0">
+                          <a:solidFill>
+                            <a:srgbClr val="2A2926"/>
+                          </a:solidFill>
+                          <a:latin typeface="Menlo" pitchFamily="34" charset="0"/>
+                          <a:ea typeface="Menlo" pitchFamily="34" charset="-122"/>
+                          <a:cs typeface="Menlo" pitchFamily="34" charset="-120"/>
+                        </a:rPr>
+                        <a:t>PATCH /shift-assignments/{id}</a:t>
+                      </a:r>
+                      <a:endParaRPr lang="en-US" sz="800" dirty="0">
+                        <a:latin typeface="Menlo" charset="0"/>
+                        <a:ea typeface="Menlo" charset="0"/>
+                        <a:cs typeface="Menlo" charset="0"/>
+                      </a:endParaRPr>
+                    </a:p>
+                  </a:txBody>
+                  <a:tcPr marL="50800" marR="50800" marT="38100" marB="38100" anchor="ctr">
+                    <a:lnL w="0" cap="flat" cmpd="sng" algn="ctr">
+                      <a:noFill/>
+                    </a:lnL>
+                    <a:lnR w="0" cap="flat" cmpd="sng" algn="ctr">
+                      <a:noFill/>
+                    </a:lnR>
+                    <a:lnT w="0" cap="flat" cmpd="sng" algn="ctr">
+                      <a:noFill/>
+                    </a:lnT>
+                    <a:lnB w="6350" cap="flat" cmpd="sng" algn="ctr">
+                      <a:solidFill>
+                        <a:srgbClr val="E6E0D4"/>
+                      </a:solidFill>
+                      <a:prstDash val="solid"/>
+                      <a:round/>
+                      <a:headEnd type="none" w="med" len="med"/>
+                      <a:tailEnd type="none" w="med" len="med"/>
+                    </a:lnB>
+                  </a:tcPr>
+                </a:tc>
+                <a:tc>
+                  <a:txBody>
+                    <a:bodyPr/>
+                    <a:lstStyle/>
+                    <a:p>
+                      <a:pPr indent="0" marL="0">
+                        <a:buNone/>
+                      </a:pPr>
+                      <a:r>
+                        <a:rPr lang="en-US" sz="800" dirty="0">
+                          <a:solidFill>
+                            <a:srgbClr val="55524B"/>
+                          </a:solidFill>
+                          <a:latin typeface="Pretendard" pitchFamily="34" charset="0"/>
+                          <a:ea typeface="Pretendard" pitchFamily="34" charset="-122"/>
+                          <a:cs typeface="Pretendard" pitchFamily="34" charset="-120"/>
+                        </a:rPr>
+                        <a:t>역할 지정</a:t>
+                      </a:r>
+                      <a:endParaRPr lang="en-US" sz="800" dirty="0">
+                        <a:latin typeface="Pretendard" charset="0"/>
+                        <a:ea typeface="Pretendard" charset="0"/>
+                        <a:cs typeface="Pretendard" charset="0"/>
+                      </a:endParaRPr>
+                    </a:p>
+                  </a:txBody>
+                  <a:tcPr marL="50800" marR="50800" marT="38100" marB="38100" anchor="ctr">
+                    <a:lnL w="0" cap="flat" cmpd="sng" algn="ctr">
+                      <a:noFill/>
+                    </a:lnL>
+                    <a:lnR w="0" cap="flat" cmpd="sng" algn="ctr">
+                      <a:noFill/>
+                    </a:lnR>
+                    <a:lnT w="0" cap="flat" cmpd="sng" algn="ctr">
+                      <a:noFill/>
+                    </a:lnT>
+                    <a:lnB w="6350" cap="flat" cmpd="sng" algn="ctr">
+                      <a:solidFill>
+                        <a:srgbClr val="E6E0D4"/>
+                      </a:solidFill>
+                      <a:prstDash val="solid"/>
+                      <a:round/>
+                      <a:headEnd type="none" w="med" len="med"/>
+                      <a:tailEnd type="none" w="med" len="med"/>
+                    </a:lnB>
+                  </a:tcPr>
+                </a:tc>
+              </a:tr>
+              <a:tr h="0">
+                <a:tc>
+                  <a:txBody>
+                    <a:bodyPr/>
+                    <a:lstStyle/>
+                    <a:p>
+                      <a:pPr algn="ctr" indent="0" marL="0">
+                        <a:buNone/>
+                      </a:pPr>
+                      <a:r>
+                        <a:rPr lang="en-US" sz="800" dirty="0">
+                          <a:solidFill>
+                            <a:srgbClr val="8A867C"/>
+                          </a:solidFill>
+                          <a:latin typeface="Pretendard Medium" pitchFamily="34" charset="0"/>
+                          <a:ea typeface="Pretendard Medium" pitchFamily="34" charset="-122"/>
+                          <a:cs typeface="Pretendard Medium" pitchFamily="34" charset="-120"/>
+                        </a:rPr>
+                        <a:t>4</a:t>
+                      </a:r>
+                      <a:endParaRPr lang="en-US" sz="800" dirty="0">
+                        <a:latin typeface="Pretendard Medium" charset="0"/>
+                        <a:ea typeface="Pretendard Medium" charset="0"/>
+                        <a:cs typeface="Pretendard Medium" charset="0"/>
+                      </a:endParaRPr>
+                    </a:p>
+                  </a:txBody>
+                  <a:tcPr marL="50800" marR="50800" marT="38100" marB="38100" anchor="ctr">
+                    <a:lnL w="0" cap="flat" cmpd="sng" algn="ctr">
+                      <a:noFill/>
+                    </a:lnL>
+                    <a:lnR w="0" cap="flat" cmpd="sng" algn="ctr">
+                      <a:noFill/>
+                    </a:lnR>
+                    <a:lnT w="0" cap="flat" cmpd="sng" algn="ctr">
+                      <a:noFill/>
+                    </a:lnT>
+                    <a:lnB w="6350" cap="flat" cmpd="sng" algn="ctr">
+                      <a:solidFill>
+                        <a:srgbClr val="E6E0D4"/>
+                      </a:solidFill>
+                      <a:prstDash val="solid"/>
+                      <a:round/>
+                      <a:headEnd type="none" w="med" len="med"/>
+                      <a:tailEnd type="none" w="med" len="med"/>
+                    </a:lnB>
+                  </a:tcPr>
+                </a:tc>
+                <a:tc>
+                  <a:txBody>
+                    <a:bodyPr/>
+                    <a:lstStyle/>
+                    <a:p>
+                      <a:pPr indent="0" marL="0">
+                        <a:buNone/>
+                      </a:pPr>
+                      <a:r>
+                        <a:rPr lang="en-US" sz="800" dirty="0">
+                          <a:solidFill>
+                            <a:srgbClr val="2A2926"/>
+                          </a:solidFill>
+                          <a:latin typeface="Menlo" pitchFamily="34" charset="0"/>
+                          <a:ea typeface="Menlo" pitchFamily="34" charset="-122"/>
+                          <a:cs typeface="Menlo" pitchFamily="34" charset="-120"/>
+                        </a:rPr>
+                        <a:t>POST /…/handover-assignments</a:t>
+                      </a:r>
+                      <a:endParaRPr lang="en-US" sz="800" dirty="0">
+                        <a:latin typeface="Menlo" charset="0"/>
+                        <a:ea typeface="Menlo" charset="0"/>
+                        <a:cs typeface="Menlo" charset="0"/>
+                      </a:endParaRPr>
+                    </a:p>
+                  </a:txBody>
+                  <a:tcPr marL="50800" marR="50800" marT="38100" marB="38100" anchor="ctr">
+                    <a:lnL w="0" cap="flat" cmpd="sng" algn="ctr">
+                      <a:noFill/>
+                    </a:lnL>
+                    <a:lnR w="0" cap="flat" cmpd="sng" algn="ctr">
+                      <a:noFill/>
+                    </a:lnR>
+                    <a:lnT w="0" cap="flat" cmpd="sng" algn="ctr">
+                      <a:noFill/>
+                    </a:lnT>
+                    <a:lnB w="6350" cap="flat" cmpd="sng" algn="ctr">
+                      <a:solidFill>
+                        <a:srgbClr val="E6E0D4"/>
+                      </a:solidFill>
+                      <a:prstDash val="solid"/>
+                      <a:round/>
+                      <a:headEnd type="none" w="med" len="med"/>
+                      <a:tailEnd type="none" w="med" len="med"/>
+                    </a:lnB>
+                  </a:tcPr>
+                </a:tc>
+                <a:tc>
+                  <a:txBody>
+                    <a:bodyPr/>
+                    <a:lstStyle/>
+                    <a:p>
+                      <a:pPr indent="0" marL="0">
+                        <a:buNone/>
+                      </a:pPr>
+                      <a:r>
+                        <a:rPr lang="en-US" sz="800" dirty="0">
+                          <a:solidFill>
+                            <a:srgbClr val="55524B"/>
+                          </a:solidFill>
+                          <a:latin typeface="Pretendard" pitchFamily="34" charset="0"/>
+                          <a:ea typeface="Pretendard" pitchFamily="34" charset="-122"/>
+                          <a:cs typeface="Pretendard" pitchFamily="34" charset="-120"/>
+                        </a:rPr>
+                        <a:t>인계 담당 지정</a:t>
+                      </a:r>
+                      <a:endParaRPr lang="en-US" sz="800" dirty="0">
+                        <a:latin typeface="Pretendard" charset="0"/>
+                        <a:ea typeface="Pretendard" charset="0"/>
+                        <a:cs typeface="Pretendard" charset="0"/>
+                      </a:endParaRPr>
+                    </a:p>
+                  </a:txBody>
+                  <a:tcPr marL="50800" marR="50800" marT="38100" marB="38100" anchor="ctr">
+                    <a:lnL w="0" cap="flat" cmpd="sng" algn="ctr">
+                      <a:noFill/>
+                    </a:lnL>
+                    <a:lnR w="0" cap="flat" cmpd="sng" algn="ctr">
+                      <a:noFill/>
+                    </a:lnR>
+                    <a:lnT w="0" cap="flat" cmpd="sng" algn="ctr">
+                      <a:noFill/>
+                    </a:lnT>
+                    <a:lnB w="6350" cap="flat" cmpd="sng" algn="ctr">
+                      <a:solidFill>
+                        <a:srgbClr val="E6E0D4"/>
+                      </a:solidFill>
+                      <a:prstDash val="solid"/>
+                      <a:round/>
+                      <a:headEnd type="none" w="med" len="med"/>
+                      <a:tailEnd type="none" w="med" len="med"/>
+                    </a:lnB>
+                  </a:tcPr>
+                </a:tc>
+              </a:tr>
+              <a:tr h="0">
+                <a:tc>
+                  <a:txBody>
+                    <a:bodyPr/>
+                    <a:lstStyle/>
+                    <a:p>
+                      <a:pPr algn="ctr" indent="0" marL="0">
+                        <a:buNone/>
+                      </a:pPr>
+                      <a:r>
+                        <a:rPr lang="en-US" sz="800" dirty="0">
+                          <a:solidFill>
+                            <a:srgbClr val="8A867C"/>
+                          </a:solidFill>
+                          <a:latin typeface="Pretendard Medium" pitchFamily="34" charset="0"/>
+                          <a:ea typeface="Pretendard Medium" pitchFamily="34" charset="-122"/>
+                          <a:cs typeface="Pretendard Medium" pitchFamily="34" charset="-120"/>
+                        </a:rPr>
+                        <a:t>5</a:t>
+                      </a:r>
+                      <a:endParaRPr lang="en-US" sz="800" dirty="0">
+                        <a:latin typeface="Pretendard Medium" charset="0"/>
+                        <a:ea typeface="Pretendard Medium" charset="0"/>
+                        <a:cs typeface="Pretendard Medium" charset="0"/>
+                      </a:endParaRPr>
+                    </a:p>
+                  </a:txBody>
+                  <a:tcPr marL="50800" marR="50800" marT="38100" marB="38100" anchor="ctr">
+                    <a:lnL w="0" cap="flat" cmpd="sng" algn="ctr">
+                      <a:noFill/>
+                    </a:lnL>
+                    <a:lnR w="0" cap="flat" cmpd="sng" algn="ctr">
+                      <a:noFill/>
+                    </a:lnR>
+                    <a:lnT w="0" cap="flat" cmpd="sng" algn="ctr">
+                      <a:noFill/>
+                    </a:lnT>
+                    <a:lnB w="6350" cap="flat" cmpd="sng" algn="ctr">
+                      <a:solidFill>
+                        <a:srgbClr val="E6E0D4"/>
+                      </a:solidFill>
+                      <a:prstDash val="solid"/>
+                      <a:round/>
+                      <a:headEnd type="none" w="med" len="med"/>
+                      <a:tailEnd type="none" w="med" len="med"/>
+                    </a:lnB>
+                  </a:tcPr>
+                </a:tc>
+                <a:tc>
+                  <a:txBody>
+                    <a:bodyPr/>
+                    <a:lstStyle/>
+                    <a:p>
+                      <a:pPr indent="0" marL="0">
+                        <a:buNone/>
+                      </a:pPr>
+                      <a:r>
+                        <a:rPr lang="en-US" sz="800" dirty="0">
+                          <a:solidFill>
+                            <a:srgbClr val="2A2926"/>
+                          </a:solidFill>
+                          <a:latin typeface="Menlo" pitchFamily="34" charset="0"/>
+                          <a:ea typeface="Menlo" pitchFamily="34" charset="-122"/>
+                          <a:cs typeface="Menlo" pitchFamily="34" charset="-120"/>
+                        </a:rPr>
+                        <a:t>GET  /wards/{id}/handover-template-items</a:t>
+                      </a:r>
+                      <a:endParaRPr lang="en-US" sz="800" dirty="0">
+                        <a:latin typeface="Menlo" charset="0"/>
+                        <a:ea typeface="Menlo" charset="0"/>
+                        <a:cs typeface="Menlo" charset="0"/>
+                      </a:endParaRPr>
+                    </a:p>
+                  </a:txBody>
+                  <a:tcPr marL="50800" marR="50800" marT="38100" marB="38100" anchor="ctr">
+                    <a:lnL w="0" cap="flat" cmpd="sng" algn="ctr">
+                      <a:noFill/>
+                    </a:lnL>
+                    <a:lnR w="0" cap="flat" cmpd="sng" algn="ctr">
+                      <a:noFill/>
+                    </a:lnR>
+                    <a:lnT w="0" cap="flat" cmpd="sng" algn="ctr">
+                      <a:noFill/>
+                    </a:lnT>
+                    <a:lnB w="6350" cap="flat" cmpd="sng" algn="ctr">
+                      <a:solidFill>
+                        <a:srgbClr val="E6E0D4"/>
+                      </a:solidFill>
+                      <a:prstDash val="solid"/>
+                      <a:round/>
+                      <a:headEnd type="none" w="med" len="med"/>
+                      <a:tailEnd type="none" w="med" len="med"/>
+                    </a:lnB>
+                  </a:tcPr>
+                </a:tc>
+                <a:tc>
+                  <a:txBody>
+                    <a:bodyPr/>
+                    <a:lstStyle/>
+                    <a:p>
+                      <a:pPr indent="0" marL="0">
+                        <a:buNone/>
+                      </a:pPr>
+                      <a:r>
+                        <a:rPr lang="en-US" sz="800" dirty="0">
+                          <a:solidFill>
+                            <a:srgbClr val="55524B"/>
+                          </a:solidFill>
+                          <a:latin typeface="Pretendard" pitchFamily="34" charset="0"/>
+                          <a:ea typeface="Pretendard" pitchFamily="34" charset="-122"/>
+                          <a:cs typeface="Pretendard" pitchFamily="34" charset="-120"/>
+                        </a:rPr>
+                        <a:t>항목 조회</a:t>
+                      </a:r>
+                      <a:endParaRPr lang="en-US" sz="800" dirty="0">
+                        <a:latin typeface="Pretendard" charset="0"/>
+                        <a:ea typeface="Pretendard" charset="0"/>
+                        <a:cs typeface="Pretendard" charset="0"/>
+                      </a:endParaRPr>
+                    </a:p>
+                  </a:txBody>
+                  <a:tcPr marL="50800" marR="50800" marT="38100" marB="38100" anchor="ctr">
+                    <a:lnL w="0" cap="flat" cmpd="sng" algn="ctr">
+                      <a:noFill/>
+                    </a:lnL>
+                    <a:lnR w="0" cap="flat" cmpd="sng" algn="ctr">
+                      <a:noFill/>
+                    </a:lnR>
+                    <a:lnT w="0" cap="flat" cmpd="sng" algn="ctr">
+                      <a:noFill/>
+                    </a:lnT>
+                    <a:lnB w="6350" cap="flat" cmpd="sng" algn="ctr">
+                      <a:solidFill>
+                        <a:srgbClr val="E6E0D4"/>
+                      </a:solidFill>
+                      <a:prstDash val="solid"/>
+                      <a:round/>
+                      <a:headEnd type="none" w="med" len="med"/>
+                      <a:tailEnd type="none" w="med" len="med"/>
+                    </a:lnB>
+                  </a:tcPr>
+                </a:tc>
+              </a:tr>
+              <a:tr h="0">
+                <a:tc>
+                  <a:txBody>
+                    <a:bodyPr/>
+                    <a:lstStyle/>
+                    <a:p>
+                      <a:pPr algn="ctr" indent="0" marL="0">
+                        <a:buNone/>
+                      </a:pPr>
+                      <a:r>
+                        <a:rPr lang="en-US" sz="800" dirty="0">
+                          <a:solidFill>
+                            <a:srgbClr val="8A867C"/>
+                          </a:solidFill>
+                          <a:latin typeface="Pretendard Medium" pitchFamily="34" charset="0"/>
+                          <a:ea typeface="Pretendard Medium" pitchFamily="34" charset="-122"/>
+                          <a:cs typeface="Pretendard Medium" pitchFamily="34" charset="-120"/>
+                        </a:rPr>
+                        <a:t>5</a:t>
+                      </a:r>
+                      <a:endParaRPr lang="en-US" sz="800" dirty="0">
+                        <a:latin typeface="Pretendard Medium" charset="0"/>
+                        <a:ea typeface="Pretendard Medium" charset="0"/>
+                        <a:cs typeface="Pretendard Medium" charset="0"/>
+                      </a:endParaRPr>
+                    </a:p>
+                  </a:txBody>
+                  <a:tcPr marL="50800" marR="50800" marT="38100" marB="38100" anchor="ctr">
+                    <a:lnL w="0" cap="flat" cmpd="sng" algn="ctr">
+                      <a:noFill/>
+                    </a:lnL>
+                    <a:lnR w="0" cap="flat" cmpd="sng" algn="ctr">
+                      <a:noFill/>
+                    </a:lnR>
+                    <a:lnT w="0" cap="flat" cmpd="sng" algn="ctr">
+                      <a:noFill/>
+                    </a:lnT>
+                    <a:lnB w="6350" cap="flat" cmpd="sng" algn="ctr">
+                      <a:solidFill>
+                        <a:srgbClr val="E6E0D4"/>
+                      </a:solidFill>
+                      <a:prstDash val="solid"/>
+                      <a:round/>
+                      <a:headEnd type="none" w="med" len="med"/>
+                      <a:tailEnd type="none" w="med" len="med"/>
+                    </a:lnB>
+                  </a:tcPr>
+                </a:tc>
+                <a:tc>
+                  <a:txBody>
+                    <a:bodyPr/>
+                    <a:lstStyle/>
+                    <a:p>
+                      <a:pPr indent="0" marL="0">
+                        <a:buNone/>
+                      </a:pPr>
+                      <a:r>
+                        <a:rPr lang="en-US" sz="800" dirty="0">
+                          <a:solidFill>
+                            <a:srgbClr val="2A2926"/>
+                          </a:solidFill>
+                          <a:latin typeface="Menlo" pitchFamily="34" charset="0"/>
+                          <a:ea typeface="Menlo" pitchFamily="34" charset="-122"/>
+                          <a:cs typeface="Menlo" pitchFamily="34" charset="-120"/>
+                        </a:rPr>
+                        <a:t>PUT  /wards/{id}/handover-template-items</a:t>
+                      </a:r>
+                      <a:endParaRPr lang="en-US" sz="800" dirty="0">
+                        <a:latin typeface="Menlo" charset="0"/>
+                        <a:ea typeface="Menlo" charset="0"/>
+                        <a:cs typeface="Menlo" charset="0"/>
+                      </a:endParaRPr>
+                    </a:p>
+                  </a:txBody>
+                  <a:tcPr marL="50800" marR="50800" marT="38100" marB="38100" anchor="ctr">
+                    <a:lnL w="0" cap="flat" cmpd="sng" algn="ctr">
+                      <a:noFill/>
+                    </a:lnL>
+                    <a:lnR w="0" cap="flat" cmpd="sng" algn="ctr">
+                      <a:noFill/>
+                    </a:lnR>
+                    <a:lnT w="0" cap="flat" cmpd="sng" algn="ctr">
+                      <a:noFill/>
+                    </a:lnT>
+                    <a:lnB w="6350" cap="flat" cmpd="sng" algn="ctr">
+                      <a:solidFill>
+                        <a:srgbClr val="E6E0D4"/>
+                      </a:solidFill>
+                      <a:prstDash val="solid"/>
+                      <a:round/>
+                      <a:headEnd type="none" w="med" len="med"/>
+                      <a:tailEnd type="none" w="med" len="med"/>
+                    </a:lnB>
+                  </a:tcPr>
+                </a:tc>
+                <a:tc>
+                  <a:txBody>
+                    <a:bodyPr/>
+                    <a:lstStyle/>
+                    <a:p>
+                      <a:pPr indent="0" marL="0">
+                        <a:buNone/>
+                      </a:pPr>
+                      <a:r>
+                        <a:rPr lang="en-US" sz="800" dirty="0">
+                          <a:solidFill>
+                            <a:srgbClr val="55524B"/>
+                          </a:solidFill>
+                          <a:latin typeface="Pretendard" pitchFamily="34" charset="0"/>
+                          <a:ea typeface="Pretendard" pitchFamily="34" charset="-122"/>
+                          <a:cs typeface="Pretendard" pitchFamily="34" charset="-120"/>
+                        </a:rPr>
+                        <a:t>항목 교체</a:t>
+                      </a:r>
+                      <a:endParaRPr lang="en-US" sz="800" dirty="0">
+                        <a:latin typeface="Pretendard" charset="0"/>
+                        <a:ea typeface="Pretendard" charset="0"/>
+                        <a:cs typeface="Pretendard" charset="0"/>
+                      </a:endParaRPr>
+                    </a:p>
+                  </a:txBody>
+                  <a:tcPr marL="50800" marR="50800" marT="38100" marB="38100" anchor="ctr">
+                    <a:lnL w="0" cap="flat" cmpd="sng" algn="ctr">
+                      <a:noFill/>
+                    </a:lnL>
+                    <a:lnR w="0" cap="flat" cmpd="sng" algn="ctr">
+                      <a:noFill/>
+                    </a:lnR>
+                    <a:lnT w="0" cap="flat" cmpd="sng" algn="ctr">
+                      <a:noFill/>
+                    </a:lnT>
+                    <a:lnB w="6350" cap="flat" cmpd="sng" algn="ctr">
+                      <a:solidFill>
+                        <a:srgbClr val="E6E0D4"/>
+                      </a:solidFill>
+                      <a:prstDash val="solid"/>
+                      <a:round/>
+                      <a:headEnd type="none" w="med" len="med"/>
+                      <a:tailEnd type="none" w="med" len="med"/>
+                    </a:lnB>
+                  </a:tcPr>
+                </a:tc>
+              </a:tr>
+              <a:tr h="0">
+                <a:tc>
+                  <a:txBody>
+                    <a:bodyPr/>
+                    <a:lstStyle/>
+                    <a:p>
+                      <a:pPr algn="ctr" indent="0" marL="0">
+                        <a:buNone/>
+                      </a:pPr>
+                      <a:r>
+                        <a:rPr lang="en-US" sz="800" dirty="0">
+                          <a:solidFill>
+                            <a:srgbClr val="8A867C"/>
+                          </a:solidFill>
+                          <a:latin typeface="Pretendard Medium" pitchFamily="34" charset="0"/>
+                          <a:ea typeface="Pretendard Medium" pitchFamily="34" charset="-122"/>
+                          <a:cs typeface="Pretendard Medium" pitchFamily="34" charset="-120"/>
+                        </a:rPr>
+                        <a:t>6</a:t>
+                      </a:r>
+                      <a:endParaRPr lang="en-US" sz="800" dirty="0">
+                        <a:latin typeface="Pretendard Medium" charset="0"/>
+                        <a:ea typeface="Pretendard Medium" charset="0"/>
+                        <a:cs typeface="Pretendard Medium" charset="0"/>
+                      </a:endParaRPr>
+                    </a:p>
+                  </a:txBody>
+                  <a:tcPr marL="50800" marR="50800" marT="38100" marB="38100" anchor="ctr">
+                    <a:lnL w="0" cap="flat" cmpd="sng" algn="ctr">
+                      <a:noFill/>
+                    </a:lnL>
+                    <a:lnR w="0" cap="flat" cmpd="sng" algn="ctr">
+                      <a:noFill/>
+                    </a:lnR>
+                    <a:lnT w="0" cap="flat" cmpd="sng" algn="ctr">
+                      <a:noFill/>
+                    </a:lnT>
+                    <a:lnB w="6350" cap="flat" cmpd="sng" algn="ctr">
+                      <a:solidFill>
+                        <a:srgbClr val="E6E0D4"/>
+                      </a:solidFill>
+                      <a:prstDash val="solid"/>
+                      <a:round/>
+                      <a:headEnd type="none" w="med" len="med"/>
+                      <a:tailEnd type="none" w="med" len="med"/>
+                    </a:lnB>
+                  </a:tcPr>
+                </a:tc>
+                <a:tc>
+                  <a:txBody>
+                    <a:bodyPr/>
+                    <a:lstStyle/>
+                    <a:p>
+                      <a:pPr indent="0" marL="0">
+                        <a:buNone/>
+                      </a:pPr>
+                      <a:r>
+                        <a:rPr lang="en-US" sz="800" dirty="0">
+                          <a:solidFill>
+                            <a:srgbClr val="2A2926"/>
+                          </a:solidFill>
+                          <a:latin typeface="Menlo" pitchFamily="34" charset="0"/>
+                          <a:ea typeface="Menlo" pitchFamily="34" charset="-122"/>
+                          <a:cs typeface="Menlo" pitchFamily="34" charset="-120"/>
+                        </a:rPr>
+                        <a:t>GET  /…/reassignment-context</a:t>
+                      </a:r>
+                      <a:endParaRPr lang="en-US" sz="800" dirty="0">
+                        <a:latin typeface="Menlo" charset="0"/>
+                        <a:ea typeface="Menlo" charset="0"/>
+                        <a:cs typeface="Menlo" charset="0"/>
+                      </a:endParaRPr>
+                    </a:p>
+                  </a:txBody>
+                  <a:tcPr marL="50800" marR="50800" marT="38100" marB="38100" anchor="ctr">
+                    <a:lnL w="0" cap="flat" cmpd="sng" algn="ctr">
+                      <a:noFill/>
+                    </a:lnL>
+                    <a:lnR w="0" cap="flat" cmpd="sng" algn="ctr">
+                      <a:noFill/>
+                    </a:lnR>
+                    <a:lnT w="0" cap="flat" cmpd="sng" algn="ctr">
+                      <a:noFill/>
+                    </a:lnT>
+                    <a:lnB w="6350" cap="flat" cmpd="sng" algn="ctr">
+                      <a:solidFill>
+                        <a:srgbClr val="E6E0D4"/>
+                      </a:solidFill>
+                      <a:prstDash val="solid"/>
+                      <a:round/>
+                      <a:headEnd type="none" w="med" len="med"/>
+                      <a:tailEnd type="none" w="med" len="med"/>
+                    </a:lnB>
+                  </a:tcPr>
+                </a:tc>
+                <a:tc>
+                  <a:txBody>
+                    <a:bodyPr/>
+                    <a:lstStyle/>
+                    <a:p>
+                      <a:pPr indent="0" marL="0">
+                        <a:buNone/>
+                      </a:pPr>
+                      <a:r>
+                        <a:rPr lang="en-US" sz="800" dirty="0">
+                          <a:solidFill>
+                            <a:srgbClr val="55524B"/>
+                          </a:solidFill>
+                          <a:latin typeface="Pretendard" pitchFamily="34" charset="0"/>
+                          <a:ea typeface="Pretendard" pitchFamily="34" charset="-122"/>
+                          <a:cs typeface="Pretendard" pitchFamily="34" charset="-120"/>
+                        </a:rPr>
+                        <a:t>재배정 진입</a:t>
+                      </a:r>
+                      <a:endParaRPr lang="en-US" sz="800" dirty="0">
+                        <a:latin typeface="Pretendard" charset="0"/>
+                        <a:ea typeface="Pretendard" charset="0"/>
+                        <a:cs typeface="Pretendard" charset="0"/>
+                      </a:endParaRPr>
+                    </a:p>
+                  </a:txBody>
+                  <a:tcPr marL="50800" marR="50800" marT="38100" marB="38100" anchor="ctr">
+                    <a:lnL w="0" cap="flat" cmpd="sng" algn="ctr">
+                      <a:noFill/>
+                    </a:lnL>
+                    <a:lnR w="0" cap="flat" cmpd="sng" algn="ctr">
+                      <a:noFill/>
+                    </a:lnR>
+                    <a:lnT w="0" cap="flat" cmpd="sng" algn="ctr">
+                      <a:noFill/>
+                    </a:lnT>
+                    <a:lnB w="6350" cap="flat" cmpd="sng" algn="ctr">
+                      <a:solidFill>
+                        <a:srgbClr val="E6E0D4"/>
+                      </a:solidFill>
+                      <a:prstDash val="solid"/>
+                      <a:round/>
+                      <a:headEnd type="none" w="med" len="med"/>
+                      <a:tailEnd type="none" w="med" len="med"/>
+                    </a:lnB>
+                  </a:tcPr>
+                </a:tc>
+              </a:tr>
+              <a:tr h="0">
+                <a:tc>
+                  <a:txBody>
+                    <a:bodyPr/>
+                    <a:lstStyle/>
+                    <a:p>
+                      <a:pPr algn="ctr" indent="0" marL="0">
+                        <a:buNone/>
+                      </a:pPr>
+                      <a:r>
+                        <a:rPr lang="en-US" sz="800" dirty="0">
+                          <a:solidFill>
+                            <a:srgbClr val="8A867C"/>
+                          </a:solidFill>
+                          <a:latin typeface="Pretendard Medium" pitchFamily="34" charset="0"/>
+                          <a:ea typeface="Pretendard Medium" pitchFamily="34" charset="-122"/>
+                          <a:cs typeface="Pretendard Medium" pitchFamily="34" charset="-120"/>
+                        </a:rPr>
+                        <a:t>6</a:t>
+                      </a:r>
+                      <a:endParaRPr lang="en-US" sz="800" dirty="0">
+                        <a:latin typeface="Pretendard Medium" charset="0"/>
+                        <a:ea typeface="Pretendard Medium" charset="0"/>
+                        <a:cs typeface="Pretendard Medium" charset="0"/>
+                      </a:endParaRPr>
+                    </a:p>
+                  </a:txBody>
+                  <a:tcPr marL="50800" marR="50800" marT="38100" marB="38100" anchor="ctr">
+                    <a:lnL w="0" cap="flat" cmpd="sng" algn="ctr">
+                      <a:noFill/>
+                    </a:lnL>
+                    <a:lnR w="0" cap="flat" cmpd="sng" algn="ctr">
+                      <a:noFill/>
+                    </a:lnR>
+                    <a:lnT w="0" cap="flat" cmpd="sng" algn="ctr">
+                      <a:noFill/>
+                    </a:lnT>
+                    <a:lnB w="6350" cap="flat" cmpd="sng" algn="ctr">
+                      <a:solidFill>
+                        <a:srgbClr val="E6E0D4"/>
+                      </a:solidFill>
+                      <a:prstDash val="solid"/>
+                      <a:round/>
+                      <a:headEnd type="none" w="med" len="med"/>
+                      <a:tailEnd type="none" w="med" len="med"/>
+                    </a:lnB>
+                  </a:tcPr>
+                </a:tc>
+                <a:tc>
+                  <a:txBody>
+                    <a:bodyPr/>
+                    <a:lstStyle/>
+                    <a:p>
+                      <a:pPr indent="0" marL="0">
+                        <a:buNone/>
+                      </a:pPr>
+                      <a:r>
+                        <a:rPr lang="en-US" sz="800" dirty="0">
+                          <a:solidFill>
+                            <a:srgbClr val="2A2926"/>
+                          </a:solidFill>
+                          <a:latin typeface="Menlo" pitchFamily="34" charset="0"/>
+                          <a:ea typeface="Menlo" pitchFamily="34" charset="-122"/>
+                          <a:cs typeface="Menlo" pitchFamily="34" charset="-120"/>
+                        </a:rPr>
+                        <a:t>POST /…/absence</a:t>
+                      </a:r>
+                      <a:endParaRPr lang="en-US" sz="800" dirty="0">
+                        <a:latin typeface="Menlo" charset="0"/>
+                        <a:ea typeface="Menlo" charset="0"/>
+                        <a:cs typeface="Menlo" charset="0"/>
+                      </a:endParaRPr>
+                    </a:p>
+                  </a:txBody>
+                  <a:tcPr marL="50800" marR="50800" marT="38100" marB="38100" anchor="ctr">
+                    <a:lnL w="0" cap="flat" cmpd="sng" algn="ctr">
+                      <a:noFill/>
+                    </a:lnL>
+                    <a:lnR w="0" cap="flat" cmpd="sng" algn="ctr">
+                      <a:noFill/>
+                    </a:lnR>
+                    <a:lnT w="0" cap="flat" cmpd="sng" algn="ctr">
+                      <a:noFill/>
+                    </a:lnT>
+                    <a:lnB w="6350" cap="flat" cmpd="sng" algn="ctr">
+                      <a:solidFill>
+                        <a:srgbClr val="E6E0D4"/>
+                      </a:solidFill>
+                      <a:prstDash val="solid"/>
+                      <a:round/>
+                      <a:headEnd type="none" w="med" len="med"/>
+                      <a:tailEnd type="none" w="med" len="med"/>
+                    </a:lnB>
+                  </a:tcPr>
+                </a:tc>
+                <a:tc>
+                  <a:txBody>
+                    <a:bodyPr/>
+                    <a:lstStyle/>
+                    <a:p>
+                      <a:pPr indent="0" marL="0">
+                        <a:buNone/>
+                      </a:pPr>
+                      <a:r>
+                        <a:rPr lang="en-US" sz="800" dirty="0">
+                          <a:solidFill>
+                            <a:srgbClr val="55524B"/>
+                          </a:solidFill>
+                          <a:latin typeface="Pretendard" pitchFamily="34" charset="0"/>
+                          <a:ea typeface="Pretendard" pitchFamily="34" charset="-122"/>
+                          <a:cs typeface="Pretendard" pitchFamily="34" charset="-120"/>
+                        </a:rPr>
+                        <a:t>결원 등록</a:t>
+                      </a:r>
+                      <a:endParaRPr lang="en-US" sz="800" dirty="0">
+                        <a:latin typeface="Pretendard" charset="0"/>
+                        <a:ea typeface="Pretendard" charset="0"/>
+                        <a:cs typeface="Pretendard" charset="0"/>
+                      </a:endParaRPr>
+                    </a:p>
+                  </a:txBody>
+                  <a:tcPr marL="50800" marR="50800" marT="38100" marB="38100" anchor="ctr">
+                    <a:lnL w="0" cap="flat" cmpd="sng" algn="ctr">
+                      <a:noFill/>
+                    </a:lnL>
+                    <a:lnR w="0" cap="flat" cmpd="sng" algn="ctr">
+                      <a:noFill/>
+                    </a:lnR>
+                    <a:lnT w="0" cap="flat" cmpd="sng" algn="ctr">
+                      <a:noFill/>
+                    </a:lnT>
+                    <a:lnB w="6350" cap="flat" cmpd="sng" algn="ctr">
+                      <a:solidFill>
+                        <a:srgbClr val="E6E0D4"/>
+                      </a:solidFill>
+                      <a:prstDash val="solid"/>
+                      <a:round/>
+                      <a:headEnd type="none" w="med" len="med"/>
+                      <a:tailEnd type="none" w="med" len="med"/>
+                    </a:lnB>
+                  </a:tcPr>
+                </a:tc>
+              </a:tr>
+              <a:tr h="0">
+                <a:tc>
+                  <a:txBody>
+                    <a:bodyPr/>
+                    <a:lstStyle/>
+                    <a:p>
+                      <a:pPr algn="ctr" indent="0" marL="0">
+                        <a:buNone/>
+                      </a:pPr>
+                      <a:r>
+                        <a:rPr lang="en-US" sz="800" dirty="0">
+                          <a:solidFill>
+                            <a:srgbClr val="8A867C"/>
+                          </a:solidFill>
+                          <a:latin typeface="Pretendard Medium" pitchFamily="34" charset="0"/>
+                          <a:ea typeface="Pretendard Medium" pitchFamily="34" charset="-122"/>
+                          <a:cs typeface="Pretendard Medium" pitchFamily="34" charset="-120"/>
+                        </a:rPr>
+                        <a:t>6</a:t>
+                      </a:r>
+                      <a:endParaRPr lang="en-US" sz="800" dirty="0">
+                        <a:latin typeface="Pretendard Medium" charset="0"/>
+                        <a:ea typeface="Pretendard Medium" charset="0"/>
+                        <a:cs typeface="Pretendard Medium" charset="0"/>
+                      </a:endParaRPr>
+                    </a:p>
+                  </a:txBody>
+                  <a:tcPr marL="50800" marR="50800" marT="38100" marB="38100" anchor="ctr">
+                    <a:lnL w="0" cap="flat" cmpd="sng" algn="ctr">
+                      <a:noFill/>
+                    </a:lnL>
+                    <a:lnR w="0" cap="flat" cmpd="sng" algn="ctr">
+                      <a:noFill/>
+                    </a:lnR>
+                    <a:lnT w="0" cap="flat" cmpd="sng" algn="ctr">
+                      <a:noFill/>
+                    </a:lnT>
+                    <a:lnB w="6350" cap="flat" cmpd="sng" algn="ctr">
+                      <a:solidFill>
+                        <a:srgbClr val="E6E0D4"/>
+                      </a:solidFill>
+                      <a:prstDash val="solid"/>
+                      <a:round/>
+                      <a:headEnd type="none" w="med" len="med"/>
+                      <a:tailEnd type="none" w="med" len="med"/>
+                    </a:lnB>
+                  </a:tcPr>
+                </a:tc>
+                <a:tc>
+                  <a:txBody>
+                    <a:bodyPr/>
+                    <a:lstStyle/>
+                    <a:p>
+                      <a:pPr indent="0" marL="0">
+                        <a:buNone/>
+                      </a:pPr>
+                      <a:r>
+                        <a:rPr lang="en-US" sz="800" dirty="0">
+                          <a:solidFill>
+                            <a:srgbClr val="2A2926"/>
+                          </a:solidFill>
+                          <a:latin typeface="Menlo" pitchFamily="34" charset="0"/>
+                          <a:ea typeface="Menlo" pitchFamily="34" charset="-122"/>
+                          <a:cs typeface="Menlo" pitchFamily="34" charset="-120"/>
+                        </a:rPr>
+                        <a:t>POST /…/substitute</a:t>
+                      </a:r>
+                      <a:endParaRPr lang="en-US" sz="800" dirty="0">
+                        <a:latin typeface="Menlo" charset="0"/>
+                        <a:ea typeface="Menlo" charset="0"/>
+                        <a:cs typeface="Menlo" charset="0"/>
+                      </a:endParaRPr>
+                    </a:p>
+                  </a:txBody>
+                  <a:tcPr marL="50800" marR="50800" marT="38100" marB="38100" anchor="ctr">
+                    <a:lnL w="0" cap="flat" cmpd="sng" algn="ctr">
+                      <a:noFill/>
+                    </a:lnL>
+                    <a:lnR w="0" cap="flat" cmpd="sng" algn="ctr">
+                      <a:noFill/>
+                    </a:lnR>
+                    <a:lnT w="0" cap="flat" cmpd="sng" algn="ctr">
+                      <a:noFill/>
+                    </a:lnT>
+                    <a:lnB w="6350" cap="flat" cmpd="sng" algn="ctr">
+                      <a:solidFill>
+                        <a:srgbClr val="E6E0D4"/>
+                      </a:solidFill>
+                      <a:prstDash val="solid"/>
+                      <a:round/>
+                      <a:headEnd type="none" w="med" len="med"/>
+                      <a:tailEnd type="none" w="med" len="med"/>
+                    </a:lnB>
+                  </a:tcPr>
+                </a:tc>
+                <a:tc>
+                  <a:txBody>
+                    <a:bodyPr/>
+                    <a:lstStyle/>
+                    <a:p>
+                      <a:pPr indent="0" marL="0">
+                        <a:buNone/>
+                      </a:pPr>
+                      <a:r>
+                        <a:rPr lang="en-US" sz="800" dirty="0">
+                          <a:solidFill>
+                            <a:srgbClr val="55524B"/>
+                          </a:solidFill>
+                          <a:latin typeface="Pretendard" pitchFamily="34" charset="0"/>
+                          <a:ea typeface="Pretendard" pitchFamily="34" charset="-122"/>
+                          <a:cs typeface="Pretendard" pitchFamily="34" charset="-120"/>
+                        </a:rPr>
+                        <a:t>대체자 배정</a:t>
+                      </a:r>
+                      <a:endParaRPr lang="en-US" sz="800" dirty="0">
+                        <a:latin typeface="Pretendard" charset="0"/>
+                        <a:ea typeface="Pretendard" charset="0"/>
+                        <a:cs typeface="Pretendard" charset="0"/>
+                      </a:endParaRPr>
+                    </a:p>
+                  </a:txBody>
+                  <a:tcPr marL="50800" marR="50800" marT="38100" marB="38100" anchor="ctr">
+                    <a:lnL w="0" cap="flat" cmpd="sng" algn="ctr">
+                      <a:noFill/>
+                    </a:lnL>
+                    <a:lnR w="0" cap="flat" cmpd="sng" algn="ctr">
+                      <a:noFill/>
+                    </a:lnR>
+                    <a:lnT w="0" cap="flat" cmpd="sng" algn="ctr">
+                      <a:noFill/>
+                    </a:lnT>
+                    <a:lnB w="6350" cap="flat" cmpd="sng" algn="ctr">
+                      <a:solidFill>
+                        <a:srgbClr val="E6E0D4"/>
+                      </a:solidFill>
+                      <a:prstDash val="solid"/>
+                      <a:round/>
+                      <a:headEnd type="none" w="med" len="med"/>
+                      <a:tailEnd type="none" w="med" len="med"/>
+                    </a:lnB>
+                  </a:tcPr>
+                </a:tc>
+              </a:tr>
+              <a:tr h="0">
+                <a:tc>
+                  <a:txBody>
+                    <a:bodyPr/>
+                    <a:lstStyle/>
+                    <a:p>
+                      <a:pPr algn="ctr" indent="0" marL="0">
+                        <a:buNone/>
+                      </a:pPr>
+                      <a:r>
+                        <a:rPr lang="en-US" sz="800" dirty="0">
+                          <a:solidFill>
+                            <a:srgbClr val="8A867C"/>
+                          </a:solidFill>
+                          <a:latin typeface="Pretendard Medium" pitchFamily="34" charset="0"/>
+                          <a:ea typeface="Pretendard Medium" pitchFamily="34" charset="-122"/>
+                          <a:cs typeface="Pretendard Medium" pitchFamily="34" charset="-120"/>
+                        </a:rPr>
+                        <a:t>6</a:t>
+                      </a:r>
+                      <a:endParaRPr lang="en-US" sz="800" dirty="0">
+                        <a:latin typeface="Pretendard Medium" charset="0"/>
+                        <a:ea typeface="Pretendard Medium" charset="0"/>
+                        <a:cs typeface="Pretendard Medium" charset="0"/>
+                      </a:endParaRPr>
+                    </a:p>
+                  </a:txBody>
+                  <a:tcPr marL="50800" marR="50800" marT="38100" marB="38100" anchor="ctr">
+                    <a:lnL w="0" cap="flat" cmpd="sng" algn="ctr">
+                      <a:noFill/>
+                    </a:lnL>
+                    <a:lnR w="0" cap="flat" cmpd="sng" algn="ctr">
+                      <a:noFill/>
+                    </a:lnR>
+                    <a:lnT w="0" cap="flat" cmpd="sng" algn="ctr">
+                      <a:noFill/>
+                    </a:lnT>
+                    <a:lnB w="6350" cap="flat" cmpd="sng" algn="ctr">
+                      <a:solidFill>
+                        <a:srgbClr val="E6E0D4"/>
+                      </a:solidFill>
+                      <a:prstDash val="solid"/>
+                      <a:round/>
+                      <a:headEnd type="none" w="med" len="med"/>
+                      <a:tailEnd type="none" w="med" len="med"/>
+                    </a:lnB>
+                  </a:tcPr>
+                </a:tc>
+                <a:tc>
+                  <a:txBody>
+                    <a:bodyPr/>
+                    <a:lstStyle/>
+                    <a:p>
+                      <a:pPr indent="0" marL="0">
+                        <a:buNone/>
+                      </a:pPr>
+                      <a:r>
+                        <a:rPr lang="en-US" sz="800" dirty="0">
+                          <a:solidFill>
+                            <a:srgbClr val="2A2926"/>
+                          </a:solidFill>
+                          <a:latin typeface="Menlo" pitchFamily="34" charset="0"/>
+                          <a:ea typeface="Menlo" pitchFamily="34" charset="-122"/>
+                          <a:cs typeface="Menlo" pitchFamily="34" charset="-120"/>
+                        </a:rPr>
+                        <a:t>POST /…/handover-transfer</a:t>
+                      </a:r>
+                      <a:endParaRPr lang="en-US" sz="800" dirty="0">
+                        <a:latin typeface="Menlo" charset="0"/>
+                        <a:ea typeface="Menlo" charset="0"/>
+                        <a:cs typeface="Menlo" charset="0"/>
+                      </a:endParaRPr>
+                    </a:p>
+                  </a:txBody>
+                  <a:tcPr marL="50800" marR="50800" marT="38100" marB="38100" anchor="ctr">
+                    <a:lnL w="0" cap="flat" cmpd="sng" algn="ctr">
+                      <a:noFill/>
+                    </a:lnL>
+                    <a:lnR w="0" cap="flat" cmpd="sng" algn="ctr">
+                      <a:noFill/>
+                    </a:lnR>
+                    <a:lnT w="0" cap="flat" cmpd="sng" algn="ctr">
+                      <a:noFill/>
+                    </a:lnT>
+                    <a:lnB w="6350" cap="flat" cmpd="sng" algn="ctr">
+                      <a:solidFill>
+                        <a:srgbClr val="E6E0D4"/>
+                      </a:solidFill>
+                      <a:prstDash val="solid"/>
+                      <a:round/>
+                      <a:headEnd type="none" w="med" len="med"/>
+                      <a:tailEnd type="none" w="med" len="med"/>
+                    </a:lnB>
+                  </a:tcPr>
+                </a:tc>
+                <a:tc>
+                  <a:txBody>
+                    <a:bodyPr/>
+                    <a:lstStyle/>
+                    <a:p>
+                      <a:pPr indent="0" marL="0">
+                        <a:buNone/>
+                      </a:pPr>
+                      <a:r>
+                        <a:rPr lang="en-US" sz="800" dirty="0">
+                          <a:solidFill>
+                            <a:srgbClr val="55524B"/>
+                          </a:solidFill>
+                          <a:latin typeface="Pretendard" pitchFamily="34" charset="0"/>
+                          <a:ea typeface="Pretendard" pitchFamily="34" charset="-122"/>
+                          <a:cs typeface="Pretendard" pitchFamily="34" charset="-120"/>
+                        </a:rPr>
+                        <a:t>인계 담당 이관</a:t>
+                      </a:r>
+                      <a:endParaRPr lang="en-US" sz="800" dirty="0">
+                        <a:latin typeface="Pretendard" charset="0"/>
+                        <a:ea typeface="Pretendard" charset="0"/>
+                        <a:cs typeface="Pretendard" charset="0"/>
+                      </a:endParaRPr>
+                    </a:p>
+                  </a:txBody>
+                  <a:tcPr marL="50800" marR="50800" marT="38100" marB="38100" anchor="ctr">
+                    <a:lnL w="0" cap="flat" cmpd="sng" algn="ctr">
+                      <a:noFill/>
+                    </a:lnL>
+                    <a:lnR w="0" cap="flat" cmpd="sng" algn="ctr">
+                      <a:noFill/>
+                    </a:lnR>
+                    <a:lnT w="0" cap="flat" cmpd="sng" algn="ctr">
+                      <a:noFill/>
+                    </a:lnT>
+                    <a:lnB w="6350" cap="flat" cmpd="sng" algn="ctr">
+                      <a:solidFill>
+                        <a:srgbClr val="E6E0D4"/>
+                      </a:solidFill>
+                      <a:prstDash val="solid"/>
+                      <a:round/>
+                      <a:headEnd type="none" w="med" len="med"/>
+                      <a:tailEnd type="none" w="med" len="med"/>
+                    </a:lnB>
+                  </a:tcPr>
+                </a:tc>
+              </a:tr>
+              <a:tr h="0">
+                <a:tc>
+                  <a:txBody>
+                    <a:bodyPr/>
+                    <a:lstStyle/>
+                    <a:p>
+                      <a:pPr algn="ctr" indent="0" marL="0">
+                        <a:buNone/>
+                      </a:pPr>
+                      <a:r>
+                        <a:rPr lang="en-US" sz="800" dirty="0">
+                          <a:solidFill>
+                            <a:srgbClr val="8A867C"/>
+                          </a:solidFill>
+                          <a:latin typeface="Pretendard Medium" pitchFamily="34" charset="0"/>
+                          <a:ea typeface="Pretendard Medium" pitchFamily="34" charset="-122"/>
+                          <a:cs typeface="Pretendard Medium" pitchFamily="34" charset="-120"/>
+                        </a:rPr>
+                        <a:t>6</a:t>
+                      </a:r>
+                      <a:endParaRPr lang="en-US" sz="800" dirty="0">
+                        <a:latin typeface="Pretendard Medium" charset="0"/>
+                        <a:ea typeface="Pretendard Medium" charset="0"/>
+                        <a:cs typeface="Pretendard Medium" charset="0"/>
+                      </a:endParaRPr>
+                    </a:p>
+                  </a:txBody>
+                  <a:tcPr marL="50800" marR="50800" marT="38100" marB="38100" anchor="ctr">
+                    <a:lnL w="0" cap="flat" cmpd="sng" algn="ctr">
+                      <a:noFill/>
+                    </a:lnL>
+                    <a:lnR w="0" cap="flat" cmpd="sng" algn="ctr">
+                      <a:noFill/>
+                    </a:lnR>
+                    <a:lnT w="0" cap="flat" cmpd="sng" algn="ctr">
+                      <a:noFill/>
+                    </a:lnT>
+                    <a:lnB w="6350" cap="flat" cmpd="sng" algn="ctr">
+                      <a:solidFill>
+                        <a:srgbClr val="E6E0D4"/>
+                      </a:solidFill>
+                      <a:prstDash val="solid"/>
+                      <a:round/>
+                      <a:headEnd type="none" w="med" len="med"/>
+                      <a:tailEnd type="none" w="med" len="med"/>
+                    </a:lnB>
+                  </a:tcPr>
+                </a:tc>
+                <a:tc>
+                  <a:txBody>
+                    <a:bodyPr/>
+                    <a:lstStyle/>
+                    <a:p>
+                      <a:pPr indent="0" marL="0">
+                        <a:buNone/>
+                      </a:pPr>
+                      <a:r>
+                        <a:rPr lang="en-US" sz="800" dirty="0">
+                          <a:solidFill>
+                            <a:srgbClr val="2A2926"/>
+                          </a:solidFill>
+                          <a:latin typeface="Menlo" pitchFamily="34" charset="0"/>
+                          <a:ea typeface="Menlo" pitchFamily="34" charset="-122"/>
+                          <a:cs typeface="Menlo" pitchFamily="34" charset="-120"/>
+                        </a:rPr>
+                        <a:t>POST /…/coverage-confirmation</a:t>
+                      </a:r>
+                      <a:endParaRPr lang="en-US" sz="800" dirty="0">
+                        <a:latin typeface="Menlo" charset="0"/>
+                        <a:ea typeface="Menlo" charset="0"/>
+                        <a:cs typeface="Menlo" charset="0"/>
+                      </a:endParaRPr>
+                    </a:p>
+                  </a:txBody>
+                  <a:tcPr marL="50800" marR="50800" marT="38100" marB="38100" anchor="ctr">
+                    <a:lnL w="0" cap="flat" cmpd="sng" algn="ctr">
+                      <a:noFill/>
+                    </a:lnL>
+                    <a:lnR w="0" cap="flat" cmpd="sng" algn="ctr">
+                      <a:noFill/>
+                    </a:lnR>
+                    <a:lnT w="0" cap="flat" cmpd="sng" algn="ctr">
+                      <a:noFill/>
+                    </a:lnT>
+                    <a:lnB w="6350" cap="flat" cmpd="sng" algn="ctr">
+                      <a:solidFill>
+                        <a:srgbClr val="E6E0D4"/>
+                      </a:solidFill>
+                      <a:prstDash val="solid"/>
+                      <a:round/>
+                      <a:headEnd type="none" w="med" len="med"/>
+                      <a:tailEnd type="none" w="med" len="med"/>
+                    </a:lnB>
+                  </a:tcPr>
+                </a:tc>
+                <a:tc>
+                  <a:txBody>
+                    <a:bodyPr/>
+                    <a:lstStyle/>
+                    <a:p>
+                      <a:pPr indent="0" marL="0">
+                        <a:buNone/>
+                      </a:pPr>
+                      <a:r>
+                        <a:rPr lang="en-US" sz="800" dirty="0">
+                          <a:solidFill>
+                            <a:srgbClr val="55524B"/>
+                          </a:solidFill>
+                          <a:latin typeface="Pretendard" pitchFamily="34" charset="0"/>
+                          <a:ea typeface="Pretendard" pitchFamily="34" charset="-122"/>
+                          <a:cs typeface="Pretendard" pitchFamily="34" charset="-120"/>
+                        </a:rPr>
+                        <a:t>대체 완료 확인</a:t>
+                      </a:r>
+                      <a:endParaRPr lang="en-US" sz="800" dirty="0">
+                        <a:latin typeface="Pretendard" charset="0"/>
+                        <a:ea typeface="Pretendard" charset="0"/>
+                        <a:cs typeface="Pretendard" charset="0"/>
+                      </a:endParaRPr>
+                    </a:p>
+                  </a:txBody>
+                  <a:tcPr marL="50800" marR="50800" marT="38100" marB="38100" anchor="ctr">
+                    <a:lnL w="0" cap="flat" cmpd="sng" algn="ctr">
+                      <a:noFill/>
+                    </a:lnL>
+                    <a:lnR w="0" cap="flat" cmpd="sng" algn="ctr">
+                      <a:noFill/>
+                    </a:lnR>
+                    <a:lnT w="0" cap="flat" cmpd="sng" algn="ctr">
+                      <a:noFill/>
+                    </a:lnT>
+                    <a:lnB w="6350" cap="flat" cmpd="sng" algn="ctr">
+                      <a:solidFill>
+                        <a:srgbClr val="E6E0D4"/>
+                      </a:solidFill>
+                      <a:prstDash val="solid"/>
+                      <a:round/>
+                      <a:headEnd type="none" w="med" len="med"/>
+                      <a:tailEnd type="none" w="med" len="med"/>
+                    </a:lnB>
+                  </a:tcPr>
+                </a:tc>
+              </a:tr>
+            </a:tbl>
+          </a:graphicData>
+        </a:graphic>
+      </p:graphicFrame>
+      <p:graphicFrame>
+        <p:nvGraphicFramePr>
+          <p:cNvPr id="65" name="Table 1"/>
+          <p:cNvGraphicFramePr>
+            <a:graphicFrameLocks noGrp="1"/>
+          </p:cNvGraphicFramePr>
+          <p:nvPr>
+            <p:extLst>
+              <p:ext uri="{D42A27DB-BD31-4B8C-83A1-F6EECF244321}">
+                <p14:modId xmlns:p14="http://schemas.microsoft.com/office/powerpoint/2010/main" val="1579011935"/>
+              </p:ext>
+            </p:extLst>
+          </p:nvPr>
+        </p:nvGraphicFramePr>
+        <p:xfrm>
+          <a:off x="4681728" y="1170432"/>
+          <a:ext cx="3913632" cy="914400"/>
+        </p:xfrm>
+        <a:graphic>
+          <a:graphicData uri="http://schemas.openxmlformats.org/drawingml/2006/table">
+            <a:tbl>
+              <a:tblPr/>
+              <a:tblGrid>
+                <a:gridCol w="384048"/>
+                <a:gridCol w="2478024"/>
+                <a:gridCol w="1051560"/>
+              </a:tblGrid>
+              <a:tr h="0">
+                <a:tc>
+                  <a:txBody>
+                    <a:bodyPr/>
+                    <a:lstStyle/>
+                    <a:p>
+                      <a:pPr indent="0" marL="0">
+                        <a:buNone/>
+                      </a:pPr>
+                      <a:r>
+                        <a:rPr lang="en-US" sz="850" dirty="0">
+                          <a:solidFill>
+                            <a:srgbClr val="2A2926"/>
+                          </a:solidFill>
+                          <a:latin typeface="Pretendard Medium" pitchFamily="34" charset="0"/>
+                          <a:ea typeface="Pretendard Medium" pitchFamily="34" charset="-122"/>
+                          <a:cs typeface="Pretendard Medium" pitchFamily="34" charset="-120"/>
+                        </a:rPr>
+                        <a:t>화면</a:t>
+                      </a:r>
+                      <a:endParaRPr lang="en-US" sz="850" dirty="0">
+                        <a:latin typeface="Pretendard Medium" charset="0"/>
+                        <a:ea typeface="Pretendard Medium" charset="0"/>
+                        <a:cs typeface="Pretendard Medium" charset="0"/>
+                      </a:endParaRPr>
+                    </a:p>
+                  </a:txBody>
+                  <a:tcPr marL="50800" marR="50800" marT="38100" marB="38100" anchor="ctr">
+                    <a:lnL w="0" cap="flat" cmpd="sng" algn="ctr">
+                      <a:noFill/>
+                    </a:lnL>
+                    <a:lnR w="0" cap="flat" cmpd="sng" algn="ctr">
+                      <a:noFill/>
+                    </a:lnR>
+                    <a:lnT w="0" cap="flat" cmpd="sng" algn="ctr">
+                      <a:noFill/>
+                    </a:lnT>
+                    <a:lnB w="12700" cap="flat" cmpd="sng" algn="ctr">
+                      <a:solidFill>
+                        <a:srgbClr val="1F8A7E"/>
+                      </a:solidFill>
+                      <a:prstDash val="solid"/>
+                      <a:round/>
+                      <a:headEnd type="none" w="med" len="med"/>
+                      <a:tailEnd type="none" w="med" len="med"/>
+                    </a:lnB>
+                  </a:tcPr>
+                </a:tc>
+                <a:tc>
+                  <a:txBody>
+                    <a:bodyPr/>
+                    <a:lstStyle/>
+                    <a:p>
+                      <a:pPr indent="0" marL="0">
+                        <a:buNone/>
+                      </a:pPr>
+                      <a:r>
+                        <a:rPr lang="en-US" sz="850" dirty="0">
+                          <a:solidFill>
+                            <a:srgbClr val="2A2926"/>
+                          </a:solidFill>
+                          <a:latin typeface="Pretendard Medium" pitchFamily="34" charset="0"/>
+                          <a:ea typeface="Pretendard Medium" pitchFamily="34" charset="-122"/>
+                          <a:cs typeface="Pretendard Medium" pitchFamily="34" charset="-120"/>
+                        </a:rPr>
+                        <a:t>메서드와 주소</a:t>
+                      </a:r>
+                      <a:endParaRPr lang="en-US" sz="850" dirty="0">
+                        <a:latin typeface="Pretendard Medium" charset="0"/>
+                        <a:ea typeface="Pretendard Medium" charset="0"/>
+                        <a:cs typeface="Pretendard Medium" charset="0"/>
+                      </a:endParaRPr>
+                    </a:p>
+                  </a:txBody>
+                  <a:tcPr marL="50800" marR="50800" marT="38100" marB="38100" anchor="ctr">
+                    <a:lnL w="0" cap="flat" cmpd="sng" algn="ctr">
+                      <a:noFill/>
+                    </a:lnL>
+                    <a:lnR w="0" cap="flat" cmpd="sng" algn="ctr">
+                      <a:noFill/>
+                    </a:lnR>
+                    <a:lnT w="0" cap="flat" cmpd="sng" algn="ctr">
+                      <a:noFill/>
+                    </a:lnT>
+                    <a:lnB w="12700" cap="flat" cmpd="sng" algn="ctr">
+                      <a:solidFill>
+                        <a:srgbClr val="1F8A7E"/>
+                      </a:solidFill>
+                      <a:prstDash val="solid"/>
+                      <a:round/>
+                      <a:headEnd type="none" w="med" len="med"/>
+                      <a:tailEnd type="none" w="med" len="med"/>
+                    </a:lnB>
+                  </a:tcPr>
+                </a:tc>
+                <a:tc>
+                  <a:txBody>
+                    <a:bodyPr/>
+                    <a:lstStyle/>
+                    <a:p>
+                      <a:pPr indent="0" marL="0">
+                        <a:buNone/>
+                      </a:pPr>
+                      <a:r>
+                        <a:rPr lang="en-US" sz="850" dirty="0">
+                          <a:solidFill>
+                            <a:srgbClr val="2A2926"/>
+                          </a:solidFill>
+                          <a:latin typeface="Pretendard Medium" pitchFamily="34" charset="0"/>
+                          <a:ea typeface="Pretendard Medium" pitchFamily="34" charset="-122"/>
+                          <a:cs typeface="Pretendard Medium" pitchFamily="34" charset="-120"/>
+                        </a:rPr>
+                        <a:t>무엇을</a:t>
+                      </a:r>
+                      <a:endParaRPr lang="en-US" sz="850" dirty="0">
+                        <a:latin typeface="Pretendard Medium" charset="0"/>
+                        <a:ea typeface="Pretendard Medium" charset="0"/>
+                        <a:cs typeface="Pretendard Medium" charset="0"/>
+                      </a:endParaRPr>
+                    </a:p>
+                  </a:txBody>
+                  <a:tcPr marL="50800" marR="50800" marT="38100" marB="38100" anchor="ctr">
+                    <a:lnL w="0" cap="flat" cmpd="sng" algn="ctr">
+                      <a:noFill/>
+                    </a:lnL>
+                    <a:lnR w="0" cap="flat" cmpd="sng" algn="ctr">
+                      <a:noFill/>
+                    </a:lnR>
+                    <a:lnT w="0" cap="flat" cmpd="sng" algn="ctr">
+                      <a:noFill/>
+                    </a:lnT>
+                    <a:lnB w="12700" cap="flat" cmpd="sng" algn="ctr">
+                      <a:solidFill>
+                        <a:srgbClr val="1F8A7E"/>
+                      </a:solidFill>
+                      <a:prstDash val="solid"/>
+                      <a:round/>
+                      <a:headEnd type="none" w="med" len="med"/>
+                      <a:tailEnd type="none" w="med" len="med"/>
+                    </a:lnB>
+                  </a:tcPr>
+                </a:tc>
+              </a:tr>
+              <a:tr h="0">
+                <a:tc>
+                  <a:txBody>
+                    <a:bodyPr/>
+                    <a:lstStyle/>
+                    <a:p>
+                      <a:pPr algn="ctr" indent="0" marL="0">
+                        <a:buNone/>
+                      </a:pPr>
+                      <a:r>
+                        <a:rPr lang="en-US" sz="800" dirty="0">
+                          <a:solidFill>
+                            <a:srgbClr val="8A867C"/>
+                          </a:solidFill>
+                          <a:latin typeface="Pretendard Medium" pitchFamily="34" charset="0"/>
+                          <a:ea typeface="Pretendard Medium" pitchFamily="34" charset="-122"/>
+                          <a:cs typeface="Pretendard Medium" pitchFamily="34" charset="-120"/>
+                        </a:rPr>
+                        <a:t>7</a:t>
+                      </a:r>
+                      <a:endParaRPr lang="en-US" sz="800" dirty="0">
+                        <a:latin typeface="Pretendard Medium" charset="0"/>
+                        <a:ea typeface="Pretendard Medium" charset="0"/>
+                        <a:cs typeface="Pretendard Medium" charset="0"/>
+                      </a:endParaRPr>
+                    </a:p>
+                  </a:txBody>
+                  <a:tcPr marL="50800" marR="50800" marT="38100" marB="38100" anchor="ctr">
+                    <a:lnL w="0" cap="flat" cmpd="sng" algn="ctr">
+                      <a:noFill/>
+                    </a:lnL>
+                    <a:lnR w="0" cap="flat" cmpd="sng" algn="ctr">
+                      <a:noFill/>
+                    </a:lnR>
+                    <a:lnT w="0" cap="flat" cmpd="sng" algn="ctr">
+                      <a:noFill/>
+                    </a:lnT>
+                    <a:lnB w="6350" cap="flat" cmpd="sng" algn="ctr">
+                      <a:solidFill>
+                        <a:srgbClr val="E6E0D4"/>
+                      </a:solidFill>
+                      <a:prstDash val="solid"/>
+                      <a:round/>
+                      <a:headEnd type="none" w="med" len="med"/>
+                      <a:tailEnd type="none" w="med" len="med"/>
+                    </a:lnB>
+                  </a:tcPr>
+                </a:tc>
+                <a:tc>
+                  <a:txBody>
+                    <a:bodyPr/>
+                    <a:lstStyle/>
+                    <a:p>
+                      <a:pPr indent="0" marL="0">
+                        <a:buNone/>
+                      </a:pPr>
+                      <a:r>
+                        <a:rPr lang="en-US" sz="800" dirty="0">
+                          <a:solidFill>
+                            <a:srgbClr val="2A2926"/>
+                          </a:solidFill>
+                          <a:latin typeface="Menlo" pitchFamily="34" charset="0"/>
+                          <a:ea typeface="Menlo" pitchFamily="34" charset="-122"/>
+                          <a:cs typeface="Menlo" pitchFamily="34" charset="-120"/>
+                        </a:rPr>
+                        <a:t>GET  /wards/{id}/reassignment-logs</a:t>
+                      </a:r>
+                      <a:endParaRPr lang="en-US" sz="800" dirty="0">
+                        <a:latin typeface="Menlo" charset="0"/>
+                        <a:ea typeface="Menlo" charset="0"/>
+                        <a:cs typeface="Menlo" charset="0"/>
+                      </a:endParaRPr>
+                    </a:p>
+                  </a:txBody>
+                  <a:tcPr marL="50800" marR="50800" marT="38100" marB="38100" anchor="ctr">
+                    <a:lnL w="0" cap="flat" cmpd="sng" algn="ctr">
+                      <a:noFill/>
+                    </a:lnL>
+                    <a:lnR w="0" cap="flat" cmpd="sng" algn="ctr">
+                      <a:noFill/>
+                    </a:lnR>
+                    <a:lnT w="0" cap="flat" cmpd="sng" algn="ctr">
+                      <a:noFill/>
+                    </a:lnT>
+                    <a:lnB w="6350" cap="flat" cmpd="sng" algn="ctr">
+                      <a:solidFill>
+                        <a:srgbClr val="E6E0D4"/>
+                      </a:solidFill>
+                      <a:prstDash val="solid"/>
+                      <a:round/>
+                      <a:headEnd type="none" w="med" len="med"/>
+                      <a:tailEnd type="none" w="med" len="med"/>
+                    </a:lnB>
+                  </a:tcPr>
+                </a:tc>
+                <a:tc>
+                  <a:txBody>
+                    <a:bodyPr/>
+                    <a:lstStyle/>
+                    <a:p>
+                      <a:pPr indent="0" marL="0">
+                        <a:buNone/>
+                      </a:pPr>
+                      <a:r>
+                        <a:rPr lang="en-US" sz="800" dirty="0">
+                          <a:solidFill>
+                            <a:srgbClr val="55524B"/>
+                          </a:solidFill>
+                          <a:latin typeface="Pretendard" pitchFamily="34" charset="0"/>
+                          <a:ea typeface="Pretendard" pitchFamily="34" charset="-122"/>
+                          <a:cs typeface="Pretendard" pitchFamily="34" charset="-120"/>
+                        </a:rPr>
+                        <a:t>바뀐 내역</a:t>
+                      </a:r>
+                      <a:endParaRPr lang="en-US" sz="800" dirty="0">
+                        <a:latin typeface="Pretendard" charset="0"/>
+                        <a:ea typeface="Pretendard" charset="0"/>
+                        <a:cs typeface="Pretendard" charset="0"/>
+                      </a:endParaRPr>
+                    </a:p>
+                  </a:txBody>
+                  <a:tcPr marL="50800" marR="50800" marT="38100" marB="38100" anchor="ctr">
+                    <a:lnL w="0" cap="flat" cmpd="sng" algn="ctr">
+                      <a:noFill/>
+                    </a:lnL>
+                    <a:lnR w="0" cap="flat" cmpd="sng" algn="ctr">
+                      <a:noFill/>
+                    </a:lnR>
+                    <a:lnT w="0" cap="flat" cmpd="sng" algn="ctr">
+                      <a:noFill/>
+                    </a:lnT>
+                    <a:lnB w="6350" cap="flat" cmpd="sng" algn="ctr">
+                      <a:solidFill>
+                        <a:srgbClr val="E6E0D4"/>
+                      </a:solidFill>
+                      <a:prstDash val="solid"/>
+                      <a:round/>
+                      <a:headEnd type="none" w="med" len="med"/>
+                      <a:tailEnd type="none" w="med" len="med"/>
+                    </a:lnB>
+                  </a:tcPr>
+                </a:tc>
+              </a:tr>
+              <a:tr h="0">
+                <a:tc>
+                  <a:txBody>
+                    <a:bodyPr/>
+                    <a:lstStyle/>
+                    <a:p>
+                      <a:pPr algn="ctr" indent="0" marL="0">
+                        <a:buNone/>
+                      </a:pPr>
+                      <a:r>
+                        <a:rPr lang="en-US" sz="800" dirty="0">
+                          <a:solidFill>
+                            <a:srgbClr val="8A867C"/>
+                          </a:solidFill>
+                          <a:latin typeface="Pretendard Medium" pitchFamily="34" charset="0"/>
+                          <a:ea typeface="Pretendard Medium" pitchFamily="34" charset="-122"/>
+                          <a:cs typeface="Pretendard Medium" pitchFamily="34" charset="-120"/>
+                        </a:rPr>
+                        <a:t>8</a:t>
+                      </a:r>
+                      <a:endParaRPr lang="en-US" sz="800" dirty="0">
+                        <a:latin typeface="Pretendard Medium" charset="0"/>
+                        <a:ea typeface="Pretendard Medium" charset="0"/>
+                        <a:cs typeface="Pretendard Medium" charset="0"/>
+                      </a:endParaRPr>
+                    </a:p>
+                  </a:txBody>
+                  <a:tcPr marL="50800" marR="50800" marT="38100" marB="38100" anchor="ctr">
+                    <a:lnL w="0" cap="flat" cmpd="sng" algn="ctr">
+                      <a:noFill/>
+                    </a:lnL>
+                    <a:lnR w="0" cap="flat" cmpd="sng" algn="ctr">
+                      <a:noFill/>
+                    </a:lnR>
+                    <a:lnT w="0" cap="flat" cmpd="sng" algn="ctr">
+                      <a:noFill/>
+                    </a:lnT>
+                    <a:lnB w="6350" cap="flat" cmpd="sng" algn="ctr">
+                      <a:solidFill>
+                        <a:srgbClr val="E6E0D4"/>
+                      </a:solidFill>
+                      <a:prstDash val="solid"/>
+                      <a:round/>
+                      <a:headEnd type="none" w="med" len="med"/>
+                      <a:tailEnd type="none" w="med" len="med"/>
+                    </a:lnB>
+                  </a:tcPr>
+                </a:tc>
+                <a:tc>
+                  <a:txBody>
+                    <a:bodyPr/>
+                    <a:lstStyle/>
+                    <a:p>
+                      <a:pPr indent="0" marL="0">
+                        <a:buNone/>
+                      </a:pPr>
+                      <a:r>
+                        <a:rPr lang="en-US" sz="800" dirty="0">
+                          <a:solidFill>
+                            <a:srgbClr val="2A2926"/>
+                          </a:solidFill>
+                          <a:latin typeface="Menlo" pitchFamily="34" charset="0"/>
+                          <a:ea typeface="Menlo" pitchFamily="34" charset="-122"/>
+                          <a:cs typeface="Menlo" pitchFamily="34" charset="-120"/>
+                        </a:rPr>
+                        <a:t>GET  /me/shifts</a:t>
+                      </a:r>
+                      <a:endParaRPr lang="en-US" sz="800" dirty="0">
+                        <a:latin typeface="Menlo" charset="0"/>
+                        <a:ea typeface="Menlo" charset="0"/>
+                        <a:cs typeface="Menlo" charset="0"/>
+                      </a:endParaRPr>
+                    </a:p>
+                  </a:txBody>
+                  <a:tcPr marL="50800" marR="50800" marT="38100" marB="38100" anchor="ctr">
+                    <a:lnL w="0" cap="flat" cmpd="sng" algn="ctr">
+                      <a:noFill/>
+                    </a:lnL>
+                    <a:lnR w="0" cap="flat" cmpd="sng" algn="ctr">
+                      <a:noFill/>
+                    </a:lnR>
+                    <a:lnT w="0" cap="flat" cmpd="sng" algn="ctr">
+                      <a:noFill/>
+                    </a:lnT>
+                    <a:lnB w="6350" cap="flat" cmpd="sng" algn="ctr">
+                      <a:solidFill>
+                        <a:srgbClr val="E6E0D4"/>
+                      </a:solidFill>
+                      <a:prstDash val="solid"/>
+                      <a:round/>
+                      <a:headEnd type="none" w="med" len="med"/>
+                      <a:tailEnd type="none" w="med" len="med"/>
+                    </a:lnB>
+                  </a:tcPr>
+                </a:tc>
+                <a:tc>
+                  <a:txBody>
+                    <a:bodyPr/>
+                    <a:lstStyle/>
+                    <a:p>
+                      <a:pPr indent="0" marL="0">
+                        <a:buNone/>
+                      </a:pPr>
+                      <a:r>
+                        <a:rPr lang="en-US" sz="800" dirty="0">
+                          <a:solidFill>
+                            <a:srgbClr val="55524B"/>
+                          </a:solidFill>
+                          <a:latin typeface="Pretendard" pitchFamily="34" charset="0"/>
+                          <a:ea typeface="Pretendard" pitchFamily="34" charset="-122"/>
+                          <a:cs typeface="Pretendard" pitchFamily="34" charset="-120"/>
+                        </a:rPr>
+                        <a:t>내 근무, 우리 팀 환자</a:t>
+                      </a:r>
+                      <a:endParaRPr lang="en-US" sz="800" dirty="0">
+                        <a:latin typeface="Pretendard" charset="0"/>
+                        <a:ea typeface="Pretendard" charset="0"/>
+                        <a:cs typeface="Pretendard" charset="0"/>
+                      </a:endParaRPr>
+                    </a:p>
+                  </a:txBody>
+                  <a:tcPr marL="50800" marR="50800" marT="38100" marB="38100" anchor="ctr">
+                    <a:lnL w="0" cap="flat" cmpd="sng" algn="ctr">
+                      <a:noFill/>
+                    </a:lnL>
+                    <a:lnR w="0" cap="flat" cmpd="sng" algn="ctr">
+                      <a:noFill/>
+                    </a:lnR>
+                    <a:lnT w="0" cap="flat" cmpd="sng" algn="ctr">
+                      <a:noFill/>
+                    </a:lnT>
+                    <a:lnB w="6350" cap="flat" cmpd="sng" algn="ctr">
+                      <a:solidFill>
+                        <a:srgbClr val="E6E0D4"/>
+                      </a:solidFill>
+                      <a:prstDash val="solid"/>
+                      <a:round/>
+                      <a:headEnd type="none" w="med" len="med"/>
+                      <a:tailEnd type="none" w="med" len="med"/>
+                    </a:lnB>
+                  </a:tcPr>
+                </a:tc>
+              </a:tr>
+              <a:tr h="0">
+                <a:tc>
+                  <a:txBody>
+                    <a:bodyPr/>
+                    <a:lstStyle/>
+                    <a:p>
+                      <a:pPr algn="ctr" indent="0" marL="0">
+                        <a:buNone/>
+                      </a:pPr>
+                      <a:r>
+                        <a:rPr lang="en-US" sz="800" dirty="0">
+                          <a:solidFill>
+                            <a:srgbClr val="8A867C"/>
+                          </a:solidFill>
+                          <a:latin typeface="Pretendard Medium" pitchFamily="34" charset="0"/>
+                          <a:ea typeface="Pretendard Medium" pitchFamily="34" charset="-122"/>
+                          <a:cs typeface="Pretendard Medium" pitchFamily="34" charset="-120"/>
+                        </a:rPr>
+                        <a:t>11</a:t>
+                      </a:r>
+                      <a:endParaRPr lang="en-US" sz="800" dirty="0">
+                        <a:latin typeface="Pretendard Medium" charset="0"/>
+                        <a:ea typeface="Pretendard Medium" charset="0"/>
+                        <a:cs typeface="Pretendard Medium" charset="0"/>
+                      </a:endParaRPr>
+                    </a:p>
+                  </a:txBody>
+                  <a:tcPr marL="50800" marR="50800" marT="38100" marB="38100" anchor="ctr">
+                    <a:lnL w="0" cap="flat" cmpd="sng" algn="ctr">
+                      <a:noFill/>
+                    </a:lnL>
+                    <a:lnR w="0" cap="flat" cmpd="sng" algn="ctr">
+                      <a:noFill/>
+                    </a:lnR>
+                    <a:lnT w="0" cap="flat" cmpd="sng" algn="ctr">
+                      <a:noFill/>
+                    </a:lnT>
+                    <a:lnB w="6350" cap="flat" cmpd="sng" algn="ctr">
+                      <a:solidFill>
+                        <a:srgbClr val="E6E0D4"/>
+                      </a:solidFill>
+                      <a:prstDash val="solid"/>
+                      <a:round/>
+                      <a:headEnd type="none" w="med" len="med"/>
+                      <a:tailEnd type="none" w="med" len="med"/>
+                    </a:lnB>
+                  </a:tcPr>
+                </a:tc>
+                <a:tc>
+                  <a:txBody>
+                    <a:bodyPr/>
+                    <a:lstStyle/>
+                    <a:p>
+                      <a:pPr indent="0" marL="0">
+                        <a:buNone/>
+                      </a:pPr>
+                      <a:r>
+                        <a:rPr lang="en-US" sz="800" dirty="0">
+                          <a:solidFill>
+                            <a:srgbClr val="2A2926"/>
+                          </a:solidFill>
+                          <a:latin typeface="Menlo" pitchFamily="34" charset="0"/>
+                          <a:ea typeface="Menlo" pitchFamily="34" charset="-122"/>
+                          <a:cs typeface="Menlo" pitchFamily="34" charset="-120"/>
+                        </a:rPr>
+                        <a:t>GET  /me/handovers</a:t>
+                      </a:r>
+                      <a:endParaRPr lang="en-US" sz="800" dirty="0">
+                        <a:latin typeface="Menlo" charset="0"/>
+                        <a:ea typeface="Menlo" charset="0"/>
+                        <a:cs typeface="Menlo" charset="0"/>
+                      </a:endParaRPr>
+                    </a:p>
+                  </a:txBody>
+                  <a:tcPr marL="50800" marR="50800" marT="38100" marB="38100" anchor="ctr">
+                    <a:lnL w="0" cap="flat" cmpd="sng" algn="ctr">
+                      <a:noFill/>
+                    </a:lnL>
+                    <a:lnR w="0" cap="flat" cmpd="sng" algn="ctr">
+                      <a:noFill/>
+                    </a:lnR>
+                    <a:lnT w="0" cap="flat" cmpd="sng" algn="ctr">
+                      <a:noFill/>
+                    </a:lnT>
+                    <a:lnB w="6350" cap="flat" cmpd="sng" algn="ctr">
+                      <a:solidFill>
+                        <a:srgbClr val="E6E0D4"/>
+                      </a:solidFill>
+                      <a:prstDash val="solid"/>
+                      <a:round/>
+                      <a:headEnd type="none" w="med" len="med"/>
+                      <a:tailEnd type="none" w="med" len="med"/>
+                    </a:lnB>
+                  </a:tcPr>
+                </a:tc>
+                <a:tc>
+                  <a:txBody>
+                    <a:bodyPr/>
+                    <a:lstStyle/>
+                    <a:p>
+                      <a:pPr indent="0" marL="0">
+                        <a:buNone/>
+                      </a:pPr>
+                      <a:r>
+                        <a:rPr lang="en-US" sz="800" dirty="0">
+                          <a:solidFill>
+                            <a:srgbClr val="55524B"/>
+                          </a:solidFill>
+                          <a:latin typeface="Pretendard" pitchFamily="34" charset="0"/>
+                          <a:ea typeface="Pretendard" pitchFamily="34" charset="-122"/>
+                          <a:cs typeface="Pretendard" pitchFamily="34" charset="-120"/>
+                        </a:rPr>
+                        <a:t>내 인계 이력</a:t>
+                      </a:r>
+                      <a:endParaRPr lang="en-US" sz="800" dirty="0">
+                        <a:latin typeface="Pretendard" charset="0"/>
+                        <a:ea typeface="Pretendard" charset="0"/>
+                        <a:cs typeface="Pretendard" charset="0"/>
+                      </a:endParaRPr>
+                    </a:p>
+                  </a:txBody>
+                  <a:tcPr marL="50800" marR="50800" marT="38100" marB="38100" anchor="ctr">
+                    <a:lnL w="0" cap="flat" cmpd="sng" algn="ctr">
+                      <a:noFill/>
+                    </a:lnL>
+                    <a:lnR w="0" cap="flat" cmpd="sng" algn="ctr">
+                      <a:noFill/>
+                    </a:lnR>
+                    <a:lnT w="0" cap="flat" cmpd="sng" algn="ctr">
+                      <a:noFill/>
+                    </a:lnT>
+                    <a:lnB w="6350" cap="flat" cmpd="sng" algn="ctr">
+                      <a:solidFill>
+                        <a:srgbClr val="E6E0D4"/>
+                      </a:solidFill>
+                      <a:prstDash val="solid"/>
+                      <a:round/>
+                      <a:headEnd type="none" w="med" len="med"/>
+                      <a:tailEnd type="none" w="med" len="med"/>
+                    </a:lnB>
+                  </a:tcPr>
+                </a:tc>
+              </a:tr>
+              <a:tr h="0">
+                <a:tc>
+                  <a:txBody>
+                    <a:bodyPr/>
+                    <a:lstStyle/>
+                    <a:p>
+                      <a:pPr algn="ctr" indent="0" marL="0">
+                        <a:buNone/>
+                      </a:pPr>
+                      <a:r>
+                        <a:rPr lang="en-US" sz="800" dirty="0">
+                          <a:solidFill>
+                            <a:srgbClr val="8A867C"/>
+                          </a:solidFill>
+                          <a:latin typeface="Pretendard Medium" pitchFamily="34" charset="0"/>
+                          <a:ea typeface="Pretendard Medium" pitchFamily="34" charset="-122"/>
+                          <a:cs typeface="Pretendard Medium" pitchFamily="34" charset="-120"/>
+                        </a:rPr>
+                        <a:t>9</a:t>
+                      </a:r>
+                      <a:endParaRPr lang="en-US" sz="800" dirty="0">
+                        <a:latin typeface="Pretendard Medium" charset="0"/>
+                        <a:ea typeface="Pretendard Medium" charset="0"/>
+                        <a:cs typeface="Pretendard Medium" charset="0"/>
+                      </a:endParaRPr>
+                    </a:p>
+                  </a:txBody>
+                  <a:tcPr marL="50800" marR="50800" marT="38100" marB="38100" anchor="ctr">
+                    <a:lnL w="0" cap="flat" cmpd="sng" algn="ctr">
+                      <a:noFill/>
+                    </a:lnL>
+                    <a:lnR w="0" cap="flat" cmpd="sng" algn="ctr">
+                      <a:noFill/>
+                    </a:lnR>
+                    <a:lnT w="0" cap="flat" cmpd="sng" algn="ctr">
+                      <a:noFill/>
+                    </a:lnT>
+                    <a:lnB w="6350" cap="flat" cmpd="sng" algn="ctr">
+                      <a:solidFill>
+                        <a:srgbClr val="E6E0D4"/>
+                      </a:solidFill>
+                      <a:prstDash val="solid"/>
+                      <a:round/>
+                      <a:headEnd type="none" w="med" len="med"/>
+                      <a:tailEnd type="none" w="med" len="med"/>
+                    </a:lnB>
+                  </a:tcPr>
+                </a:tc>
+                <a:tc>
+                  <a:txBody>
+                    <a:bodyPr/>
+                    <a:lstStyle/>
+                    <a:p>
+                      <a:pPr indent="0" marL="0">
+                        <a:buNone/>
+                      </a:pPr>
+                      <a:r>
+                        <a:rPr lang="en-US" sz="800" dirty="0">
+                          <a:solidFill>
+                            <a:srgbClr val="2A2926"/>
+                          </a:solidFill>
+                          <a:latin typeface="Menlo" pitchFamily="34" charset="0"/>
+                          <a:ea typeface="Menlo" pitchFamily="34" charset="-122"/>
+                          <a:cs typeface="Menlo" pitchFamily="34" charset="-120"/>
+                        </a:rPr>
+                        <a:t>POST /handovers</a:t>
+                      </a:r>
+                      <a:endParaRPr lang="en-US" sz="800" dirty="0">
+                        <a:latin typeface="Menlo" charset="0"/>
+                        <a:ea typeface="Menlo" charset="0"/>
+                        <a:cs typeface="Menlo" charset="0"/>
+                      </a:endParaRPr>
+                    </a:p>
+                  </a:txBody>
+                  <a:tcPr marL="50800" marR="50800" marT="38100" marB="38100" anchor="ctr">
+                    <a:lnL w="0" cap="flat" cmpd="sng" algn="ctr">
+                      <a:noFill/>
+                    </a:lnL>
+                    <a:lnR w="0" cap="flat" cmpd="sng" algn="ctr">
+                      <a:noFill/>
+                    </a:lnR>
+                    <a:lnT w="0" cap="flat" cmpd="sng" algn="ctr">
+                      <a:noFill/>
+                    </a:lnT>
+                    <a:lnB w="6350" cap="flat" cmpd="sng" algn="ctr">
+                      <a:solidFill>
+                        <a:srgbClr val="E6E0D4"/>
+                      </a:solidFill>
+                      <a:prstDash val="solid"/>
+                      <a:round/>
+                      <a:headEnd type="none" w="med" len="med"/>
+                      <a:tailEnd type="none" w="med" len="med"/>
+                    </a:lnB>
+                  </a:tcPr>
+                </a:tc>
+                <a:tc>
+                  <a:txBody>
+                    <a:bodyPr/>
+                    <a:lstStyle/>
+                    <a:p>
+                      <a:pPr indent="0" marL="0">
+                        <a:buNone/>
+                      </a:pPr>
+                      <a:r>
+                        <a:rPr lang="en-US" sz="800" dirty="0">
+                          <a:solidFill>
+                            <a:srgbClr val="55524B"/>
+                          </a:solidFill>
+                          <a:latin typeface="Pretendard" pitchFamily="34" charset="0"/>
+                          <a:ea typeface="Pretendard" pitchFamily="34" charset="-122"/>
+                          <a:cs typeface="Pretendard" pitchFamily="34" charset="-120"/>
+                        </a:rPr>
+                        <a:t>인계 작성 시작</a:t>
+                      </a:r>
+                      <a:endParaRPr lang="en-US" sz="800" dirty="0">
+                        <a:latin typeface="Pretendard" charset="0"/>
+                        <a:ea typeface="Pretendard" charset="0"/>
+                        <a:cs typeface="Pretendard" charset="0"/>
+                      </a:endParaRPr>
+                    </a:p>
+                  </a:txBody>
+                  <a:tcPr marL="50800" marR="50800" marT="38100" marB="38100" anchor="ctr">
+                    <a:lnL w="0" cap="flat" cmpd="sng" algn="ctr">
+                      <a:noFill/>
+                    </a:lnL>
+                    <a:lnR w="0" cap="flat" cmpd="sng" algn="ctr">
+                      <a:noFill/>
+                    </a:lnR>
+                    <a:lnT w="0" cap="flat" cmpd="sng" algn="ctr">
+                      <a:noFill/>
+                    </a:lnT>
+                    <a:lnB w="6350" cap="flat" cmpd="sng" algn="ctr">
+                      <a:solidFill>
+                        <a:srgbClr val="E6E0D4"/>
+                      </a:solidFill>
+                      <a:prstDash val="solid"/>
+                      <a:round/>
+                      <a:headEnd type="none" w="med" len="med"/>
+                      <a:tailEnd type="none" w="med" len="med"/>
+                    </a:lnB>
+                  </a:tcPr>
+                </a:tc>
+              </a:tr>
+              <a:tr h="0">
+                <a:tc>
+                  <a:txBody>
+                    <a:bodyPr/>
+                    <a:lstStyle/>
+                    <a:p>
+                      <a:pPr algn="ctr" indent="0" marL="0">
+                        <a:buNone/>
+                      </a:pPr>
+                      <a:r>
+                        <a:rPr lang="en-US" sz="800" dirty="0">
+                          <a:solidFill>
+                            <a:srgbClr val="8A867C"/>
+                          </a:solidFill>
+                          <a:latin typeface="Pretendard Medium" pitchFamily="34" charset="0"/>
+                          <a:ea typeface="Pretendard Medium" pitchFamily="34" charset="-122"/>
+                          <a:cs typeface="Pretendard Medium" pitchFamily="34" charset="-120"/>
+                        </a:rPr>
+                        <a:t>9·10</a:t>
+                      </a:r>
+                      <a:endParaRPr lang="en-US" sz="800" dirty="0">
+                        <a:latin typeface="Pretendard Medium" charset="0"/>
+                        <a:ea typeface="Pretendard Medium" charset="0"/>
+                        <a:cs typeface="Pretendard Medium" charset="0"/>
+                      </a:endParaRPr>
+                    </a:p>
+                  </a:txBody>
+                  <a:tcPr marL="50800" marR="50800" marT="38100" marB="38100" anchor="ctr">
+                    <a:lnL w="0" cap="flat" cmpd="sng" algn="ctr">
+                      <a:noFill/>
+                    </a:lnL>
+                    <a:lnR w="0" cap="flat" cmpd="sng" algn="ctr">
+                      <a:noFill/>
+                    </a:lnR>
+                    <a:lnT w="0" cap="flat" cmpd="sng" algn="ctr">
+                      <a:noFill/>
+                    </a:lnT>
+                    <a:lnB w="6350" cap="flat" cmpd="sng" algn="ctr">
+                      <a:solidFill>
+                        <a:srgbClr val="E6E0D4"/>
+                      </a:solidFill>
+                      <a:prstDash val="solid"/>
+                      <a:round/>
+                      <a:headEnd type="none" w="med" len="med"/>
+                      <a:tailEnd type="none" w="med" len="med"/>
+                    </a:lnB>
+                  </a:tcPr>
+                </a:tc>
+                <a:tc>
+                  <a:txBody>
+                    <a:bodyPr/>
+                    <a:lstStyle/>
+                    <a:p>
+                      <a:pPr indent="0" marL="0">
+                        <a:buNone/>
+                      </a:pPr>
+                      <a:r>
+                        <a:rPr lang="en-US" sz="800" dirty="0">
+                          <a:solidFill>
+                            <a:srgbClr val="2A2926"/>
+                          </a:solidFill>
+                          <a:latin typeface="Menlo" pitchFamily="34" charset="0"/>
+                          <a:ea typeface="Menlo" pitchFamily="34" charset="-122"/>
+                          <a:cs typeface="Menlo" pitchFamily="34" charset="-120"/>
+                        </a:rPr>
+                        <a:t>GET  /handovers/{id}</a:t>
+                      </a:r>
+                      <a:endParaRPr lang="en-US" sz="800" dirty="0">
+                        <a:latin typeface="Menlo" charset="0"/>
+                        <a:ea typeface="Menlo" charset="0"/>
+                        <a:cs typeface="Menlo" charset="0"/>
+                      </a:endParaRPr>
+                    </a:p>
+                  </a:txBody>
+                  <a:tcPr marL="50800" marR="50800" marT="38100" marB="38100" anchor="ctr">
+                    <a:lnL w="0" cap="flat" cmpd="sng" algn="ctr">
+                      <a:noFill/>
+                    </a:lnL>
+                    <a:lnR w="0" cap="flat" cmpd="sng" algn="ctr">
+                      <a:noFill/>
+                    </a:lnR>
+                    <a:lnT w="0" cap="flat" cmpd="sng" algn="ctr">
+                      <a:noFill/>
+                    </a:lnT>
+                    <a:lnB w="6350" cap="flat" cmpd="sng" algn="ctr">
+                      <a:solidFill>
+                        <a:srgbClr val="E6E0D4"/>
+                      </a:solidFill>
+                      <a:prstDash val="solid"/>
+                      <a:round/>
+                      <a:headEnd type="none" w="med" len="med"/>
+                      <a:tailEnd type="none" w="med" len="med"/>
+                    </a:lnB>
+                  </a:tcPr>
+                </a:tc>
+                <a:tc>
+                  <a:txBody>
+                    <a:bodyPr/>
+                    <a:lstStyle/>
+                    <a:p>
+                      <a:pPr indent="0" marL="0">
+                        <a:buNone/>
+                      </a:pPr>
+                      <a:r>
+                        <a:rPr lang="en-US" sz="800" dirty="0">
+                          <a:solidFill>
+                            <a:srgbClr val="55524B"/>
+                          </a:solidFill>
+                          <a:latin typeface="Pretendard" pitchFamily="34" charset="0"/>
+                          <a:ea typeface="Pretendard" pitchFamily="34" charset="-122"/>
+                          <a:cs typeface="Pretendard" pitchFamily="34" charset="-120"/>
+                        </a:rPr>
+                        <a:t>인계 상세</a:t>
+                      </a:r>
+                      <a:endParaRPr lang="en-US" sz="800" dirty="0">
+                        <a:latin typeface="Pretendard" charset="0"/>
+                        <a:ea typeface="Pretendard" charset="0"/>
+                        <a:cs typeface="Pretendard" charset="0"/>
+                      </a:endParaRPr>
+                    </a:p>
+                  </a:txBody>
+                  <a:tcPr marL="50800" marR="50800" marT="38100" marB="38100" anchor="ctr">
+                    <a:lnL w="0" cap="flat" cmpd="sng" algn="ctr">
+                      <a:noFill/>
+                    </a:lnL>
+                    <a:lnR w="0" cap="flat" cmpd="sng" algn="ctr">
+                      <a:noFill/>
+                    </a:lnR>
+                    <a:lnT w="0" cap="flat" cmpd="sng" algn="ctr">
+                      <a:noFill/>
+                    </a:lnT>
+                    <a:lnB w="6350" cap="flat" cmpd="sng" algn="ctr">
+                      <a:solidFill>
+                        <a:srgbClr val="E6E0D4"/>
+                      </a:solidFill>
+                      <a:prstDash val="solid"/>
+                      <a:round/>
+                      <a:headEnd type="none" w="med" len="med"/>
+                      <a:tailEnd type="none" w="med" len="med"/>
+                    </a:lnB>
+                  </a:tcPr>
+                </a:tc>
+              </a:tr>
+              <a:tr h="0">
+                <a:tc>
+                  <a:txBody>
+                    <a:bodyPr/>
+                    <a:lstStyle/>
+                    <a:p>
+                      <a:pPr algn="ctr" indent="0" marL="0">
+                        <a:buNone/>
+                      </a:pPr>
+                      <a:r>
+                        <a:rPr lang="en-US" sz="800" dirty="0">
+                          <a:solidFill>
+                            <a:srgbClr val="8A867C"/>
+                          </a:solidFill>
+                          <a:latin typeface="Pretendard Medium" pitchFamily="34" charset="0"/>
+                          <a:ea typeface="Pretendard Medium" pitchFamily="34" charset="-122"/>
+                          <a:cs typeface="Pretendard Medium" pitchFamily="34" charset="-120"/>
+                        </a:rPr>
+                        <a:t>9</a:t>
+                      </a:r>
+                      <a:endParaRPr lang="en-US" sz="800" dirty="0">
+                        <a:latin typeface="Pretendard Medium" charset="0"/>
+                        <a:ea typeface="Pretendard Medium" charset="0"/>
+                        <a:cs typeface="Pretendard Medium" charset="0"/>
+                      </a:endParaRPr>
+                    </a:p>
+                  </a:txBody>
+                  <a:tcPr marL="50800" marR="50800" marT="38100" marB="38100" anchor="ctr">
+                    <a:lnL w="0" cap="flat" cmpd="sng" algn="ctr">
+                      <a:noFill/>
+                    </a:lnL>
+                    <a:lnR w="0" cap="flat" cmpd="sng" algn="ctr">
+                      <a:noFill/>
+                    </a:lnR>
+                    <a:lnT w="0" cap="flat" cmpd="sng" algn="ctr">
+                      <a:noFill/>
+                    </a:lnT>
+                    <a:lnB w="6350" cap="flat" cmpd="sng" algn="ctr">
+                      <a:solidFill>
+                        <a:srgbClr val="E6E0D4"/>
+                      </a:solidFill>
+                      <a:prstDash val="solid"/>
+                      <a:round/>
+                      <a:headEnd type="none" w="med" len="med"/>
+                      <a:tailEnd type="none" w="med" len="med"/>
+                    </a:lnB>
+                  </a:tcPr>
+                </a:tc>
+                <a:tc>
+                  <a:txBody>
+                    <a:bodyPr/>
+                    <a:lstStyle/>
+                    <a:p>
+                      <a:pPr indent="0" marL="0">
+                        <a:buNone/>
+                      </a:pPr>
+                      <a:r>
+                        <a:rPr lang="en-US" sz="800" dirty="0">
+                          <a:solidFill>
+                            <a:srgbClr val="2A2926"/>
+                          </a:solidFill>
+                          <a:latin typeface="Menlo" pitchFamily="34" charset="0"/>
+                          <a:ea typeface="Menlo" pitchFamily="34" charset="-122"/>
+                          <a:cs typeface="Menlo" pitchFamily="34" charset="-120"/>
+                        </a:rPr>
+                        <a:t>PATCH /handovers/{id}/items</a:t>
+                      </a:r>
+                      <a:endParaRPr lang="en-US" sz="800" dirty="0">
+                        <a:latin typeface="Menlo" charset="0"/>
+                        <a:ea typeface="Menlo" charset="0"/>
+                        <a:cs typeface="Menlo" charset="0"/>
+                      </a:endParaRPr>
+                    </a:p>
+                  </a:txBody>
+                  <a:tcPr marL="50800" marR="50800" marT="38100" marB="38100" anchor="ctr">
+                    <a:lnL w="0" cap="flat" cmpd="sng" algn="ctr">
+                      <a:noFill/>
+                    </a:lnL>
+                    <a:lnR w="0" cap="flat" cmpd="sng" algn="ctr">
+                      <a:noFill/>
+                    </a:lnR>
+                    <a:lnT w="0" cap="flat" cmpd="sng" algn="ctr">
+                      <a:noFill/>
+                    </a:lnT>
+                    <a:lnB w="6350" cap="flat" cmpd="sng" algn="ctr">
+                      <a:solidFill>
+                        <a:srgbClr val="E6E0D4"/>
+                      </a:solidFill>
+                      <a:prstDash val="solid"/>
+                      <a:round/>
+                      <a:headEnd type="none" w="med" len="med"/>
+                      <a:tailEnd type="none" w="med" len="med"/>
+                    </a:lnB>
+                  </a:tcPr>
+                </a:tc>
+                <a:tc>
+                  <a:txBody>
+                    <a:bodyPr/>
+                    <a:lstStyle/>
+                    <a:p>
+                      <a:pPr indent="0" marL="0">
+                        <a:buNone/>
+                      </a:pPr>
+                      <a:r>
+                        <a:rPr lang="en-US" sz="800" dirty="0">
+                          <a:solidFill>
+                            <a:srgbClr val="55524B"/>
+                          </a:solidFill>
+                          <a:latin typeface="Pretendard" pitchFamily="34" charset="0"/>
+                          <a:ea typeface="Pretendard" pitchFamily="34" charset="-122"/>
+                          <a:cs typeface="Pretendard" pitchFamily="34" charset="-120"/>
+                        </a:rPr>
+                        <a:t>임시저장</a:t>
+                      </a:r>
+                      <a:endParaRPr lang="en-US" sz="800" dirty="0">
+                        <a:latin typeface="Pretendard" charset="0"/>
+                        <a:ea typeface="Pretendard" charset="0"/>
+                        <a:cs typeface="Pretendard" charset="0"/>
+                      </a:endParaRPr>
+                    </a:p>
+                  </a:txBody>
+                  <a:tcPr marL="50800" marR="50800" marT="38100" marB="38100" anchor="ctr">
+                    <a:lnL w="0" cap="flat" cmpd="sng" algn="ctr">
+                      <a:noFill/>
+                    </a:lnL>
+                    <a:lnR w="0" cap="flat" cmpd="sng" algn="ctr">
+                      <a:noFill/>
+                    </a:lnR>
+                    <a:lnT w="0" cap="flat" cmpd="sng" algn="ctr">
+                      <a:noFill/>
+                    </a:lnT>
+                    <a:lnB w="6350" cap="flat" cmpd="sng" algn="ctr">
+                      <a:solidFill>
+                        <a:srgbClr val="E6E0D4"/>
+                      </a:solidFill>
+                      <a:prstDash val="solid"/>
+                      <a:round/>
+                      <a:headEnd type="none" w="med" len="med"/>
+                      <a:tailEnd type="none" w="med" len="med"/>
+                    </a:lnB>
+                  </a:tcPr>
+                </a:tc>
+              </a:tr>
+              <a:tr h="0">
+                <a:tc>
+                  <a:txBody>
+                    <a:bodyPr/>
+                    <a:lstStyle/>
+                    <a:p>
+                      <a:pPr algn="ctr" indent="0" marL="0">
+                        <a:buNone/>
+                      </a:pPr>
+                      <a:r>
+                        <a:rPr lang="en-US" sz="800" dirty="0">
+                          <a:solidFill>
+                            <a:srgbClr val="8A867C"/>
+                          </a:solidFill>
+                          <a:latin typeface="Pretendard Medium" pitchFamily="34" charset="0"/>
+                          <a:ea typeface="Pretendard Medium" pitchFamily="34" charset="-122"/>
+                          <a:cs typeface="Pretendard Medium" pitchFamily="34" charset="-120"/>
+                        </a:rPr>
+                        <a:t>9</a:t>
+                      </a:r>
+                      <a:endParaRPr lang="en-US" sz="800" dirty="0">
+                        <a:latin typeface="Pretendard Medium" charset="0"/>
+                        <a:ea typeface="Pretendard Medium" charset="0"/>
+                        <a:cs typeface="Pretendard Medium" charset="0"/>
+                      </a:endParaRPr>
+                    </a:p>
+                  </a:txBody>
+                  <a:tcPr marL="50800" marR="50800" marT="38100" marB="38100" anchor="ctr">
+                    <a:lnL w="0" cap="flat" cmpd="sng" algn="ctr">
+                      <a:noFill/>
+                    </a:lnL>
+                    <a:lnR w="0" cap="flat" cmpd="sng" algn="ctr">
+                      <a:noFill/>
+                    </a:lnR>
+                    <a:lnT w="0" cap="flat" cmpd="sng" algn="ctr">
+                      <a:noFill/>
+                    </a:lnT>
+                    <a:lnB w="6350" cap="flat" cmpd="sng" algn="ctr">
+                      <a:solidFill>
+                        <a:srgbClr val="E6E0D4"/>
+                      </a:solidFill>
+                      <a:prstDash val="solid"/>
+                      <a:round/>
+                      <a:headEnd type="none" w="med" len="med"/>
+                      <a:tailEnd type="none" w="med" len="med"/>
+                    </a:lnB>
+                  </a:tcPr>
+                </a:tc>
+                <a:tc>
+                  <a:txBody>
+                    <a:bodyPr/>
+                    <a:lstStyle/>
+                    <a:p>
+                      <a:pPr indent="0" marL="0">
+                        <a:buNone/>
+                      </a:pPr>
+                      <a:r>
+                        <a:rPr lang="en-US" sz="800" dirty="0">
+                          <a:solidFill>
+                            <a:srgbClr val="2A2926"/>
+                          </a:solidFill>
+                          <a:latin typeface="Menlo" pitchFamily="34" charset="0"/>
+                          <a:ea typeface="Menlo" pitchFamily="34" charset="-122"/>
+                          <a:cs typeface="Menlo" pitchFamily="34" charset="-120"/>
+                        </a:rPr>
+                        <a:t>POST /handovers/{id}/send</a:t>
+                      </a:r>
+                      <a:endParaRPr lang="en-US" sz="800" dirty="0">
+                        <a:latin typeface="Menlo" charset="0"/>
+                        <a:ea typeface="Menlo" charset="0"/>
+                        <a:cs typeface="Menlo" charset="0"/>
+                      </a:endParaRPr>
+                    </a:p>
+                  </a:txBody>
+                  <a:tcPr marL="50800" marR="50800" marT="38100" marB="38100" anchor="ctr">
+                    <a:lnL w="0" cap="flat" cmpd="sng" algn="ctr">
+                      <a:noFill/>
+                    </a:lnL>
+                    <a:lnR w="0" cap="flat" cmpd="sng" algn="ctr">
+                      <a:noFill/>
+                    </a:lnR>
+                    <a:lnT w="0" cap="flat" cmpd="sng" algn="ctr">
+                      <a:noFill/>
+                    </a:lnT>
+                    <a:lnB w="6350" cap="flat" cmpd="sng" algn="ctr">
+                      <a:solidFill>
+                        <a:srgbClr val="E6E0D4"/>
+                      </a:solidFill>
+                      <a:prstDash val="solid"/>
+                      <a:round/>
+                      <a:headEnd type="none" w="med" len="med"/>
+                      <a:tailEnd type="none" w="med" len="med"/>
+                    </a:lnB>
+                  </a:tcPr>
+                </a:tc>
+                <a:tc>
+                  <a:txBody>
+                    <a:bodyPr/>
+                    <a:lstStyle/>
+                    <a:p>
+                      <a:pPr indent="0" marL="0">
+                        <a:buNone/>
+                      </a:pPr>
+                      <a:r>
+                        <a:rPr lang="en-US" sz="800" dirty="0">
+                          <a:solidFill>
+                            <a:srgbClr val="55524B"/>
+                          </a:solidFill>
+                          <a:latin typeface="Pretendard" pitchFamily="34" charset="0"/>
+                          <a:ea typeface="Pretendard" pitchFamily="34" charset="-122"/>
+                          <a:cs typeface="Pretendard" pitchFamily="34" charset="-120"/>
+                        </a:rPr>
+                        <a:t>인계 넘기기</a:t>
+                      </a:r>
+                      <a:endParaRPr lang="en-US" sz="800" dirty="0">
+                        <a:latin typeface="Pretendard" charset="0"/>
+                        <a:ea typeface="Pretendard" charset="0"/>
+                        <a:cs typeface="Pretendard" charset="0"/>
+                      </a:endParaRPr>
+                    </a:p>
+                  </a:txBody>
+                  <a:tcPr marL="50800" marR="50800" marT="38100" marB="38100" anchor="ctr">
+                    <a:lnL w="0" cap="flat" cmpd="sng" algn="ctr">
+                      <a:noFill/>
+                    </a:lnL>
+                    <a:lnR w="0" cap="flat" cmpd="sng" algn="ctr">
+                      <a:noFill/>
+                    </a:lnR>
+                    <a:lnT w="0" cap="flat" cmpd="sng" algn="ctr">
+                      <a:noFill/>
+                    </a:lnT>
+                    <a:lnB w="6350" cap="flat" cmpd="sng" algn="ctr">
+                      <a:solidFill>
+                        <a:srgbClr val="E6E0D4"/>
+                      </a:solidFill>
+                      <a:prstDash val="solid"/>
+                      <a:round/>
+                      <a:headEnd type="none" w="med" len="med"/>
+                      <a:tailEnd type="none" w="med" len="med"/>
+                    </a:lnB>
+                  </a:tcPr>
+                </a:tc>
+              </a:tr>
+              <a:tr h="0">
+                <a:tc>
+                  <a:txBody>
+                    <a:bodyPr/>
+                    <a:lstStyle/>
+                    <a:p>
+                      <a:pPr algn="ctr" indent="0" marL="0">
+                        <a:buNone/>
+                      </a:pPr>
+                      <a:r>
+                        <a:rPr lang="en-US" sz="800" dirty="0">
+                          <a:solidFill>
+                            <a:srgbClr val="8A867C"/>
+                          </a:solidFill>
+                          <a:latin typeface="Pretendard Medium" pitchFamily="34" charset="0"/>
+                          <a:ea typeface="Pretendard Medium" pitchFamily="34" charset="-122"/>
+                          <a:cs typeface="Pretendard Medium" pitchFamily="34" charset="-120"/>
+                        </a:rPr>
+                        <a:t>10</a:t>
+                      </a:r>
+                      <a:endParaRPr lang="en-US" sz="800" dirty="0">
+                        <a:latin typeface="Pretendard Medium" charset="0"/>
+                        <a:ea typeface="Pretendard Medium" charset="0"/>
+                        <a:cs typeface="Pretendard Medium" charset="0"/>
+                      </a:endParaRPr>
+                    </a:p>
+                  </a:txBody>
+                  <a:tcPr marL="50800" marR="50800" marT="38100" marB="38100" anchor="ctr">
+                    <a:lnL w="0" cap="flat" cmpd="sng" algn="ctr">
+                      <a:noFill/>
+                    </a:lnL>
+                    <a:lnR w="0" cap="flat" cmpd="sng" algn="ctr">
+                      <a:noFill/>
+                    </a:lnR>
+                    <a:lnT w="0" cap="flat" cmpd="sng" algn="ctr">
+                      <a:noFill/>
+                    </a:lnT>
+                    <a:lnB w="6350" cap="flat" cmpd="sng" algn="ctr">
+                      <a:solidFill>
+                        <a:srgbClr val="E6E0D4"/>
+                      </a:solidFill>
+                      <a:prstDash val="solid"/>
+                      <a:round/>
+                      <a:headEnd type="none" w="med" len="med"/>
+                      <a:tailEnd type="none" w="med" len="med"/>
+                    </a:lnB>
+                  </a:tcPr>
+                </a:tc>
+                <a:tc>
+                  <a:txBody>
+                    <a:bodyPr/>
+                    <a:lstStyle/>
+                    <a:p>
+                      <a:pPr indent="0" marL="0">
+                        <a:buNone/>
+                      </a:pPr>
+                      <a:r>
+                        <a:rPr lang="en-US" sz="800" dirty="0">
+                          <a:solidFill>
+                            <a:srgbClr val="2A2926"/>
+                          </a:solidFill>
+                          <a:latin typeface="Menlo" pitchFamily="34" charset="0"/>
+                          <a:ea typeface="Menlo" pitchFamily="34" charset="-122"/>
+                          <a:cs typeface="Menlo" pitchFamily="34" charset="-120"/>
+                        </a:rPr>
+                        <a:t>POST /handovers/{id}/receipt</a:t>
+                      </a:r>
+                      <a:endParaRPr lang="en-US" sz="800" dirty="0">
+                        <a:latin typeface="Menlo" charset="0"/>
+                        <a:ea typeface="Menlo" charset="0"/>
+                        <a:cs typeface="Menlo" charset="0"/>
+                      </a:endParaRPr>
+                    </a:p>
+                  </a:txBody>
+                  <a:tcPr marL="50800" marR="50800" marT="38100" marB="38100" anchor="ctr">
+                    <a:lnL w="0" cap="flat" cmpd="sng" algn="ctr">
+                      <a:noFill/>
+                    </a:lnL>
+                    <a:lnR w="0" cap="flat" cmpd="sng" algn="ctr">
+                      <a:noFill/>
+                    </a:lnR>
+                    <a:lnT w="0" cap="flat" cmpd="sng" algn="ctr">
+                      <a:noFill/>
+                    </a:lnT>
+                    <a:lnB w="6350" cap="flat" cmpd="sng" algn="ctr">
+                      <a:solidFill>
+                        <a:srgbClr val="E6E0D4"/>
+                      </a:solidFill>
+                      <a:prstDash val="solid"/>
+                      <a:round/>
+                      <a:headEnd type="none" w="med" len="med"/>
+                      <a:tailEnd type="none" w="med" len="med"/>
+                    </a:lnB>
+                  </a:tcPr>
+                </a:tc>
+                <a:tc>
+                  <a:txBody>
+                    <a:bodyPr/>
+                    <a:lstStyle/>
+                    <a:p>
+                      <a:pPr indent="0" marL="0">
+                        <a:buNone/>
+                      </a:pPr>
+                      <a:r>
+                        <a:rPr lang="en-US" sz="800" dirty="0">
+                          <a:solidFill>
+                            <a:srgbClr val="55524B"/>
+                          </a:solidFill>
+                          <a:latin typeface="Pretendard" pitchFamily="34" charset="0"/>
+                          <a:ea typeface="Pretendard" pitchFamily="34" charset="-122"/>
+                          <a:cs typeface="Pretendard" pitchFamily="34" charset="-120"/>
+                        </a:rPr>
+                        <a:t>열람 기록</a:t>
+                      </a:r>
+                      <a:endParaRPr lang="en-US" sz="800" dirty="0">
+                        <a:latin typeface="Pretendard" charset="0"/>
+                        <a:ea typeface="Pretendard" charset="0"/>
+                        <a:cs typeface="Pretendard" charset="0"/>
+                      </a:endParaRPr>
+                    </a:p>
+                  </a:txBody>
+                  <a:tcPr marL="50800" marR="50800" marT="38100" marB="38100" anchor="ctr">
+                    <a:lnL w="0" cap="flat" cmpd="sng" algn="ctr">
+                      <a:noFill/>
+                    </a:lnL>
+                    <a:lnR w="0" cap="flat" cmpd="sng" algn="ctr">
+                      <a:noFill/>
+                    </a:lnR>
+                    <a:lnT w="0" cap="flat" cmpd="sng" algn="ctr">
+                      <a:noFill/>
+                    </a:lnT>
+                    <a:lnB w="6350" cap="flat" cmpd="sng" algn="ctr">
+                      <a:solidFill>
+                        <a:srgbClr val="E6E0D4"/>
+                      </a:solidFill>
+                      <a:prstDash val="solid"/>
+                      <a:round/>
+                      <a:headEnd type="none" w="med" len="med"/>
+                      <a:tailEnd type="none" w="med" len="med"/>
+                    </a:lnB>
+                  </a:tcPr>
+                </a:tc>
+              </a:tr>
+              <a:tr h="0">
+                <a:tc>
+                  <a:txBody>
+                    <a:bodyPr/>
+                    <a:lstStyle/>
+                    <a:p>
+                      <a:pPr algn="ctr" indent="0" marL="0">
+                        <a:buNone/>
+                      </a:pPr>
+                      <a:r>
+                        <a:rPr lang="en-US" sz="800" dirty="0">
+                          <a:solidFill>
+                            <a:srgbClr val="8A867C"/>
+                          </a:solidFill>
+                          <a:latin typeface="Pretendard Medium" pitchFamily="34" charset="0"/>
+                          <a:ea typeface="Pretendard Medium" pitchFamily="34" charset="-122"/>
+                          <a:cs typeface="Pretendard Medium" pitchFamily="34" charset="-120"/>
+                        </a:rPr>
+                        <a:t>10</a:t>
+                      </a:r>
+                      <a:endParaRPr lang="en-US" sz="800" dirty="0">
+                        <a:latin typeface="Pretendard Medium" charset="0"/>
+                        <a:ea typeface="Pretendard Medium" charset="0"/>
+                        <a:cs typeface="Pretendard Medium" charset="0"/>
+                      </a:endParaRPr>
+                    </a:p>
+                  </a:txBody>
+                  <a:tcPr marL="50800" marR="50800" marT="38100" marB="38100" anchor="ctr">
+                    <a:lnL w="0" cap="flat" cmpd="sng" algn="ctr">
+                      <a:noFill/>
+                    </a:lnL>
+                    <a:lnR w="0" cap="flat" cmpd="sng" algn="ctr">
+                      <a:noFill/>
+                    </a:lnR>
+                    <a:lnT w="0" cap="flat" cmpd="sng" algn="ctr">
+                      <a:noFill/>
+                    </a:lnT>
+                    <a:lnB w="6350" cap="flat" cmpd="sng" algn="ctr">
+                      <a:solidFill>
+                        <a:srgbClr val="E6E0D4"/>
+                      </a:solidFill>
+                      <a:prstDash val="solid"/>
+                      <a:round/>
+                      <a:headEnd type="none" w="med" len="med"/>
+                      <a:tailEnd type="none" w="med" len="med"/>
+                    </a:lnB>
+                  </a:tcPr>
+                </a:tc>
+                <a:tc>
+                  <a:txBody>
+                    <a:bodyPr/>
+                    <a:lstStyle/>
+                    <a:p>
+                      <a:pPr indent="0" marL="0">
+                        <a:buNone/>
+                      </a:pPr>
+                      <a:r>
+                        <a:rPr lang="en-US" sz="800" dirty="0">
+                          <a:solidFill>
+                            <a:srgbClr val="2A2926"/>
+                          </a:solidFill>
+                          <a:latin typeface="Menlo" pitchFamily="34" charset="0"/>
+                          <a:ea typeface="Menlo" pitchFamily="34" charset="-122"/>
+                          <a:cs typeface="Menlo" pitchFamily="34" charset="-120"/>
+                        </a:rPr>
+                        <a:t>PATCH /handovers/{id}/receipt</a:t>
+                      </a:r>
+                      <a:endParaRPr lang="en-US" sz="800" dirty="0">
+                        <a:latin typeface="Menlo" charset="0"/>
+                        <a:ea typeface="Menlo" charset="0"/>
+                        <a:cs typeface="Menlo" charset="0"/>
+                      </a:endParaRPr>
+                    </a:p>
+                  </a:txBody>
+                  <a:tcPr marL="50800" marR="50800" marT="38100" marB="38100" anchor="ctr">
+                    <a:lnL w="0" cap="flat" cmpd="sng" algn="ctr">
+                      <a:noFill/>
+                    </a:lnL>
+                    <a:lnR w="0" cap="flat" cmpd="sng" algn="ctr">
+                      <a:noFill/>
+                    </a:lnR>
+                    <a:lnT w="0" cap="flat" cmpd="sng" algn="ctr">
+                      <a:noFill/>
+                    </a:lnT>
+                    <a:lnB w="6350" cap="flat" cmpd="sng" algn="ctr">
+                      <a:solidFill>
+                        <a:srgbClr val="E6E0D4"/>
+                      </a:solidFill>
+                      <a:prstDash val="solid"/>
+                      <a:round/>
+                      <a:headEnd type="none" w="med" len="med"/>
+                      <a:tailEnd type="none" w="med" len="med"/>
+                    </a:lnB>
+                  </a:tcPr>
+                </a:tc>
+                <a:tc>
+                  <a:txBody>
+                    <a:bodyPr/>
+                    <a:lstStyle/>
+                    <a:p>
+                      <a:pPr indent="0" marL="0">
+                        <a:buNone/>
+                      </a:pPr>
+                      <a:r>
+                        <a:rPr lang="en-US" sz="800" dirty="0">
+                          <a:solidFill>
+                            <a:srgbClr val="55524B"/>
+                          </a:solidFill>
+                          <a:latin typeface="Pretendard" pitchFamily="34" charset="0"/>
+                          <a:ea typeface="Pretendard" pitchFamily="34" charset="-122"/>
+                          <a:cs typeface="Pretendard" pitchFamily="34" charset="-120"/>
+                        </a:rPr>
+                        <a:t>요약 저장</a:t>
+                      </a:r>
+                      <a:endParaRPr lang="en-US" sz="800" dirty="0">
+                        <a:latin typeface="Pretendard" charset="0"/>
+                        <a:ea typeface="Pretendard" charset="0"/>
+                        <a:cs typeface="Pretendard" charset="0"/>
+                      </a:endParaRPr>
+                    </a:p>
+                  </a:txBody>
+                  <a:tcPr marL="50800" marR="50800" marT="38100" marB="38100" anchor="ctr">
+                    <a:lnL w="0" cap="flat" cmpd="sng" algn="ctr">
+                      <a:noFill/>
+                    </a:lnL>
+                    <a:lnR w="0" cap="flat" cmpd="sng" algn="ctr">
+                      <a:noFill/>
+                    </a:lnR>
+                    <a:lnT w="0" cap="flat" cmpd="sng" algn="ctr">
+                      <a:noFill/>
+                    </a:lnT>
+                    <a:lnB w="6350" cap="flat" cmpd="sng" algn="ctr">
+                      <a:solidFill>
+                        <a:srgbClr val="E6E0D4"/>
+                      </a:solidFill>
+                      <a:prstDash val="solid"/>
+                      <a:round/>
+                      <a:headEnd type="none" w="med" len="med"/>
+                      <a:tailEnd type="none" w="med" len="med"/>
+                    </a:lnB>
+                  </a:tcPr>
+                </a:tc>
+              </a:tr>
+              <a:tr h="0">
+                <a:tc>
+                  <a:txBody>
+                    <a:bodyPr/>
+                    <a:lstStyle/>
+                    <a:p>
+                      <a:pPr algn="ctr" indent="0" marL="0">
+                        <a:buNone/>
+                      </a:pPr>
+                      <a:r>
+                        <a:rPr lang="en-US" sz="800" dirty="0">
+                          <a:solidFill>
+                            <a:srgbClr val="8A867C"/>
+                          </a:solidFill>
+                          <a:latin typeface="Pretendard Medium" pitchFamily="34" charset="0"/>
+                          <a:ea typeface="Pretendard Medium" pitchFamily="34" charset="-122"/>
+                          <a:cs typeface="Pretendard Medium" pitchFamily="34" charset="-120"/>
+                        </a:rPr>
+                        <a:t>10</a:t>
+                      </a:r>
+                      <a:endParaRPr lang="en-US" sz="800" dirty="0">
+                        <a:latin typeface="Pretendard Medium" charset="0"/>
+                        <a:ea typeface="Pretendard Medium" charset="0"/>
+                        <a:cs typeface="Pretendard Medium" charset="0"/>
+                      </a:endParaRPr>
+                    </a:p>
+                  </a:txBody>
+                  <a:tcPr marL="50800" marR="50800" marT="38100" marB="38100" anchor="ctr">
+                    <a:lnL w="0" cap="flat" cmpd="sng" algn="ctr">
+                      <a:noFill/>
+                    </a:lnL>
+                    <a:lnR w="0" cap="flat" cmpd="sng" algn="ctr">
+                      <a:noFill/>
+                    </a:lnR>
+                    <a:lnT w="0" cap="flat" cmpd="sng" algn="ctr">
+                      <a:noFill/>
+                    </a:lnT>
+                    <a:lnB w="6350" cap="flat" cmpd="sng" algn="ctr">
+                      <a:solidFill>
+                        <a:srgbClr val="E6E0D4"/>
+                      </a:solidFill>
+                      <a:prstDash val="solid"/>
+                      <a:round/>
+                      <a:headEnd type="none" w="med" len="med"/>
+                      <a:tailEnd type="none" w="med" len="med"/>
+                    </a:lnB>
+                  </a:tcPr>
+                </a:tc>
+                <a:tc>
+                  <a:txBody>
+                    <a:bodyPr/>
+                    <a:lstStyle/>
+                    <a:p>
+                      <a:pPr indent="0" marL="0">
+                        <a:buNone/>
+                      </a:pPr>
+                      <a:r>
+                        <a:rPr lang="en-US" sz="800" dirty="0">
+                          <a:solidFill>
+                            <a:srgbClr val="2A2926"/>
+                          </a:solidFill>
+                          <a:latin typeface="Menlo" pitchFamily="34" charset="0"/>
+                          <a:ea typeface="Menlo" pitchFamily="34" charset="-122"/>
+                          <a:cs typeface="Menlo" pitchFamily="34" charset="-120"/>
+                        </a:rPr>
+                        <a:t>POST /…/receipt/confirmation</a:t>
+                      </a:r>
+                      <a:endParaRPr lang="en-US" sz="800" dirty="0">
+                        <a:latin typeface="Menlo" charset="0"/>
+                        <a:ea typeface="Menlo" charset="0"/>
+                        <a:cs typeface="Menlo" charset="0"/>
+                      </a:endParaRPr>
+                    </a:p>
+                  </a:txBody>
+                  <a:tcPr marL="50800" marR="50800" marT="38100" marB="38100" anchor="ctr">
+                    <a:lnL w="0" cap="flat" cmpd="sng" algn="ctr">
+                      <a:noFill/>
+                    </a:lnL>
+                    <a:lnR w="0" cap="flat" cmpd="sng" algn="ctr">
+                      <a:noFill/>
+                    </a:lnR>
+                    <a:lnT w="0" cap="flat" cmpd="sng" algn="ctr">
+                      <a:noFill/>
+                    </a:lnT>
+                    <a:lnB w="6350" cap="flat" cmpd="sng" algn="ctr">
+                      <a:solidFill>
+                        <a:srgbClr val="E6E0D4"/>
+                      </a:solidFill>
+                      <a:prstDash val="solid"/>
+                      <a:round/>
+                      <a:headEnd type="none" w="med" len="med"/>
+                      <a:tailEnd type="none" w="med" len="med"/>
+                    </a:lnB>
+                  </a:tcPr>
+                </a:tc>
+                <a:tc>
+                  <a:txBody>
+                    <a:bodyPr/>
+                    <a:lstStyle/>
+                    <a:p>
+                      <a:pPr indent="0" marL="0">
+                        <a:buNone/>
+                      </a:pPr>
+                      <a:r>
+                        <a:rPr lang="en-US" sz="800" dirty="0">
+                          <a:solidFill>
+                            <a:srgbClr val="55524B"/>
+                          </a:solidFill>
+                          <a:latin typeface="Pretendard" pitchFamily="34" charset="0"/>
+                          <a:ea typeface="Pretendard" pitchFamily="34" charset="-122"/>
+                          <a:cs typeface="Pretendard" pitchFamily="34" charset="-120"/>
+                        </a:rPr>
+                        <a:t>확인 처리</a:t>
+                      </a:r>
+                      <a:endParaRPr lang="en-US" sz="800" dirty="0">
+                        <a:latin typeface="Pretendard" charset="0"/>
+                        <a:ea typeface="Pretendard" charset="0"/>
+                        <a:cs typeface="Pretendard" charset="0"/>
+                      </a:endParaRPr>
+                    </a:p>
+                  </a:txBody>
+                  <a:tcPr marL="50800" marR="50800" marT="38100" marB="38100" anchor="ctr">
+                    <a:lnL w="0" cap="flat" cmpd="sng" algn="ctr">
+                      <a:noFill/>
+                    </a:lnL>
+                    <a:lnR w="0" cap="flat" cmpd="sng" algn="ctr">
+                      <a:noFill/>
+                    </a:lnR>
+                    <a:lnT w="0" cap="flat" cmpd="sng" algn="ctr">
+                      <a:noFill/>
+                    </a:lnT>
+                    <a:lnB w="6350" cap="flat" cmpd="sng" algn="ctr">
+                      <a:solidFill>
+                        <a:srgbClr val="E6E0D4"/>
+                      </a:solidFill>
+                      <a:prstDash val="solid"/>
+                      <a:round/>
+                      <a:headEnd type="none" w="med" len="med"/>
+                      <a:tailEnd type="none" w="med" len="med"/>
+                    </a:lnB>
+                  </a:tcPr>
+                </a:tc>
+              </a:tr>
+              <a:tr h="0">
+                <a:tc>
+                  <a:txBody>
+                    <a:bodyPr/>
+                    <a:lstStyle/>
+                    <a:p>
+                      <a:pPr algn="ctr" indent="0" marL="0">
+                        <a:buNone/>
+                      </a:pPr>
+                      <a:r>
+                        <a:rPr lang="en-US" sz="800" dirty="0">
+                          <a:solidFill>
+                            <a:srgbClr val="8A867C"/>
+                          </a:solidFill>
+                          <a:latin typeface="Pretendard Medium" pitchFamily="34" charset="0"/>
+                          <a:ea typeface="Pretendard Medium" pitchFamily="34" charset="-122"/>
+                          <a:cs typeface="Pretendard Medium" pitchFamily="34" charset="-120"/>
+                        </a:rPr>
+                        <a:t>2</a:t>
+                      </a:r>
+                      <a:endParaRPr lang="en-US" sz="800" dirty="0">
+                        <a:latin typeface="Pretendard Medium" charset="0"/>
+                        <a:ea typeface="Pretendard Medium" charset="0"/>
+                        <a:cs typeface="Pretendard Medium" charset="0"/>
+                      </a:endParaRPr>
+                    </a:p>
+                  </a:txBody>
+                  <a:tcPr marL="50800" marR="50800" marT="38100" marB="38100" anchor="ctr">
+                    <a:lnL w="0" cap="flat" cmpd="sng" algn="ctr">
+                      <a:noFill/>
+                    </a:lnL>
+                    <a:lnR w="0" cap="flat" cmpd="sng" algn="ctr">
+                      <a:noFill/>
+                    </a:lnR>
+                    <a:lnT w="0" cap="flat" cmpd="sng" algn="ctr">
+                      <a:noFill/>
+                    </a:lnT>
+                    <a:lnB w="6350" cap="flat" cmpd="sng" algn="ctr">
+                      <a:solidFill>
+                        <a:srgbClr val="E6E0D4"/>
+                      </a:solidFill>
+                      <a:prstDash val="solid"/>
+                      <a:round/>
+                      <a:headEnd type="none" w="med" len="med"/>
+                      <a:tailEnd type="none" w="med" len="med"/>
+                    </a:lnB>
+                  </a:tcPr>
+                </a:tc>
+                <a:tc>
+                  <a:txBody>
+                    <a:bodyPr/>
+                    <a:lstStyle/>
+                    <a:p>
+                      <a:pPr indent="0" marL="0">
+                        <a:buNone/>
+                      </a:pPr>
+                      <a:r>
+                        <a:rPr lang="en-US" sz="800" dirty="0">
+                          <a:solidFill>
+                            <a:srgbClr val="2A2926"/>
+                          </a:solidFill>
+                          <a:latin typeface="Menlo" pitchFamily="34" charset="0"/>
+                          <a:ea typeface="Menlo" pitchFamily="34" charset="-122"/>
+                          <a:cs typeface="Menlo" pitchFamily="34" charset="-120"/>
+                        </a:rPr>
+                        <a:t>GET  /wards/{id}/handovers</a:t>
+                      </a:r>
+                      <a:endParaRPr lang="en-US" sz="800" dirty="0">
+                        <a:latin typeface="Menlo" charset="0"/>
+                        <a:ea typeface="Menlo" charset="0"/>
+                        <a:cs typeface="Menlo" charset="0"/>
+                      </a:endParaRPr>
+                    </a:p>
+                  </a:txBody>
+                  <a:tcPr marL="50800" marR="50800" marT="38100" marB="38100" anchor="ctr">
+                    <a:lnL w="0" cap="flat" cmpd="sng" algn="ctr">
+                      <a:noFill/>
+                    </a:lnL>
+                    <a:lnR w="0" cap="flat" cmpd="sng" algn="ctr">
+                      <a:noFill/>
+                    </a:lnR>
+                    <a:lnT w="0" cap="flat" cmpd="sng" algn="ctr">
+                      <a:noFill/>
+                    </a:lnT>
+                    <a:lnB w="6350" cap="flat" cmpd="sng" algn="ctr">
+                      <a:solidFill>
+                        <a:srgbClr val="E6E0D4"/>
+                      </a:solidFill>
+                      <a:prstDash val="solid"/>
+                      <a:round/>
+                      <a:headEnd type="none" w="med" len="med"/>
+                      <a:tailEnd type="none" w="med" len="med"/>
+                    </a:lnB>
+                  </a:tcPr>
+                </a:tc>
+                <a:tc>
+                  <a:txBody>
+                    <a:bodyPr/>
+                    <a:lstStyle/>
+                    <a:p>
+                      <a:pPr indent="0" marL="0">
+                        <a:buNone/>
+                      </a:pPr>
+                      <a:r>
+                        <a:rPr lang="en-US" sz="800" dirty="0">
+                          <a:solidFill>
+                            <a:srgbClr val="55524B"/>
+                          </a:solidFill>
+                          <a:latin typeface="Pretendard" pitchFamily="34" charset="0"/>
+                          <a:ea typeface="Pretendard" pitchFamily="34" charset="-122"/>
+                          <a:cs typeface="Pretendard" pitchFamily="34" charset="-120"/>
+                        </a:rPr>
+                        <a:t>미확인 목록</a:t>
+                      </a:r>
+                      <a:endParaRPr lang="en-US" sz="800" dirty="0">
+                        <a:latin typeface="Pretendard" charset="0"/>
+                        <a:ea typeface="Pretendard" charset="0"/>
+                        <a:cs typeface="Pretendard" charset="0"/>
+                      </a:endParaRPr>
+                    </a:p>
+                  </a:txBody>
+                  <a:tcPr marL="50800" marR="50800" marT="38100" marB="38100" anchor="ctr">
+                    <a:lnL w="0" cap="flat" cmpd="sng" algn="ctr">
+                      <a:noFill/>
+                    </a:lnL>
+                    <a:lnR w="0" cap="flat" cmpd="sng" algn="ctr">
+                      <a:noFill/>
+                    </a:lnR>
+                    <a:lnT w="0" cap="flat" cmpd="sng" algn="ctr">
+                      <a:noFill/>
+                    </a:lnT>
+                    <a:lnB w="6350" cap="flat" cmpd="sng" algn="ctr">
+                      <a:solidFill>
+                        <a:srgbClr val="E6E0D4"/>
+                      </a:solidFill>
+                      <a:prstDash val="solid"/>
+                      <a:round/>
+                      <a:headEnd type="none" w="med" len="med"/>
+                      <a:tailEnd type="none" w="med" len="med"/>
+                    </a:lnB>
+                  </a:tcPr>
+                </a:tc>
+              </a:tr>
+              <a:tr h="0">
+                <a:tc>
+                  <a:txBody>
+                    <a:bodyPr/>
+                    <a:lstStyle/>
+                    <a:p>
+                      <a:pPr algn="ctr" indent="0" marL="0">
+                        <a:buNone/>
+                      </a:pPr>
+                      <a:r>
+                        <a:rPr lang="en-US" sz="800" dirty="0">
+                          <a:solidFill>
+                            <a:srgbClr val="8A867C"/>
+                          </a:solidFill>
+                          <a:latin typeface="Pretendard Medium" pitchFamily="34" charset="0"/>
+                          <a:ea typeface="Pretendard Medium" pitchFamily="34" charset="-122"/>
+                          <a:cs typeface="Pretendard Medium" pitchFamily="34" charset="-120"/>
+                        </a:rPr>
+                        <a:t>2</a:t>
+                      </a:r>
+                      <a:endParaRPr lang="en-US" sz="800" dirty="0">
+                        <a:latin typeface="Pretendard Medium" charset="0"/>
+                        <a:ea typeface="Pretendard Medium" charset="0"/>
+                        <a:cs typeface="Pretendard Medium" charset="0"/>
+                      </a:endParaRPr>
+                    </a:p>
+                  </a:txBody>
+                  <a:tcPr marL="50800" marR="50800" marT="38100" marB="38100" anchor="ctr">
+                    <a:lnL w="0" cap="flat" cmpd="sng" algn="ctr">
+                      <a:noFill/>
+                    </a:lnL>
+                    <a:lnR w="0" cap="flat" cmpd="sng" algn="ctr">
+                      <a:noFill/>
+                    </a:lnR>
+                    <a:lnT w="0" cap="flat" cmpd="sng" algn="ctr">
+                      <a:noFill/>
+                    </a:lnT>
+                    <a:lnB w="6350" cap="flat" cmpd="sng" algn="ctr">
+                      <a:solidFill>
+                        <a:srgbClr val="E6E0D4"/>
+                      </a:solidFill>
+                      <a:prstDash val="solid"/>
+                      <a:round/>
+                      <a:headEnd type="none" w="med" len="med"/>
+                      <a:tailEnd type="none" w="med" len="med"/>
+                    </a:lnB>
+                  </a:tcPr>
+                </a:tc>
+                <a:tc>
+                  <a:txBody>
+                    <a:bodyPr/>
+                    <a:lstStyle/>
+                    <a:p>
+                      <a:pPr indent="0" marL="0">
+                        <a:buNone/>
+                      </a:pPr>
+                      <a:r>
+                        <a:rPr lang="en-US" sz="800" dirty="0">
+                          <a:solidFill>
+                            <a:srgbClr val="2A2926"/>
+                          </a:solidFill>
+                          <a:latin typeface="Menlo" pitchFamily="34" charset="0"/>
+                          <a:ea typeface="Menlo" pitchFamily="34" charset="-122"/>
+                          <a:cs typeface="Menlo" pitchFamily="34" charset="-120"/>
+                        </a:rPr>
+                        <a:t>GET  /wards/{id}/dashboard</a:t>
+                      </a:r>
+                      <a:endParaRPr lang="en-US" sz="800" dirty="0">
+                        <a:latin typeface="Menlo" charset="0"/>
+                        <a:ea typeface="Menlo" charset="0"/>
+                        <a:cs typeface="Menlo" charset="0"/>
+                      </a:endParaRPr>
+                    </a:p>
+                  </a:txBody>
+                  <a:tcPr marL="50800" marR="50800" marT="38100" marB="38100" anchor="ctr">
+                    <a:lnL w="0" cap="flat" cmpd="sng" algn="ctr">
+                      <a:noFill/>
+                    </a:lnL>
+                    <a:lnR w="0" cap="flat" cmpd="sng" algn="ctr">
+                      <a:noFill/>
+                    </a:lnR>
+                    <a:lnT w="0" cap="flat" cmpd="sng" algn="ctr">
+                      <a:noFill/>
+                    </a:lnT>
+                    <a:lnB w="6350" cap="flat" cmpd="sng" algn="ctr">
+                      <a:solidFill>
+                        <a:srgbClr val="E6E0D4"/>
+                      </a:solidFill>
+                      <a:prstDash val="solid"/>
+                      <a:round/>
+                      <a:headEnd type="none" w="med" len="med"/>
+                      <a:tailEnd type="none" w="med" len="med"/>
+                    </a:lnB>
+                  </a:tcPr>
+                </a:tc>
+                <a:tc>
+                  <a:txBody>
+                    <a:bodyPr/>
+                    <a:lstStyle/>
+                    <a:p>
+                      <a:pPr indent="0" marL="0">
+                        <a:buNone/>
+                      </a:pPr>
+                      <a:r>
+                        <a:rPr lang="en-US" sz="800" dirty="0">
+                          <a:solidFill>
+                            <a:srgbClr val="55524B"/>
+                          </a:solidFill>
+                          <a:latin typeface="Pretendard" pitchFamily="34" charset="0"/>
+                          <a:ea typeface="Pretendard" pitchFamily="34" charset="-122"/>
+                          <a:cs typeface="Pretendard" pitchFamily="34" charset="-120"/>
+                        </a:rPr>
+                        <a:t>대시보드 집계</a:t>
+                      </a:r>
+                      <a:endParaRPr lang="en-US" sz="800" dirty="0">
+                        <a:latin typeface="Pretendard" charset="0"/>
+                        <a:ea typeface="Pretendard" charset="0"/>
+                        <a:cs typeface="Pretendard" charset="0"/>
+                      </a:endParaRPr>
+                    </a:p>
+                  </a:txBody>
+                  <a:tcPr marL="50800" marR="50800" marT="38100" marB="38100" anchor="ctr">
+                    <a:lnL w="0" cap="flat" cmpd="sng" algn="ctr">
+                      <a:noFill/>
+                    </a:lnL>
+                    <a:lnR w="0" cap="flat" cmpd="sng" algn="ctr">
+                      <a:noFill/>
+                    </a:lnR>
+                    <a:lnT w="0" cap="flat" cmpd="sng" algn="ctr">
+                      <a:noFill/>
+                    </a:lnT>
+                    <a:lnB w="6350" cap="flat" cmpd="sng" algn="ctr">
+                      <a:solidFill>
+                        <a:srgbClr val="E6E0D4"/>
+                      </a:solidFill>
+                      <a:prstDash val="solid"/>
+                      <a:round/>
+                      <a:headEnd type="none" w="med" len="med"/>
+                      <a:tailEnd type="none" w="med" len="med"/>
+                    </a:lnB>
+                  </a:tcPr>
+                </a:tc>
+              </a:tr>
+            </a:tbl>
+          </a:graphicData>
+        </a:graphic>
+      </p:graphicFrame>
+      <p:sp>
+        <p:nvSpPr>
+          <p:cNvPr id="8" name="Shape 4"/>
+          <p:cNvSpPr/>
+          <p:nvPr/>
+        </p:nvSpPr>
+        <p:spPr>
+          <a:xfrm>
+            <a:off x="548640" y="4576572"/>
+            <a:ext cx="8046720" cy="0"/>
+          </a:xfrm>
+          <a:prstGeom prst="line">
+            <a:avLst/>
+          </a:prstGeom>
+          <a:noFill/>
+          <a:ln w="6350">
+            <a:solidFill>
+              <a:srgbClr val="E6E0D4"/>
+            </a:solidFill>
+            <a:prstDash val="solid"/>
+          </a:ln>
+        </p:spPr>
+        <p:txBody>
+          <a:bodyPr/>
+          <a:p/>
+        </p:txBody>
+      </p:sp>
+      <p:sp>
+        <p:nvSpPr>
+          <p:cNvPr id="9" name="Text 5"/>
+          <p:cNvSpPr txBox="1"/>
+          <p:nvPr/>
+        </p:nvSpPr>
+        <p:spPr>
+          <a:xfrm>
+            <a:off x="548640" y="4613148"/>
+            <a:ext cx="8046720" cy="201168"/>
+          </a:xfrm>
+          <a:prstGeom prst="rect">
+            <a:avLst/>
+          </a:prstGeom>
+          <a:noFill/>
+          <a:ln/>
+        </p:spPr>
+        <p:txBody>
+          <a:bodyPr wrap="square" lIns="0" tIns="0" rIns="0" bIns="0" rtlCol="0" anchor="ctr"/>
+          <a:lstStyle/>
+          <a:p>
+            <a:pPr indent="0" marL="0">
+              <a:buNone/>
+            </a:pPr>
+            <a:r>
+              <a:rPr lang="en-US" sz="900" dirty="0">
+                <a:solidFill>
+                  <a:srgbClr val="8A867C"/>
+                </a:solidFill>
+                <a:latin typeface="Pretendard" pitchFamily="34" charset="0"/>
+                <a:ea typeface="Pretendard" pitchFamily="34" charset="-122"/>
+                <a:cs typeface="Pretendard" pitchFamily="34" charset="-120"/>
+              </a:rPr>
+              <a:t>화면 11개의 동작 25가지를 먼저 세고, 겹치는 것(역할 지정은 배정 화면과 재배정 화면이 같이 쓴다)을 빼서 24개</a:t>
+            </a:r>
+            <a:endParaRPr lang="en-US" sz="900" dirty="0"/>
+          </a:p>
+        </p:txBody>
+      </p:sp>
+    </p:spTree>
+  </p:cSld>
+  <p:clrMapOvr>
+    <a:masterClrMapping/>
+  </p:clrMapOvr>
+</p:sld>
+</file>
+
+<file path=ppt/slides/slide33.xml><?xml version="1.0" encoding="utf-8"?>
+<p:sld xmlns:a="http://schemas.openxmlformats.org/drawingml/2006/main" xmlns:r="http://schemas.openxmlformats.org/officeDocument/2006/relationships" xmlns:p="http://schemas.openxmlformats.org/presentationml/2006/main">
+  <p:cSld name="Slide 33">
+    <p:bg>
+      <p:bgPr>
+        <a:solidFill>
+          <a:srgbClr val="FBF8F2"/>
+        </a:solidFill>
+      </p:bgPr>
+    </p:bg>
+    <p:spTree>
+      <p:nvGrpSpPr>
+        <p:cNvPr id="1" name=""/>
+        <p:cNvGrpSpPr/>
+        <p:nvPr/>
+      </p:nvGrpSpPr>
+      <p:grpSpPr>
+        <a:xfrm>
+          <a:off x="0" y="0"/>
+          <a:ext cx="0" cy="0"/>
+          <a:chOff x="0" y="0"/>
+          <a:chExt cx="0" cy="0"/>
+        </a:xfrm>
+      </p:grpSpPr>
+      <p:sp>
+        <p:nvSpPr>
+          <p:cNvPr id="2" name="Text 0"/>
+          <p:cNvSpPr txBox="1"/>
+          <p:nvPr/>
+        </p:nvSpPr>
+        <p:spPr>
+          <a:xfrm>
+            <a:off x="8138160" y="4832604"/>
+            <a:ext cx="457200" cy="182880"/>
+          </a:xfrm>
+          <a:prstGeom prst="rect">
+            <a:avLst/>
+          </a:prstGeom>
+          <a:noFill/>
+          <a:ln/>
+        </p:spPr>
+        <p:txBody>
+          <a:bodyPr wrap="square" lIns="0" tIns="0" rIns="0" bIns="0" rtlCol="0" anchor="ctr"/>
+          <a:lstStyle/>
+          <a:p>
+            <a:pPr algn="r" indent="0" marL="0">
+              <a:buNone/>
+            </a:pPr>
+            <a:r>
+              <a:rPr lang="en-US" sz="800" dirty="0">
+                <a:solidFill>
+                  <a:srgbClr val="8A867C"/>
+                </a:solidFill>
+                <a:latin typeface="Pretendard Medium" pitchFamily="34" charset="0"/>
+                <a:ea typeface="Pretendard Medium" pitchFamily="34" charset="-122"/>
+                <a:cs typeface="Pretendard Medium" pitchFamily="34" charset="-120"/>
+              </a:rPr>
+              <a:t>15</a:t>
+            </a:r>
+            <a:endParaRPr lang="en-US" sz="800" dirty="0"/>
+          </a:p>
+        </p:txBody>
+      </p:sp>
+      <p:sp>
+        <p:nvSpPr>
+          <p:cNvPr id="3" name="Text 1"/>
+          <p:cNvSpPr txBox="1"/>
+          <p:nvPr/>
+        </p:nvSpPr>
+        <p:spPr>
+          <a:xfrm>
+            <a:off x="548640" y="4832604"/>
+            <a:ext cx="4572000" cy="182880"/>
+          </a:xfrm>
+          <a:prstGeom prst="rect">
+            <a:avLst/>
+          </a:prstGeom>
+          <a:noFill/>
+          <a:ln/>
+        </p:spPr>
+        <p:txBody>
+          <a:bodyPr wrap="square" lIns="0" tIns="0" rIns="0" bIns="0" rtlCol="0" anchor="ctr"/>
+          <a:lstStyle/>
+          <a:p>
+            <a:pPr indent="0" marL="0">
+              <a:buNone/>
+            </a:pPr>
+            <a:r>
+              <a:rPr lang="en-US" sz="800" dirty="0">
+                <a:solidFill>
+                  <a:srgbClr val="8A867C"/>
+                </a:solidFill>
+                <a:latin typeface="Pretendard Medium" pitchFamily="34" charset="0"/>
+                <a:ea typeface="Pretendard Medium" pitchFamily="34" charset="-122"/>
+                <a:cs typeface="Pretendard Medium" pitchFamily="34" charset="-120"/>
+              </a:rPr>
+              <a:t>07  API 24개와 막는 규칙</a:t>
+            </a:r>
+            <a:endParaRPr lang="en-US" sz="800" dirty="0"/>
+          </a:p>
+        </p:txBody>
+      </p:sp>
+      <p:sp>
+        <p:nvSpPr>
+          <p:cNvPr id="4" name="Text 2"/>
+          <p:cNvSpPr txBox="1"/>
+          <p:nvPr/>
+        </p:nvSpPr>
+        <p:spPr>
+          <a:xfrm>
+            <a:off x="548640" y="292608"/>
+            <a:ext cx="8046720" cy="457200"/>
+          </a:xfrm>
+          <a:prstGeom prst="rect">
+            <a:avLst/>
+          </a:prstGeom>
+          <a:noFill/>
+          <a:ln/>
+        </p:spPr>
+        <p:txBody>
+          <a:bodyPr wrap="square" lIns="0" tIns="0" rIns="0" bIns="0" rtlCol="0" anchor="ctr"/>
+          <a:lstStyle/>
+          <a:p>
+            <a:pPr indent="0" marL="0">
+              <a:buNone/>
+            </a:pPr>
+            <a:r>
+              <a:rPr lang="en-US" sz="2500" spc="-60" kern="0" dirty="0">
+                <a:solidFill>
+                  <a:srgbClr val="2A2926"/>
+                </a:solidFill>
+                <a:latin typeface="Pretendard ExtraBold" pitchFamily="34" charset="0"/>
+                <a:ea typeface="Pretendard ExtraBold" pitchFamily="34" charset="-122"/>
+                <a:cs typeface="Pretendard ExtraBold" pitchFamily="34" charset="-120"/>
+              </a:rPr>
+              <a:t>일부러 요청에서 안 받는 값</a:t>
+            </a:r>
+            <a:endParaRPr lang="en-US" sz="2500" dirty="0"/>
+          </a:p>
+        </p:txBody>
+      </p:sp>
+      <p:sp>
+        <p:nvSpPr>
+          <p:cNvPr id="5" name="Text 3"/>
+          <p:cNvSpPr txBox="1"/>
+          <p:nvPr/>
+        </p:nvSpPr>
+        <p:spPr>
+          <a:xfrm>
+            <a:off x="548640" y="804672"/>
+            <a:ext cx="8046720" cy="237744"/>
+          </a:xfrm>
+          <a:prstGeom prst="rect">
+            <a:avLst/>
+          </a:prstGeom>
+          <a:noFill/>
+          <a:ln/>
+        </p:spPr>
+        <p:txBody>
+          <a:bodyPr wrap="square" lIns="0" tIns="0" rIns="0" bIns="0" rtlCol="0" anchor="ctr"/>
+          <a:lstStyle/>
+          <a:p>
+            <a:pPr indent="0" marL="0">
+              <a:buNone/>
+            </a:pPr>
+            <a:r>
+              <a:rPr lang="en-US" sz="1200" dirty="0">
+                <a:solidFill>
+                  <a:srgbClr val="55524B"/>
+                </a:solidFill>
+                <a:latin typeface="Pretendard Light" pitchFamily="34" charset="0"/>
+                <a:ea typeface="Pretendard Light" pitchFamily="34" charset="-122"/>
+                <a:cs typeface="Pretendard Light" pitchFamily="34" charset="-120"/>
+              </a:rPr>
+              <a:t>Path·Query·Body 중, 화면이 정하게 두면 깨지는 것들</a:t>
+            </a:r>
+            <a:endParaRPr lang="en-US" sz="1200" dirty="0"/>
+          </a:p>
+        </p:txBody>
+      </p:sp>
+      <p:graphicFrame>
+        <p:nvGraphicFramePr>
+          <p:cNvPr id="34" name="Table 0"/>
+          <p:cNvGraphicFramePr>
+            <a:graphicFrameLocks noGrp="1"/>
+          </p:cNvGraphicFramePr>
+          <p:nvPr>
+            <p:extLst>
+              <p:ext uri="{D42A27DB-BD31-4B8C-83A1-F6EECF244321}">
+                <p14:modId xmlns:p14="http://schemas.microsoft.com/office/powerpoint/2010/main" val="1579011935"/>
+              </p:ext>
+            </p:extLst>
+          </p:nvPr>
+        </p:nvGraphicFramePr>
+        <p:xfrm>
+          <a:off x="548640" y="1170432"/>
+          <a:ext cx="5029200" cy="914400"/>
+        </p:xfrm>
+        <a:graphic>
+          <a:graphicData uri="http://schemas.openxmlformats.org/drawingml/2006/table">
+            <a:tbl>
+              <a:tblPr/>
+              <a:tblGrid>
+                <a:gridCol w="1371600"/>
+                <a:gridCol w="3657600"/>
+              </a:tblGrid>
+              <a:tr h="347472">
+                <a:tc>
+                  <a:txBody>
+                    <a:bodyPr/>
+                    <a:lstStyle/>
+                    <a:p>
+                      <a:pPr indent="0" marL="0">
+                        <a:buNone/>
+                      </a:pPr>
+                      <a:r>
+                        <a:rPr lang="en-US" sz="950" dirty="0">
+                          <a:solidFill>
+                            <a:srgbClr val="2A2926"/>
+                          </a:solidFill>
+                          <a:latin typeface="Pretendard Medium" pitchFamily="34" charset="0"/>
+                          <a:ea typeface="Pretendard Medium" pitchFamily="34" charset="-122"/>
+                          <a:cs typeface="Pretendard Medium" pitchFamily="34" charset="-120"/>
+                        </a:rPr>
+                        <a:t>값</a:t>
+                      </a:r>
+                      <a:endParaRPr lang="en-US" sz="950" dirty="0">
+                        <a:latin typeface="Pretendard Medium" charset="0"/>
+                        <a:ea typeface="Pretendard Medium" charset="0"/>
+                        <a:cs typeface="Pretendard Medium" charset="0"/>
+                      </a:endParaRPr>
+                    </a:p>
+                  </a:txBody>
+                  <a:tcPr marL="101600" marR="101600" marT="76200" marB="76200" anchor="ctr">
+                    <a:lnL w="0" cap="flat" cmpd="sng" algn="ctr">
+                      <a:noFill/>
+                    </a:lnL>
+                    <a:lnR w="0" cap="flat" cmpd="sng" algn="ctr">
+                      <a:noFill/>
+                    </a:lnR>
+                    <a:lnT w="0" cap="flat" cmpd="sng" algn="ctr">
+                      <a:noFill/>
+                    </a:lnT>
+                    <a:lnB w="12700" cap="flat" cmpd="sng" algn="ctr">
+                      <a:solidFill>
+                        <a:srgbClr val="1F8A7E"/>
+                      </a:solidFill>
+                      <a:prstDash val="solid"/>
+                      <a:round/>
+                      <a:headEnd type="none" w="med" len="med"/>
+                      <a:tailEnd type="none" w="med" len="med"/>
+                    </a:lnB>
+                  </a:tcPr>
+                </a:tc>
+                <a:tc>
+                  <a:txBody>
+                    <a:bodyPr/>
+                    <a:lstStyle/>
+                    <a:p>
+                      <a:pPr indent="0" marL="0">
+                        <a:buNone/>
+                      </a:pPr>
+                      <a:r>
+                        <a:rPr lang="en-US" sz="950" dirty="0">
+                          <a:solidFill>
+                            <a:srgbClr val="2A2926"/>
+                          </a:solidFill>
+                          <a:latin typeface="Pretendard Medium" pitchFamily="34" charset="0"/>
+                          <a:ea typeface="Pretendard Medium" pitchFamily="34" charset="-122"/>
+                          <a:cs typeface="Pretendard Medium" pitchFamily="34" charset="-120"/>
+                        </a:rPr>
+                        <a:t>왜 서버가 정하나</a:t>
+                      </a:r>
+                      <a:endParaRPr lang="en-US" sz="950" dirty="0">
+                        <a:latin typeface="Pretendard Medium" charset="0"/>
+                        <a:ea typeface="Pretendard Medium" charset="0"/>
+                        <a:cs typeface="Pretendard Medium" charset="0"/>
+                      </a:endParaRPr>
+                    </a:p>
+                  </a:txBody>
+                  <a:tcPr marL="101600" marR="101600" marT="76200" marB="76200" anchor="ctr">
+                    <a:lnL w="0" cap="flat" cmpd="sng" algn="ctr">
+                      <a:noFill/>
+                    </a:lnL>
+                    <a:lnR w="0" cap="flat" cmpd="sng" algn="ctr">
+                      <a:noFill/>
+                    </a:lnR>
+                    <a:lnT w="0" cap="flat" cmpd="sng" algn="ctr">
+                      <a:noFill/>
+                    </a:lnT>
+                    <a:lnB w="12700" cap="flat" cmpd="sng" algn="ctr">
+                      <a:solidFill>
+                        <a:srgbClr val="1F8A7E"/>
+                      </a:solidFill>
+                      <a:prstDash val="solid"/>
+                      <a:round/>
+                      <a:headEnd type="none" w="med" len="med"/>
+                      <a:tailEnd type="none" w="med" len="med"/>
+                    </a:lnB>
+                  </a:tcPr>
+                </a:tc>
+              </a:tr>
+              <a:tr h="777240">
+                <a:tc>
+                  <a:txBody>
+                    <a:bodyPr/>
+                    <a:lstStyle/>
+                    <a:p>
+                      <a:pPr indent="0" marL="0">
+                        <a:buNone/>
+                      </a:pPr>
+                      <a:r>
+                        <a:rPr lang="en-US" sz="1050" dirty="0">
+                          <a:solidFill>
+                            <a:srgbClr val="2A2926"/>
+                          </a:solidFill>
+                          <a:latin typeface="Pretendard SemiBold" pitchFamily="34" charset="0"/>
+                          <a:ea typeface="Pretendard SemiBold" pitchFamily="34" charset="-122"/>
+                          <a:cs typeface="Pretendard SemiBold" pitchFamily="34" charset="-120"/>
+                        </a:rPr>
+                        <a:t>인계를 받을 사람</a:t>
+                      </a:r>
+                      <a:endParaRPr lang="en-US" sz="1050" dirty="0">
+                        <a:latin typeface="Pretendard SemiBold" charset="0"/>
+                        <a:ea typeface="Pretendard SemiBold" charset="0"/>
+                        <a:cs typeface="Pretendard SemiBold" charset="0"/>
+                      </a:endParaRPr>
+                    </a:p>
+                  </a:txBody>
+                  <a:tcPr marL="101600" marR="101600" marT="76200" marB="76200" anchor="ctr">
+                    <a:lnL w="0" cap="flat" cmpd="sng" algn="ctr">
+                      <a:noFill/>
+                    </a:lnL>
+                    <a:lnR w="0" cap="flat" cmpd="sng" algn="ctr">
+                      <a:noFill/>
+                    </a:lnR>
+                    <a:lnT w="0" cap="flat" cmpd="sng" algn="ctr">
+                      <a:noFill/>
+                    </a:lnT>
+                    <a:lnB w="6350" cap="flat" cmpd="sng" algn="ctr">
+                      <a:solidFill>
+                        <a:srgbClr val="E6E0D4"/>
+                      </a:solidFill>
+                      <a:prstDash val="solid"/>
+                      <a:round/>
+                      <a:headEnd type="none" w="med" len="med"/>
+                      <a:tailEnd type="none" w="med" len="med"/>
+                    </a:lnB>
+                  </a:tcPr>
+                </a:tc>
+                <a:tc>
+                  <a:txBody>
+                    <a:bodyPr/>
+                    <a:lstStyle/>
+                    <a:p>
+                      <a:pPr indent="0" marL="0">
+                        <a:buNone/>
+                      </a:pPr>
+                      <a:r>
+                        <a:rPr lang="en-US" sz="1050" dirty="0">
+                          <a:solidFill>
+                            <a:srgbClr val="55524B"/>
+                          </a:solidFill>
+                          <a:latin typeface="Pretendard" pitchFamily="34" charset="0"/>
+                          <a:ea typeface="Pretendard" pitchFamily="34" charset="-122"/>
+                          <a:cs typeface="Pretendard" pitchFamily="34" charset="-120"/>
+                        </a:rPr>
+                        <a:t>화면이 정하게 두면 아무 근무로나 인계를 보낼 수 있다</a:t>
+                      </a:r>
+                      <a:endParaRPr lang="en-US" sz="1050" dirty="0">
+                        <a:latin typeface="Pretendard" charset="0"/>
+                        <a:ea typeface="Pretendard" charset="0"/>
+                        <a:cs typeface="Pretendard" charset="0"/>
+                      </a:endParaRPr>
+                    </a:p>
+                    <a:p>
+                      <a:pPr indent="0" marL="0">
+                        <a:buNone/>
+                      </a:pPr>
+                      <a:r>
+                        <a:rPr lang="en-US" sz="1050" dirty="0">
+                          <a:solidFill>
+                            <a:srgbClr val="55524B"/>
+                          </a:solidFill>
+                          <a:latin typeface="Pretendard" pitchFamily="34" charset="0"/>
+                          <a:ea typeface="Pretendard" pitchFamily="34" charset="-122"/>
+                          <a:cs typeface="Pretendard" pitchFamily="34" charset="-120"/>
+                        </a:rPr>
+                        <a:t>같은 환자의 다음 근무 담당을 서버가 고른다. 없으면 막는다(422)</a:t>
+                      </a:r>
+                      <a:endParaRPr lang="en-US" sz="1050" dirty="0">
+                        <a:latin typeface="Pretendard" charset="0"/>
+                        <a:ea typeface="Pretendard" charset="0"/>
+                        <a:cs typeface="Pretendard" charset="0"/>
+                      </a:endParaRPr>
+                    </a:p>
+                  </a:txBody>
+                  <a:tcPr marL="101600" marR="101600" marT="76200" marB="76200" anchor="ctr">
+                    <a:lnL w="0" cap="flat" cmpd="sng" algn="ctr">
+                      <a:noFill/>
+                    </a:lnL>
+                    <a:lnR w="0" cap="flat" cmpd="sng" algn="ctr">
+                      <a:noFill/>
+                    </a:lnR>
+                    <a:lnT w="0" cap="flat" cmpd="sng" algn="ctr">
+                      <a:noFill/>
+                    </a:lnT>
+                    <a:lnB w="6350" cap="flat" cmpd="sng" algn="ctr">
+                      <a:solidFill>
+                        <a:srgbClr val="E6E0D4"/>
+                      </a:solidFill>
+                      <a:prstDash val="solid"/>
+                      <a:round/>
+                      <a:headEnd type="none" w="med" len="med"/>
+                      <a:tailEnd type="none" w="med" len="med"/>
+                    </a:lnB>
+                  </a:tcPr>
+                </a:tc>
+              </a:tr>
+              <a:tr h="777240">
+                <a:tc>
+                  <a:txBody>
+                    <a:bodyPr/>
+                    <a:lstStyle/>
+                    <a:p>
+                      <a:pPr indent="0" marL="0">
+                        <a:buNone/>
+                      </a:pPr>
+                      <a:r>
+                        <a:rPr lang="en-US" sz="1050" dirty="0">
+                          <a:solidFill>
+                            <a:srgbClr val="2A2926"/>
+                          </a:solidFill>
+                          <a:latin typeface="Pretendard SemiBold" pitchFamily="34" charset="0"/>
+                          <a:ea typeface="Pretendard SemiBold" pitchFamily="34" charset="-122"/>
+                          <a:cs typeface="Pretendard SemiBold" pitchFamily="34" charset="-120"/>
+                        </a:rPr>
+                        <a:t>결원 사유</a:t>
+                      </a:r>
+                      <a:endParaRPr lang="en-US" sz="1050" dirty="0">
+                        <a:latin typeface="Pretendard SemiBold" charset="0"/>
+                        <a:ea typeface="Pretendard SemiBold" charset="0"/>
+                        <a:cs typeface="Pretendard SemiBold" charset="0"/>
+                      </a:endParaRPr>
+                    </a:p>
+                  </a:txBody>
+                  <a:tcPr marL="101600" marR="101600" marT="76200" marB="76200" anchor="ctr">
+                    <a:lnL w="0" cap="flat" cmpd="sng" algn="ctr">
+                      <a:noFill/>
+                    </a:lnL>
+                    <a:lnR w="0" cap="flat" cmpd="sng" algn="ctr">
+                      <a:noFill/>
+                    </a:lnR>
+                    <a:lnT w="0" cap="flat" cmpd="sng" algn="ctr">
+                      <a:noFill/>
+                    </a:lnT>
+                    <a:lnB w="6350" cap="flat" cmpd="sng" algn="ctr">
+                      <a:solidFill>
+                        <a:srgbClr val="E6E0D4"/>
+                      </a:solidFill>
+                      <a:prstDash val="solid"/>
+                      <a:round/>
+                      <a:headEnd type="none" w="med" len="med"/>
+                      <a:tailEnd type="none" w="med" len="med"/>
+                    </a:lnB>
+                  </a:tcPr>
+                </a:tc>
+                <a:tc>
+                  <a:txBody>
+                    <a:bodyPr/>
+                    <a:lstStyle/>
+                    <a:p>
+                      <a:pPr indent="0" marL="0">
+                        <a:buNone/>
+                      </a:pPr>
+                      <a:r>
+                        <a:rPr lang="en-US" sz="1050" dirty="0">
+                          <a:solidFill>
+                            <a:srgbClr val="55524B"/>
+                          </a:solidFill>
+                          <a:latin typeface="Pretendard" pitchFamily="34" charset="0"/>
+                          <a:ea typeface="Pretendard" pitchFamily="34" charset="-122"/>
+                          <a:cs typeface="Pretendard" pitchFamily="34" charset="-120"/>
+                        </a:rPr>
+                        <a:t>사람이 쓰는 자리는 결원 등록 하나뿐. 나머지 기록은 복사</a:t>
+                      </a:r>
+                      <a:endParaRPr lang="en-US" sz="1050" dirty="0">
+                        <a:latin typeface="Pretendard" charset="0"/>
+                        <a:ea typeface="Pretendard" charset="0"/>
+                        <a:cs typeface="Pretendard" charset="0"/>
+                      </a:endParaRPr>
+                    </a:p>
+                    <a:p>
+                      <a:pPr indent="0" marL="0">
+                        <a:buNone/>
+                      </a:pPr>
+                      <a:r>
+                        <a:rPr lang="en-US" sz="1050" dirty="0">
+                          <a:solidFill>
+                            <a:srgbClr val="55524B"/>
+                          </a:solidFill>
+                          <a:latin typeface="Pretendard" pitchFamily="34" charset="0"/>
+                          <a:ea typeface="Pretendard" pitchFamily="34" charset="-122"/>
+                          <a:cs typeface="Pretendard" pitchFamily="34" charset="-120"/>
+                        </a:rPr>
+                        <a:t>사유가 서로 달라지면 한 사건의 이력을 이어서 읽을 수 없다</a:t>
+                      </a:r>
+                      <a:endParaRPr lang="en-US" sz="1050" dirty="0">
+                        <a:latin typeface="Pretendard" charset="0"/>
+                        <a:ea typeface="Pretendard" charset="0"/>
+                        <a:cs typeface="Pretendard" charset="0"/>
+                      </a:endParaRPr>
+                    </a:p>
+                  </a:txBody>
+                  <a:tcPr marL="101600" marR="101600" marT="76200" marB="76200" anchor="ctr">
+                    <a:lnL w="0" cap="flat" cmpd="sng" algn="ctr">
+                      <a:noFill/>
+                    </a:lnL>
+                    <a:lnR w="0" cap="flat" cmpd="sng" algn="ctr">
+                      <a:noFill/>
+                    </a:lnR>
+                    <a:lnT w="0" cap="flat" cmpd="sng" algn="ctr">
+                      <a:noFill/>
+                    </a:lnT>
+                    <a:lnB w="6350" cap="flat" cmpd="sng" algn="ctr">
+                      <a:solidFill>
+                        <a:srgbClr val="E6E0D4"/>
+                      </a:solidFill>
+                      <a:prstDash val="solid"/>
+                      <a:round/>
+                      <a:headEnd type="none" w="med" len="med"/>
+                      <a:tailEnd type="none" w="med" len="med"/>
+                    </a:lnB>
+                  </a:tcPr>
+                </a:tc>
+              </a:tr>
+              <a:tr h="777240">
+                <a:tc>
+                  <a:txBody>
+                    <a:bodyPr/>
+                    <a:lstStyle/>
+                    <a:p>
+                      <a:pPr indent="0" marL="0">
+                        <a:buNone/>
+                      </a:pPr>
+                      <a:r>
+                        <a:rPr lang="en-US" sz="1050" dirty="0">
+                          <a:solidFill>
+                            <a:srgbClr val="2A2926"/>
+                          </a:solidFill>
+                          <a:latin typeface="Pretendard SemiBold" pitchFamily="34" charset="0"/>
+                          <a:ea typeface="Pretendard SemiBold" pitchFamily="34" charset="-122"/>
+                          <a:cs typeface="Pretendard SemiBold" pitchFamily="34" charset="-120"/>
+                        </a:rPr>
+                        <a:t>화면 버튼 판정</a:t>
+                      </a:r>
+                      <a:endParaRPr lang="en-US" sz="1050" dirty="0">
+                        <a:latin typeface="Pretendard SemiBold" charset="0"/>
+                        <a:ea typeface="Pretendard SemiBold" charset="0"/>
+                        <a:cs typeface="Pretendard SemiBold" charset="0"/>
+                      </a:endParaRPr>
+                    </a:p>
+                  </a:txBody>
+                  <a:tcPr marL="101600" marR="101600" marT="76200" marB="76200" anchor="ctr">
+                    <a:lnL w="0" cap="flat" cmpd="sng" algn="ctr">
+                      <a:noFill/>
+                    </a:lnL>
+                    <a:lnR w="0" cap="flat" cmpd="sng" algn="ctr">
+                      <a:noFill/>
+                    </a:lnR>
+                    <a:lnT w="0" cap="flat" cmpd="sng" algn="ctr">
+                      <a:noFill/>
+                    </a:lnT>
+                    <a:lnB w="6350" cap="flat" cmpd="sng" algn="ctr">
+                      <a:solidFill>
+                        <a:srgbClr val="E6E0D4"/>
+                      </a:solidFill>
+                      <a:prstDash val="solid"/>
+                      <a:round/>
+                      <a:headEnd type="none" w="med" len="med"/>
+                      <a:tailEnd type="none" w="med" len="med"/>
+                    </a:lnB>
+                  </a:tcPr>
+                </a:tc>
+                <a:tc>
+                  <a:txBody>
+                    <a:bodyPr/>
+                    <a:lstStyle/>
+                    <a:p>
+                      <a:pPr indent="0" marL="0">
+                        <a:buNone/>
+                      </a:pPr>
+                      <a:r>
+                        <a:rPr lang="en-US" sz="1050" dirty="0">
+                          <a:solidFill>
+                            <a:srgbClr val="55524B"/>
+                          </a:solidFill>
+                          <a:latin typeface="Pretendard" pitchFamily="34" charset="0"/>
+                          <a:ea typeface="Pretendard" pitchFamily="34" charset="-122"/>
+                          <a:cs typeface="Pretendard" pitchFamily="34" charset="-120"/>
+                        </a:rPr>
+                        <a:t>쓰기, 확인, 읽기 중 무엇을 보여줄지를 서버가 정해서 내려준다</a:t>
+                      </a:r>
+                      <a:endParaRPr lang="en-US" sz="1050" dirty="0">
+                        <a:latin typeface="Pretendard" charset="0"/>
+                        <a:ea typeface="Pretendard" charset="0"/>
+                        <a:cs typeface="Pretendard" charset="0"/>
+                      </a:endParaRPr>
+                    </a:p>
+                    <a:p>
+                      <a:pPr indent="0" marL="0">
+                        <a:buNone/>
+                      </a:pPr>
+                      <a:r>
+                        <a:rPr lang="en-US" sz="1050" dirty="0">
+                          <a:solidFill>
+                            <a:srgbClr val="55524B"/>
+                          </a:solidFill>
+                          <a:latin typeface="Pretendard" pitchFamily="34" charset="0"/>
+                          <a:ea typeface="Pretendard" pitchFamily="34" charset="-122"/>
+                          <a:cs typeface="Pretendard" pitchFamily="34" charset="-120"/>
+                        </a:rPr>
+                        <a:t>화면마다 따로 판단하면 규칙이 흩어진다</a:t>
+                      </a:r>
+                      <a:endParaRPr lang="en-US" sz="1050" dirty="0">
+                        <a:latin typeface="Pretendard" charset="0"/>
+                        <a:ea typeface="Pretendard" charset="0"/>
+                        <a:cs typeface="Pretendard" charset="0"/>
+                      </a:endParaRPr>
+                    </a:p>
+                  </a:txBody>
+                  <a:tcPr marL="101600" marR="101600" marT="76200" marB="76200" anchor="ctr">
+                    <a:lnL w="0" cap="flat" cmpd="sng" algn="ctr">
+                      <a:noFill/>
+                    </a:lnL>
+                    <a:lnR w="0" cap="flat" cmpd="sng" algn="ctr">
+                      <a:noFill/>
+                    </a:lnR>
+                    <a:lnT w="0" cap="flat" cmpd="sng" algn="ctr">
+                      <a:noFill/>
+                    </a:lnT>
+                    <a:lnB w="6350" cap="flat" cmpd="sng" algn="ctr">
+                      <a:solidFill>
+                        <a:srgbClr val="E6E0D4"/>
+                      </a:solidFill>
+                      <a:prstDash val="solid"/>
+                      <a:round/>
+                      <a:headEnd type="none" w="med" len="med"/>
+                      <a:tailEnd type="none" w="med" len="med"/>
+                    </a:lnB>
+                  </a:tcPr>
+                </a:tc>
+              </a:tr>
+            </a:tbl>
+          </a:graphicData>
+        </a:graphic>
+      </p:graphicFrame>
+      <p:pic>
+        <p:nvPicPr>
+          <p:cNvPr id="7" name="Image 0" descr="/Users/hwangjaewon/skala-workspace/skala-webservice-mini/assets/swagger_handover.png">    </p:cNvPr>
+          <p:cNvPicPr>
+            <a:picLocks noChangeAspect="1"/>
+          </p:cNvPicPr>
+          <p:nvPr/>
+        </p:nvPicPr>
+        <p:blipFill>
+          <a:blip r:embed="rId1"/>
+          <a:stretch>
+            <a:fillRect/>
+          </a:stretch>
+        </p:blipFill>
+        <p:spPr>
+          <a:xfrm>
+            <a:off x="5852160" y="1170432"/>
+            <a:ext cx="2743200" cy="2651760"/>
+          </a:xfrm>
+          <a:prstGeom prst="rect">
+            <a:avLst/>
+          </a:prstGeom>
+        </p:spPr>
+      </p:pic>
+      <p:sp>
+        <p:nvSpPr>
+          <p:cNvPr id="8" name="Shape 4"/>
+          <p:cNvSpPr/>
+          <p:nvPr/>
+        </p:nvSpPr>
+        <p:spPr>
+          <a:xfrm>
+            <a:off x="5852160" y="1170432"/>
+            <a:ext cx="2743200" cy="2651760"/>
+          </a:xfrm>
+          <a:prstGeom prst="rect">
+            <a:avLst/>
+          </a:prstGeom>
+          <a:ln w="9525">
+            <a:solidFill>
+              <a:srgbClr val="E6E0D4"/>
+            </a:solidFill>
+            <a:prstDash val="solid"/>
+          </a:ln>
+        </p:spPr>
+        <p:txBody>
+          <a:bodyPr/>
+          <a:p/>
+        </p:txBody>
+      </p:sp>
+      <p:sp>
+        <p:nvSpPr>
+          <p:cNvPr id="9" name="Text 5"/>
+          <p:cNvSpPr txBox="1"/>
+          <p:nvPr/>
+        </p:nvSpPr>
+        <p:spPr>
+          <a:xfrm>
+            <a:off x="5852160" y="3895344"/>
+            <a:ext cx="2743200" cy="256032"/>
+          </a:xfrm>
+          <a:prstGeom prst="rect">
+            <a:avLst/>
+          </a:prstGeom>
+          <a:noFill/>
+          <a:ln/>
+        </p:spPr>
+        <p:txBody>
+          <a:bodyPr wrap="square" lIns="0" tIns="0" rIns="0" bIns="0" rtlCol="0" anchor="ctr"/>
+          <a:lstStyle/>
+          <a:p>
+            <a:pPr indent="0" marL="0">
+              <a:buNone/>
+            </a:pPr>
+            <a:r>
+              <a:rPr lang="en-US" sz="950" dirty="0">
+                <a:solidFill>
+                  <a:srgbClr val="8A867C"/>
+                </a:solidFill>
+                <a:latin typeface="Pretendard" pitchFamily="34" charset="0"/>
+                <a:ea typeface="Pretendard" pitchFamily="34" charset="-122"/>
+                <a:cs typeface="Pretendard" pitchFamily="34" charset="-120"/>
+              </a:rPr>
+              <a:t>인계 작성 요청. 받을 사람 칸이 없다</a:t>
+            </a:r>
+            <a:endParaRPr lang="en-US" sz="950" dirty="0"/>
+          </a:p>
+        </p:txBody>
+      </p:sp>
+      <p:sp>
+        <p:nvSpPr>
+          <p:cNvPr id="10" name="Shape 6"/>
+          <p:cNvSpPr/>
+          <p:nvPr/>
+        </p:nvSpPr>
+        <p:spPr>
+          <a:xfrm>
+            <a:off x="548640" y="4576572"/>
+            <a:ext cx="8046720" cy="0"/>
+          </a:xfrm>
+          <a:prstGeom prst="line">
+            <a:avLst/>
+          </a:prstGeom>
+          <a:noFill/>
+          <a:ln w="6350">
+            <a:solidFill>
+              <a:srgbClr val="E6E0D4"/>
+            </a:solidFill>
+            <a:prstDash val="solid"/>
+          </a:ln>
+        </p:spPr>
+        <p:txBody>
+          <a:bodyPr/>
+          <a:p/>
+        </p:txBody>
+      </p:sp>
+      <p:sp>
+        <p:nvSpPr>
+          <p:cNvPr id="11" name="Text 7"/>
+          <p:cNvSpPr txBox="1"/>
+          <p:nvPr/>
+        </p:nvSpPr>
+        <p:spPr>
+          <a:xfrm>
+            <a:off x="548640" y="4613148"/>
+            <a:ext cx="8046720" cy="201168"/>
+          </a:xfrm>
+          <a:prstGeom prst="rect">
+            <a:avLst/>
+          </a:prstGeom>
+          <a:noFill/>
+          <a:ln/>
+        </p:spPr>
+        <p:txBody>
+          <a:bodyPr wrap="square" lIns="0" tIns="0" rIns="0" bIns="0" rtlCol="0" anchor="ctr"/>
+          <a:lstStyle/>
+          <a:p>
+            <a:pPr indent="0" marL="0">
+              <a:buNone/>
+            </a:pPr>
+            <a:r>
+              <a:rPr lang="en-US" sz="900" dirty="0">
+                <a:solidFill>
+                  <a:srgbClr val="8A867C"/>
+                </a:solidFill>
+                <a:latin typeface="Pretendard" pitchFamily="34" charset="0"/>
+                <a:ea typeface="Pretendard" pitchFamily="34" charset="-122"/>
+                <a:cs typeface="Pretendard" pitchFamily="34" charset="-120"/>
+              </a:rPr>
+              <a:t>화면이 요청에 넣는 번호는 반드시 어떤 조회 API 가 돌려준 값이어야 한다. 이 규칙이 없어 생긴 구멍을 검증 단계에서 찾았다</a:t>
+            </a:r>
+            <a:endParaRPr lang="en-US" sz="900" dirty="0"/>
+          </a:p>
+        </p:txBody>
+      </p:sp>
+    </p:spTree>
+  </p:cSld>
+  <p:clrMapOvr>
+    <a:masterClrMapping/>
+  </p:clrMapOvr>
+</p:sld>
+</file>
+
 <file path=ppt/slides/slide34.xml><?xml version="1.0" encoding="utf-8"?>
 <p:sld xmlns:a="http://schemas.openxmlformats.org/drawingml/2006/main" xmlns:r="http://schemas.openxmlformats.org/officeDocument/2006/relationships" xmlns:p="http://schemas.openxmlformats.org/presentationml/2006/main">
   <p:cSld name="Slide 34">
@@ -10490,7 +17288,7 @@
                 <a:ea typeface="Pretendard Medium" pitchFamily="34" charset="-122"/>
                 <a:cs typeface="Pretendard Medium" pitchFamily="34" charset="-120"/>
               </a:rPr>
-              <a:t>11</a:t>
+              <a:t>16</a:t>
             </a:r>
             <a:endParaRPr lang="en-US" sz="800" dirty="0"/>
           </a:p>
@@ -11639,6 +18437,761 @@
 </p:sld>
 </file>
 
+<file path=ppt/slides/slide36.xml><?xml version="1.0" encoding="utf-8"?>
+<p:sld xmlns:a="http://schemas.openxmlformats.org/drawingml/2006/main" xmlns:r="http://schemas.openxmlformats.org/officeDocument/2006/relationships" xmlns:p="http://schemas.openxmlformats.org/presentationml/2006/main">
+  <p:cSld name="Slide 36">
+    <p:bg>
+      <p:bgPr>
+        <a:solidFill>
+          <a:srgbClr val="FBF8F2"/>
+        </a:solidFill>
+      </p:bgPr>
+    </p:bg>
+    <p:spTree>
+      <p:nvGrpSpPr>
+        <p:cNvPr id="1" name=""/>
+        <p:cNvGrpSpPr/>
+        <p:nvPr/>
+      </p:nvGrpSpPr>
+      <p:grpSpPr>
+        <a:xfrm>
+          <a:off x="0" y="0"/>
+          <a:ext cx="0" cy="0"/>
+          <a:chOff x="0" y="0"/>
+          <a:chExt cx="0" cy="0"/>
+        </a:xfrm>
+      </p:grpSpPr>
+      <p:sp>
+        <p:nvSpPr>
+          <p:cNvPr id="2" name="Text 0"/>
+          <p:cNvSpPr txBox="1"/>
+          <p:nvPr/>
+        </p:nvSpPr>
+        <p:spPr>
+          <a:xfrm>
+            <a:off x="8138160" y="4832604"/>
+            <a:ext cx="457200" cy="182880"/>
+          </a:xfrm>
+          <a:prstGeom prst="rect">
+            <a:avLst/>
+          </a:prstGeom>
+          <a:noFill/>
+          <a:ln/>
+        </p:spPr>
+        <p:txBody>
+          <a:bodyPr wrap="square" lIns="0" tIns="0" rIns="0" bIns="0" rtlCol="0" anchor="ctr"/>
+          <a:lstStyle/>
+          <a:p>
+            <a:pPr algn="r" indent="0" marL="0">
+              <a:buNone/>
+            </a:pPr>
+            <a:r>
+              <a:rPr lang="en-US" sz="800" dirty="0">
+                <a:solidFill>
+                  <a:srgbClr val="8A867C"/>
+                </a:solidFill>
+                <a:latin typeface="Pretendard Medium" pitchFamily="34" charset="0"/>
+                <a:ea typeface="Pretendard Medium" pitchFamily="34" charset="-122"/>
+                <a:cs typeface="Pretendard Medium" pitchFamily="34" charset="-120"/>
+              </a:rPr>
+              <a:t>17</a:t>
+            </a:r>
+            <a:endParaRPr lang="en-US" sz="800" dirty="0"/>
+          </a:p>
+        </p:txBody>
+      </p:sp>
+      <p:sp>
+        <p:nvSpPr>
+          <p:cNvPr id="3" name="Text 1"/>
+          <p:cNvSpPr txBox="1"/>
+          <p:nvPr/>
+        </p:nvSpPr>
+        <p:spPr>
+          <a:xfrm>
+            <a:off x="548640" y="4832604"/>
+            <a:ext cx="4572000" cy="182880"/>
+          </a:xfrm>
+          <a:prstGeom prst="rect">
+            <a:avLst/>
+          </a:prstGeom>
+          <a:noFill/>
+          <a:ln/>
+        </p:spPr>
+        <p:txBody>
+          <a:bodyPr wrap="square" lIns="0" tIns="0" rIns="0" bIns="0" rtlCol="0" anchor="ctr"/>
+          <a:lstStyle/>
+          <a:p>
+            <a:pPr indent="0" marL="0">
+              <a:buNone/>
+            </a:pPr>
+            <a:r>
+              <a:rPr lang="en-US" sz="800" dirty="0">
+                <a:solidFill>
+                  <a:srgbClr val="8A867C"/>
+                </a:solidFill>
+                <a:latin typeface="Pretendard Medium" pitchFamily="34" charset="0"/>
+                <a:ea typeface="Pretendard Medium" pitchFamily="34" charset="-122"/>
+                <a:cs typeface="Pretendard Medium" pitchFamily="34" charset="-120"/>
+              </a:rPr>
+              <a:t>08  고민한 것, 못 한 것</a:t>
+            </a:r>
+            <a:endParaRPr lang="en-US" sz="800" dirty="0"/>
+          </a:p>
+        </p:txBody>
+      </p:sp>
+      <p:sp>
+        <p:nvSpPr>
+          <p:cNvPr id="4" name="Text 2"/>
+          <p:cNvSpPr txBox="1"/>
+          <p:nvPr/>
+        </p:nvSpPr>
+        <p:spPr>
+          <a:xfrm>
+            <a:off x="548640" y="292608"/>
+            <a:ext cx="2331720" cy="1188720"/>
+          </a:xfrm>
+          <a:prstGeom prst="rect">
+            <a:avLst/>
+          </a:prstGeom>
+          <a:noFill/>
+          <a:ln/>
+        </p:spPr>
+        <p:txBody>
+          <a:bodyPr wrap="square" lIns="0" tIns="0" rIns="0" bIns="0" rtlCol="0" anchor="t"/>
+          <a:lstStyle/>
+          <a:p>
+            <a:pPr indent="0" marL="0">
+              <a:lnSpc>
+                <a:spcPct val="105000"/>
+              </a:lnSpc>
+              <a:buNone/>
+            </a:pPr>
+            <a:r>
+              <a:rPr lang="en-US" sz="2200" spc="-60" kern="0" dirty="0">
+                <a:solidFill>
+                  <a:srgbClr val="2A2926"/>
+                </a:solidFill>
+                <a:latin typeface="Pretendard ExtraBold" pitchFamily="34" charset="0"/>
+                <a:ea typeface="Pretendard ExtraBold" pitchFamily="34" charset="-122"/>
+                <a:cs typeface="Pretendard ExtraBold" pitchFamily="34" charset="-120"/>
+              </a:rPr>
+              <a:t>못 한 것</a:t>
+            </a:r>
+            <a:endParaRPr lang="en-US" sz="2200" dirty="0"/>
+          </a:p>
+        </p:txBody>
+      </p:sp>
+      <p:sp>
+        <p:nvSpPr>
+          <p:cNvPr id="5" name="Text 3"/>
+          <p:cNvSpPr txBox="1"/>
+          <p:nvPr/>
+        </p:nvSpPr>
+        <p:spPr>
+          <a:xfrm>
+            <a:off x="3200400" y="365760"/>
+            <a:ext cx="457200" cy="864108"/>
+          </a:xfrm>
+          <a:prstGeom prst="rect">
+            <a:avLst/>
+          </a:prstGeom>
+          <a:noFill/>
+          <a:ln/>
+        </p:spPr>
+        <p:txBody>
+          <a:bodyPr wrap="square" lIns="0" tIns="0" rIns="0" bIns="0" rtlCol="0" anchor="ctr"/>
+          <a:lstStyle/>
+          <a:p>
+            <a:pPr indent="0" marL="0">
+              <a:buNone/>
+            </a:pPr>
+            <a:r>
+              <a:rPr lang="en-US" sz="2400" dirty="0">
+                <a:solidFill>
+                  <a:srgbClr val="B9772E"/>
+                </a:solidFill>
+                <a:latin typeface="Pretendard Light" pitchFamily="34" charset="0"/>
+                <a:ea typeface="Pretendard Light" pitchFamily="34" charset="-122"/>
+                <a:cs typeface="Pretendard Light" pitchFamily="34" charset="-120"/>
+              </a:rPr>
+              <a:t>1</a:t>
+            </a:r>
+            <a:endParaRPr lang="en-US" sz="2400" dirty="0"/>
+          </a:p>
+        </p:txBody>
+      </p:sp>
+      <p:sp>
+        <p:nvSpPr>
+          <p:cNvPr id="6" name="Text 4"/>
+          <p:cNvSpPr txBox="1"/>
+          <p:nvPr/>
+        </p:nvSpPr>
+        <p:spPr>
+          <a:xfrm>
+            <a:off x="3703320" y="365760"/>
+            <a:ext cx="4892040" cy="864108"/>
+          </a:xfrm>
+          <a:prstGeom prst="rect">
+            <a:avLst/>
+          </a:prstGeom>
+          <a:noFill/>
+          <a:ln/>
+        </p:spPr>
+        <p:txBody>
+          <a:bodyPr wrap="square" lIns="0" tIns="0" rIns="0" bIns="0" rtlCol="0" anchor="ctr"/>
+          <a:lstStyle/>
+          <a:p>
+            <a:pPr indent="0" marL="0">
+              <a:lnSpc>
+                <a:spcPct val="115000"/>
+              </a:lnSpc>
+              <a:buNone/>
+            </a:pPr>
+            <a:r>
+              <a:rPr lang="en-US" sz="1200" dirty="0">
+                <a:solidFill>
+                  <a:srgbClr val="2A2926"/>
+                </a:solidFill>
+                <a:latin typeface="Pretendard SemiBold" pitchFamily="34" charset="0"/>
+                <a:ea typeface="Pretendard SemiBold" pitchFamily="34" charset="-122"/>
+                <a:cs typeface="Pretendard SemiBold" pitchFamily="34" charset="-120"/>
+              </a:rPr>
+              <a:t>병원 전산(EMR)과 연결이 없다
+</a:t>
+            </a:r>
+            <a:pPr indent="0" marL="0">
+              <a:lnSpc>
+                <a:spcPct val="115000"/>
+              </a:lnSpc>
+              <a:buNone/>
+            </a:pPr>
+            <a:r>
+              <a:rPr lang="en-US" sz="1000" dirty="0">
+                <a:solidFill>
+                  <a:srgbClr val="55524B"/>
+                </a:solidFill>
+                <a:latin typeface="Pretendard" pitchFamily="34" charset="0"/>
+                <a:ea typeface="Pretendard" pitchFamily="34" charset="-122"/>
+                <a:cs typeface="Pretendard" pitchFamily="34" charset="-120"/>
+              </a:rPr>
+              <a:t>공식 의무기록은 병원 전산이 맡고, 이 설계는 인계 메모만. 실제로 대체되는지는 아직 확인 전이라 같이 쓰면 두 번 입력하게 된다</a:t>
+            </a:r>
+            <a:endParaRPr lang="en-US" sz="1200" dirty="0"/>
+          </a:p>
+        </p:txBody>
+      </p:sp>
+      <p:sp>
+        <p:nvSpPr>
+          <p:cNvPr id="7" name="Shape 5"/>
+          <p:cNvSpPr/>
+          <p:nvPr/>
+        </p:nvSpPr>
+        <p:spPr>
+          <a:xfrm>
+            <a:off x="3200400" y="1229868"/>
+            <a:ext cx="5394960" cy="0"/>
+          </a:xfrm>
+          <a:prstGeom prst="line">
+            <a:avLst/>
+          </a:prstGeom>
+          <a:noFill/>
+          <a:ln w="6350">
+            <a:solidFill>
+              <a:srgbClr val="E6E0D4"/>
+            </a:solidFill>
+            <a:prstDash val="solid"/>
+          </a:ln>
+        </p:spPr>
+        <p:txBody>
+          <a:bodyPr/>
+          <a:p/>
+        </p:txBody>
+      </p:sp>
+      <p:sp>
+        <p:nvSpPr>
+          <p:cNvPr id="8" name="Text 6"/>
+          <p:cNvSpPr txBox="1"/>
+          <p:nvPr/>
+        </p:nvSpPr>
+        <p:spPr>
+          <a:xfrm>
+            <a:off x="3200400" y="1229868"/>
+            <a:ext cx="457200" cy="864108"/>
+          </a:xfrm>
+          <a:prstGeom prst="rect">
+            <a:avLst/>
+          </a:prstGeom>
+          <a:noFill/>
+          <a:ln/>
+        </p:spPr>
+        <p:txBody>
+          <a:bodyPr wrap="square" lIns="0" tIns="0" rIns="0" bIns="0" rtlCol="0" anchor="ctr"/>
+          <a:lstStyle/>
+          <a:p>
+            <a:pPr indent="0" marL="0">
+              <a:buNone/>
+            </a:pPr>
+            <a:r>
+              <a:rPr lang="en-US" sz="2400" dirty="0">
+                <a:solidFill>
+                  <a:srgbClr val="B9772E"/>
+                </a:solidFill>
+                <a:latin typeface="Pretendard Light" pitchFamily="34" charset="0"/>
+                <a:ea typeface="Pretendard Light" pitchFamily="34" charset="-122"/>
+                <a:cs typeface="Pretendard Light" pitchFamily="34" charset="-120"/>
+              </a:rPr>
+              <a:t>2</a:t>
+            </a:r>
+            <a:endParaRPr lang="en-US" sz="2400" dirty="0"/>
+          </a:p>
+        </p:txBody>
+      </p:sp>
+      <p:sp>
+        <p:nvSpPr>
+          <p:cNvPr id="9" name="Text 7"/>
+          <p:cNvSpPr txBox="1"/>
+          <p:nvPr/>
+        </p:nvSpPr>
+        <p:spPr>
+          <a:xfrm>
+            <a:off x="3703320" y="1229868"/>
+            <a:ext cx="4892040" cy="864108"/>
+          </a:xfrm>
+          <a:prstGeom prst="rect">
+            <a:avLst/>
+          </a:prstGeom>
+          <a:noFill/>
+          <a:ln/>
+        </p:spPr>
+        <p:txBody>
+          <a:bodyPr wrap="square" lIns="0" tIns="0" rIns="0" bIns="0" rtlCol="0" anchor="ctr"/>
+          <a:lstStyle/>
+          <a:p>
+            <a:pPr indent="0" marL="0">
+              <a:lnSpc>
+                <a:spcPct val="115000"/>
+              </a:lnSpc>
+              <a:buNone/>
+            </a:pPr>
+            <a:r>
+              <a:rPr lang="en-US" sz="1200" dirty="0">
+                <a:solidFill>
+                  <a:srgbClr val="2A2926"/>
+                </a:solidFill>
+                <a:latin typeface="Pretendard SemiBold" pitchFamily="34" charset="0"/>
+                <a:ea typeface="Pretendard SemiBold" pitchFamily="34" charset="-122"/>
+                <a:cs typeface="Pretendard SemiBold" pitchFamily="34" charset="-120"/>
+              </a:rPr>
+              <a:t>요약을 성의 있게 썼는지는 못 본다
+</a:t>
+            </a:r>
+            <a:pPr indent="0" marL="0">
+              <a:lnSpc>
+                <a:spcPct val="115000"/>
+              </a:lnSpc>
+              <a:buNone/>
+            </a:pPr>
+            <a:r>
+              <a:rPr lang="en-US" sz="1000" dirty="0">
+                <a:solidFill>
+                  <a:srgbClr val="55524B"/>
+                </a:solidFill>
+                <a:latin typeface="Pretendard" pitchFamily="34" charset="0"/>
+                <a:ea typeface="Pretendard" pitchFamily="34" charset="-122"/>
+                <a:cs typeface="Pretendard" pitchFamily="34" charset="-120"/>
+              </a:rPr>
+              <a:t>칸이 비었는지만 검사. 한 글자만 적어도 '확인됨'이 된다. 남기는 건 "누가 언제 자기 말로 적었는가"까지</a:t>
+            </a:r>
+            <a:endParaRPr lang="en-US" sz="1200" dirty="0"/>
+          </a:p>
+        </p:txBody>
+      </p:sp>
+      <p:sp>
+        <p:nvSpPr>
+          <p:cNvPr id="10" name="Shape 8"/>
+          <p:cNvSpPr/>
+          <p:nvPr/>
+        </p:nvSpPr>
+        <p:spPr>
+          <a:xfrm>
+            <a:off x="3200400" y="2093976"/>
+            <a:ext cx="5394960" cy="0"/>
+          </a:xfrm>
+          <a:prstGeom prst="line">
+            <a:avLst/>
+          </a:prstGeom>
+          <a:noFill/>
+          <a:ln w="6350">
+            <a:solidFill>
+              <a:srgbClr val="E6E0D4"/>
+            </a:solidFill>
+            <a:prstDash val="solid"/>
+          </a:ln>
+        </p:spPr>
+        <p:txBody>
+          <a:bodyPr/>
+          <a:p/>
+        </p:txBody>
+      </p:sp>
+      <p:sp>
+        <p:nvSpPr>
+          <p:cNvPr id="11" name="Text 9"/>
+          <p:cNvSpPr txBox="1"/>
+          <p:nvPr/>
+        </p:nvSpPr>
+        <p:spPr>
+          <a:xfrm>
+            <a:off x="3200400" y="2093976"/>
+            <a:ext cx="457200" cy="864108"/>
+          </a:xfrm>
+          <a:prstGeom prst="rect">
+            <a:avLst/>
+          </a:prstGeom>
+          <a:noFill/>
+          <a:ln/>
+        </p:spPr>
+        <p:txBody>
+          <a:bodyPr wrap="square" lIns="0" tIns="0" rIns="0" bIns="0" rtlCol="0" anchor="ctr"/>
+          <a:lstStyle/>
+          <a:p>
+            <a:pPr indent="0" marL="0">
+              <a:buNone/>
+            </a:pPr>
+            <a:r>
+              <a:rPr lang="en-US" sz="2400" dirty="0">
+                <a:solidFill>
+                  <a:srgbClr val="B9772E"/>
+                </a:solidFill>
+                <a:latin typeface="Pretendard Light" pitchFamily="34" charset="0"/>
+                <a:ea typeface="Pretendard Light" pitchFamily="34" charset="-122"/>
+                <a:cs typeface="Pretendard Light" pitchFamily="34" charset="-120"/>
+              </a:rPr>
+              <a:t>3</a:t>
+            </a:r>
+            <a:endParaRPr lang="en-US" sz="2400" dirty="0"/>
+          </a:p>
+        </p:txBody>
+      </p:sp>
+      <p:sp>
+        <p:nvSpPr>
+          <p:cNvPr id="12" name="Text 10"/>
+          <p:cNvSpPr txBox="1"/>
+          <p:nvPr/>
+        </p:nvSpPr>
+        <p:spPr>
+          <a:xfrm>
+            <a:off x="3703320" y="2093976"/>
+            <a:ext cx="4892040" cy="864108"/>
+          </a:xfrm>
+          <a:prstGeom prst="rect">
+            <a:avLst/>
+          </a:prstGeom>
+          <a:noFill/>
+          <a:ln/>
+        </p:spPr>
+        <p:txBody>
+          <a:bodyPr wrap="square" lIns="0" tIns="0" rIns="0" bIns="0" rtlCol="0" anchor="ctr"/>
+          <a:lstStyle/>
+          <a:p>
+            <a:pPr indent="0" marL="0">
+              <a:lnSpc>
+                <a:spcPct val="115000"/>
+              </a:lnSpc>
+              <a:buNone/>
+            </a:pPr>
+            <a:r>
+              <a:rPr lang="en-US" sz="1200" dirty="0">
+                <a:solidFill>
+                  <a:srgbClr val="2A2926"/>
+                </a:solidFill>
+                <a:latin typeface="Pretendard SemiBold" pitchFamily="34" charset="0"/>
+                <a:ea typeface="Pretendard SemiBold" pitchFamily="34" charset="-122"/>
+                <a:cs typeface="Pretendard SemiBold" pitchFamily="34" charset="-120"/>
+              </a:rPr>
+              <a:t>차지가 인계를 안 써도 못 막는다
+</a:t>
+            </a:r>
+            <a:pPr indent="0" marL="0">
+              <a:lnSpc>
+                <a:spcPct val="115000"/>
+              </a:lnSpc>
+              <a:buNone/>
+            </a:pPr>
+            <a:r>
+              <a:rPr lang="en-US" sz="1000" dirty="0">
+                <a:solidFill>
+                  <a:srgbClr val="55524B"/>
+                </a:solidFill>
+                <a:latin typeface="Pretendard" pitchFamily="34" charset="0"/>
+                <a:ea typeface="Pretendard" pitchFamily="34" charset="-122"/>
+                <a:cs typeface="Pretendard" pitchFamily="34" charset="-120"/>
+              </a:rPr>
+              <a:t>액팅이 "이건 적어 주세요"라고 한 걸 반영했는지 이력으로 남기는 건 범위 밖</a:t>
+            </a:r>
+            <a:endParaRPr lang="en-US" sz="1200" dirty="0"/>
+          </a:p>
+        </p:txBody>
+      </p:sp>
+      <p:sp>
+        <p:nvSpPr>
+          <p:cNvPr id="13" name="Shape 11"/>
+          <p:cNvSpPr/>
+          <p:nvPr/>
+        </p:nvSpPr>
+        <p:spPr>
+          <a:xfrm>
+            <a:off x="3200400" y="2958084"/>
+            <a:ext cx="5394960" cy="0"/>
+          </a:xfrm>
+          <a:prstGeom prst="line">
+            <a:avLst/>
+          </a:prstGeom>
+          <a:noFill/>
+          <a:ln w="6350">
+            <a:solidFill>
+              <a:srgbClr val="E6E0D4"/>
+            </a:solidFill>
+            <a:prstDash val="solid"/>
+          </a:ln>
+        </p:spPr>
+        <p:txBody>
+          <a:bodyPr/>
+          <a:p/>
+        </p:txBody>
+      </p:sp>
+      <p:sp>
+        <p:nvSpPr>
+          <p:cNvPr id="14" name="Text 12"/>
+          <p:cNvSpPr txBox="1"/>
+          <p:nvPr/>
+        </p:nvSpPr>
+        <p:spPr>
+          <a:xfrm>
+            <a:off x="3200400" y="2958084"/>
+            <a:ext cx="457200" cy="864108"/>
+          </a:xfrm>
+          <a:prstGeom prst="rect">
+            <a:avLst/>
+          </a:prstGeom>
+          <a:noFill/>
+          <a:ln/>
+        </p:spPr>
+        <p:txBody>
+          <a:bodyPr wrap="square" lIns="0" tIns="0" rIns="0" bIns="0" rtlCol="0" anchor="ctr"/>
+          <a:lstStyle/>
+          <a:p>
+            <a:pPr indent="0" marL="0">
+              <a:buNone/>
+            </a:pPr>
+            <a:r>
+              <a:rPr lang="en-US" sz="2400" dirty="0">
+                <a:solidFill>
+                  <a:srgbClr val="B9772E"/>
+                </a:solidFill>
+                <a:latin typeface="Pretendard Light" pitchFamily="34" charset="0"/>
+                <a:ea typeface="Pretendard Light" pitchFamily="34" charset="-122"/>
+                <a:cs typeface="Pretendard Light" pitchFamily="34" charset="-120"/>
+              </a:rPr>
+              <a:t>4</a:t>
+            </a:r>
+            <a:endParaRPr lang="en-US" sz="2400" dirty="0"/>
+          </a:p>
+        </p:txBody>
+      </p:sp>
+      <p:sp>
+        <p:nvSpPr>
+          <p:cNvPr id="15" name="Text 13"/>
+          <p:cNvSpPr txBox="1"/>
+          <p:nvPr/>
+        </p:nvSpPr>
+        <p:spPr>
+          <a:xfrm>
+            <a:off x="3703320" y="2958084"/>
+            <a:ext cx="4892040" cy="864108"/>
+          </a:xfrm>
+          <a:prstGeom prst="rect">
+            <a:avLst/>
+          </a:prstGeom>
+          <a:noFill/>
+          <a:ln/>
+        </p:spPr>
+        <p:txBody>
+          <a:bodyPr wrap="square" lIns="0" tIns="0" rIns="0" bIns="0" rtlCol="0" anchor="ctr"/>
+          <a:lstStyle/>
+          <a:p>
+            <a:pPr indent="0" marL="0">
+              <a:lnSpc>
+                <a:spcPct val="115000"/>
+              </a:lnSpc>
+              <a:buNone/>
+            </a:pPr>
+            <a:r>
+              <a:rPr lang="en-US" sz="1200" dirty="0">
+                <a:solidFill>
+                  <a:srgbClr val="2A2926"/>
+                </a:solidFill>
+                <a:latin typeface="Pretendard SemiBold" pitchFamily="34" charset="0"/>
+                <a:ea typeface="Pretendard SemiBold" pitchFamily="34" charset="-122"/>
+                <a:cs typeface="Pretendard SemiBold" pitchFamily="34" charset="-120"/>
+              </a:rPr>
+              <a:t>확인해 준 분이 한 명
+</a:t>
+            </a:r>
+            <a:pPr indent="0" marL="0">
+              <a:lnSpc>
+                <a:spcPct val="115000"/>
+              </a:lnSpc>
+              <a:buNone/>
+            </a:pPr>
+            <a:r>
+              <a:rPr lang="en-US" sz="1000" dirty="0">
+                <a:solidFill>
+                  <a:srgbClr val="55524B"/>
+                </a:solidFill>
+                <a:latin typeface="Pretendard" pitchFamily="34" charset="0"/>
+                <a:ea typeface="Pretendard" pitchFamily="34" charset="-122"/>
+                <a:cs typeface="Pretendard" pitchFamily="34" charset="-120"/>
+              </a:rPr>
+              <a:t>간호사 화면은 한 분께 확인받았고, 수간호사 화면은 아직 가설</a:t>
+            </a:r>
+            <a:endParaRPr lang="en-US" sz="1200" dirty="0"/>
+          </a:p>
+        </p:txBody>
+      </p:sp>
+      <p:sp>
+        <p:nvSpPr>
+          <p:cNvPr id="16" name="Shape 14"/>
+          <p:cNvSpPr/>
+          <p:nvPr/>
+        </p:nvSpPr>
+        <p:spPr>
+          <a:xfrm>
+            <a:off x="3200400" y="3822192"/>
+            <a:ext cx="5394960" cy="0"/>
+          </a:xfrm>
+          <a:prstGeom prst="line">
+            <a:avLst/>
+          </a:prstGeom>
+          <a:noFill/>
+          <a:ln w="6350">
+            <a:solidFill>
+              <a:srgbClr val="E6E0D4"/>
+            </a:solidFill>
+            <a:prstDash val="solid"/>
+          </a:ln>
+        </p:spPr>
+        <p:txBody>
+          <a:bodyPr/>
+          <a:p/>
+        </p:txBody>
+      </p:sp>
+      <p:sp>
+        <p:nvSpPr>
+          <p:cNvPr id="17" name="Text 15"/>
+          <p:cNvSpPr txBox="1"/>
+          <p:nvPr/>
+        </p:nvSpPr>
+        <p:spPr>
+          <a:xfrm>
+            <a:off x="3200400" y="3822192"/>
+            <a:ext cx="457200" cy="864108"/>
+          </a:xfrm>
+          <a:prstGeom prst="rect">
+            <a:avLst/>
+          </a:prstGeom>
+          <a:noFill/>
+          <a:ln/>
+        </p:spPr>
+        <p:txBody>
+          <a:bodyPr wrap="square" lIns="0" tIns="0" rIns="0" bIns="0" rtlCol="0" anchor="ctr"/>
+          <a:lstStyle/>
+          <a:p>
+            <a:pPr indent="0" marL="0">
+              <a:buNone/>
+            </a:pPr>
+            <a:r>
+              <a:rPr lang="en-US" sz="2400" dirty="0">
+                <a:solidFill>
+                  <a:srgbClr val="8A867C"/>
+                </a:solidFill>
+                <a:latin typeface="Pretendard Light" pitchFamily="34" charset="0"/>
+                <a:ea typeface="Pretendard Light" pitchFamily="34" charset="-122"/>
+                <a:cs typeface="Pretendard Light" pitchFamily="34" charset="-120"/>
+              </a:rPr>
+              <a:t>5</a:t>
+            </a:r>
+            <a:endParaRPr lang="en-US" sz="2400" dirty="0"/>
+          </a:p>
+        </p:txBody>
+      </p:sp>
+      <p:sp>
+        <p:nvSpPr>
+          <p:cNvPr id="18" name="Text 16"/>
+          <p:cNvSpPr txBox="1"/>
+          <p:nvPr/>
+        </p:nvSpPr>
+        <p:spPr>
+          <a:xfrm>
+            <a:off x="3703320" y="3822192"/>
+            <a:ext cx="4892040" cy="864108"/>
+          </a:xfrm>
+          <a:prstGeom prst="rect">
+            <a:avLst/>
+          </a:prstGeom>
+          <a:noFill/>
+          <a:ln/>
+        </p:spPr>
+        <p:txBody>
+          <a:bodyPr wrap="square" lIns="0" tIns="0" rIns="0" bIns="0" rtlCol="0" anchor="ctr"/>
+          <a:lstStyle/>
+          <a:p>
+            <a:pPr indent="0" marL="0">
+              <a:lnSpc>
+                <a:spcPct val="115000"/>
+              </a:lnSpc>
+              <a:buNone/>
+            </a:pPr>
+            <a:r>
+              <a:rPr lang="en-US" sz="1200" dirty="0">
+                <a:solidFill>
+                  <a:srgbClr val="2A2926"/>
+                </a:solidFill>
+                <a:latin typeface="Pretendard SemiBold" pitchFamily="34" charset="0"/>
+                <a:ea typeface="Pretendard SemiBold" pitchFamily="34" charset="-122"/>
+                <a:cs typeface="Pretendard SemiBold" pitchFamily="34" charset="-120"/>
+              </a:rPr>
+              <a:t>앞으로
+</a:t>
+            </a:r>
+            <a:pPr indent="0" marL="0">
+              <a:lnSpc>
+                <a:spcPct val="115000"/>
+              </a:lnSpc>
+              <a:buNone/>
+            </a:pPr>
+            <a:r>
+              <a:rPr lang="en-US" sz="1000" dirty="0">
+                <a:solidFill>
+                  <a:srgbClr val="55524B"/>
+                </a:solidFill>
+                <a:latin typeface="Pretendard" pitchFamily="34" charset="0"/>
+                <a:ea typeface="Pretendard" pitchFamily="34" charset="-122"/>
+                <a:cs typeface="Pretendard" pitchFamily="34" charset="-120"/>
+              </a:rPr>
+              <a:t>질문과 답변(참여자가 가장 먼저 요청한 것), 접근 기록, 팀원 명단, 역할 교환 이력. 누가 뭘 열어봤는지 남기는 기록이 없고, 같은 근무 팀원이 "오늘 우리 팀 차지가 누구인지" 보는 화면도 없다</a:t>
+            </a:r>
+            <a:endParaRPr lang="en-US" sz="1200" dirty="0"/>
+          </a:p>
+        </p:txBody>
+      </p:sp>
+    </p:spTree>
+  </p:cSld>
+  <p:clrMapOvr>
+    <a:masterClrMapping/>
+  </p:clrMapOvr>
+</p:sld>
+</file>
+
 <file path=ppt/slides/slide37.xml><?xml version="1.0" encoding="utf-8"?>
 <p:sld xmlns:a="http://schemas.openxmlformats.org/drawingml/2006/main" xmlns:r="http://schemas.openxmlformats.org/officeDocument/2006/relationships" xmlns:p="http://schemas.openxmlformats.org/presentationml/2006/main">
   <p:cSld name="Slide 37">
@@ -11696,7 +19249,7 @@
                 <a:ea typeface="Pretendard Medium" pitchFamily="34" charset="-122"/>
                 <a:cs typeface="Pretendard Medium" pitchFamily="34" charset="-120"/>
               </a:rPr>
-              <a:t>12</a:t>
+              <a:t>18</a:t>
             </a:r>
             <a:endParaRPr lang="en-US" sz="800" dirty="0"/>
           </a:p>
@@ -12559,7 +20112,7 @@
                 <a:ea typeface="Pretendard Medium" pitchFamily="34" charset="-122"/>
                 <a:cs typeface="Pretendard Medium" pitchFamily="34" charset="-120"/>
               </a:rPr>
-              <a:t>13</a:t>
+              <a:t>19</a:t>
             </a:r>
             <a:endParaRPr lang="en-US" sz="800" dirty="0"/>
           </a:p>
